--- a/docs/content/05-teaching-resources/slides/cyber-security/02-secure-design-and-layered-protection.pptx
+++ b/docs/content/05-teaching-resources/slides/cyber-security/02-secure-design-and-layered-protection.pptx
@@ -8,7 +8,7 @@
     <p:sldId id="256" r:id="rId7"/>
     <p:sldId id="257" r:id="rId8"/>
     <p:sldId id="258" r:id="rId9"/>
-    <p:sldId id="259" r:id="rId11"/>
+    <p:sldId id="259" r:id="rId10"/>
     <p:sldId id="260" r:id="rId12"/>
     <p:sldId id="261" r:id="rId13"/>
     <p:sldId id="262" r:id="rId14"/>
@@ -16,6 +16,12 @@
     <p:sldId id="264" r:id="rId16"/>
     <p:sldId id="265" r:id="rId17"/>
     <p:sldId id="266" r:id="rId18"/>
+    <p:sldId id="267" r:id="rId19"/>
+    <p:sldId id="268" r:id="rId20"/>
+    <p:sldId id="269" r:id="rId21"/>
+    <p:sldId id="270" r:id="rId22"/>
+    <p:sldId id="271" r:id="rId23"/>
+    <p:sldId id="272" r:id="rId24"/>
   </p:sldIdLst>
   <p:sldSz cx="12191695" cy="6858000" type="screen4x3"/>
   <p:notesSz cx="6858000" cy="9144000"/>
@@ -582,7 +588,22 @@
           <a:lstStyle/>
           <a:p>
             <a:r>
-              <a:t>Give students a few minutes to answer on mini whiteboards or paper, then reveal the answers on the next slide.</a:t>
+              <a:t>Answers:</a:t>
+            </a:r>
+          </a:p>
+          <a:p>
+            <a:r>
+              <a:t>1. Layered security so one failure doesn't compromise everything.</a:t>
+            </a:r>
+          </a:p>
+          <a:p>
+            <a:r>
+              <a:t>2. To roll back if the patch causes problems.</a:t>
+            </a:r>
+          </a:p>
+          <a:p>
+            <a:r>
+              <a:t>3. How far an attacker can move (lateral movement).</a:t>
             </a:r>
           </a:p>
         </p:txBody>
@@ -652,7 +673,22 @@
           <a:lstStyle/>
           <a:p>
             <a:r>
-              <a:t>Talk through any answers the class found difficult.</a:t>
+              <a:t>Answers:</a:t>
+            </a:r>
+          </a:p>
+          <a:p>
+            <a:r>
+              <a:t>1. Never trusting a user or device by default, even inside the network.</a:t>
+            </a:r>
+          </a:p>
+          <a:p>
+            <a:r>
+              <a:t>2. So logs survive if operational systems are compromised.</a:t>
+            </a:r>
+          </a:p>
+          <a:p>
+            <a:r>
+              <a:t>3. Stolen data can't identify people.</a:t>
             </a:r>
           </a:p>
         </p:txBody>
@@ -678,6 +714,231 @@
 </file>
 
 <file path=ppt/notesSlides/notesSlide4.xml><?xml version="1.0" encoding="utf-8"?>
+<p:notes xmlns:a="http://schemas.openxmlformats.org/drawingml/2006/main" xmlns:p="http://schemas.openxmlformats.org/presentationml/2006/main" xmlns:r="http://schemas.openxmlformats.org/officeDocument/2006/relationships">
+  <p:cSld>
+    <p:spTree>
+      <p:nvGrpSpPr>
+        <p:cNvPr id="1" name=""/>
+        <p:cNvGrpSpPr/>
+        <p:nvPr/>
+      </p:nvGrpSpPr>
+      <p:grpSpPr>
+        <a:xfrm>
+          <a:off x="0" y="0"/>
+          <a:ext cx="0" cy="0"/>
+          <a:chOff x="0" y="0"/>
+          <a:chExt cx="0" cy="0"/>
+        </a:xfrm>
+      </p:grpSpPr>
+      <p:sp>
+        <p:nvSpPr>
+          <p:cNvPr id="2" name="Slide Image Placeholder 1"/>
+          <p:cNvSpPr>
+            <a:spLocks noGrp="1"/>
+          </p:cNvSpPr>
+          <p:nvPr>
+            <p:ph type="sldImg" idx="2"/>
+          </p:nvPr>
+        </p:nvSpPr>
+        <p:spPr/>
+      </p:sp>
+      <p:sp>
+        <p:nvSpPr>
+          <p:cNvPr id="3" name="Notes Placeholder 2"/>
+          <p:cNvSpPr>
+            <a:spLocks noGrp="1"/>
+          </p:cNvSpPr>
+          <p:nvPr>
+            <p:ph type="body" idx="3" sz="quarter"/>
+          </p:nvPr>
+        </p:nvSpPr>
+        <p:spPr/>
+        <p:txBody>
+          <a:bodyPr/>
+          <a:lstStyle/>
+          <a:p>
+            <a:r>
+              <a:t>Answers:</a:t>
+            </a:r>
+          </a:p>
+          <a:p>
+            <a:r>
+              <a:t>1. In the registry.</a:t>
+            </a:r>
+          </a:p>
+          <a:p>
+            <a:r>
+              <a:t>2. They show what's active now, including malware.</a:t>
+            </a:r>
+          </a:p>
+          <a:p>
+            <a:r>
+              <a:t>3. APFS.</a:t>
+            </a:r>
+          </a:p>
+        </p:txBody>
+      </p:sp>
+      <p:sp>
+        <p:nvSpPr>
+          <p:cNvPr id="4" name="Slide Number Placeholder 3"/>
+          <p:cNvSpPr>
+            <a:spLocks noGrp="1"/>
+          </p:cNvSpPr>
+          <p:nvPr>
+            <p:ph type="sldNum" idx="5" sz="quarter"/>
+          </p:nvPr>
+        </p:nvSpPr>
+        <p:spPr/>
+      </p:sp>
+    </p:spTree>
+  </p:cSld>
+  <p:clrMapOvr>
+    <a:masterClrMapping/>
+  </p:clrMapOvr>
+</p:notes>
+</file>
+
+<file path=ppt/notesSlides/notesSlide5.xml><?xml version="1.0" encoding="utf-8"?>
+<p:notes xmlns:a="http://schemas.openxmlformats.org/drawingml/2006/main" xmlns:p="http://schemas.openxmlformats.org/presentationml/2006/main" xmlns:r="http://schemas.openxmlformats.org/officeDocument/2006/relationships">
+  <p:cSld>
+    <p:spTree>
+      <p:nvGrpSpPr>
+        <p:cNvPr id="1" name=""/>
+        <p:cNvGrpSpPr/>
+        <p:nvPr/>
+      </p:nvGrpSpPr>
+      <p:grpSpPr>
+        <a:xfrm>
+          <a:off x="0" y="0"/>
+          <a:ext cx="0" cy="0"/>
+          <a:chOff x="0" y="0"/>
+          <a:chExt cx="0" cy="0"/>
+        </a:xfrm>
+      </p:grpSpPr>
+      <p:sp>
+        <p:nvSpPr>
+          <p:cNvPr id="2" name="Slide Image Placeholder 1"/>
+          <p:cNvSpPr>
+            <a:spLocks noGrp="1"/>
+          </p:cNvSpPr>
+          <p:nvPr>
+            <p:ph type="sldImg" idx="2"/>
+          </p:nvPr>
+        </p:nvSpPr>
+        <p:spPr/>
+      </p:sp>
+      <p:sp>
+        <p:nvSpPr>
+          <p:cNvPr id="3" name="Notes Placeholder 2"/>
+          <p:cNvSpPr>
+            <a:spLocks noGrp="1"/>
+          </p:cNvSpPr>
+          <p:nvPr>
+            <p:ph type="body" idx="3" sz="quarter"/>
+          </p:nvPr>
+        </p:nvSpPr>
+        <p:spPr/>
+        <p:txBody>
+          <a:bodyPr/>
+          <a:lstStyle/>
+          <a:p>
+            <a:r>
+              <a:t>Give students a few minutes to answer on mini whiteboards or paper, then reveal the answers on the next slide.</a:t>
+            </a:r>
+          </a:p>
+        </p:txBody>
+      </p:sp>
+      <p:sp>
+        <p:nvSpPr>
+          <p:cNvPr id="4" name="Slide Number Placeholder 3"/>
+          <p:cNvSpPr>
+            <a:spLocks noGrp="1"/>
+          </p:cNvSpPr>
+          <p:nvPr>
+            <p:ph type="sldNum" idx="5" sz="quarter"/>
+          </p:nvPr>
+        </p:nvSpPr>
+        <p:spPr/>
+      </p:sp>
+    </p:spTree>
+  </p:cSld>
+  <p:clrMapOvr>
+    <a:masterClrMapping/>
+  </p:clrMapOvr>
+</p:notes>
+</file>
+
+<file path=ppt/notesSlides/notesSlide6.xml><?xml version="1.0" encoding="utf-8"?>
+<p:notes xmlns:a="http://schemas.openxmlformats.org/drawingml/2006/main" xmlns:p="http://schemas.openxmlformats.org/presentationml/2006/main" xmlns:r="http://schemas.openxmlformats.org/officeDocument/2006/relationships">
+  <p:cSld>
+    <p:spTree>
+      <p:nvGrpSpPr>
+        <p:cNvPr id="1" name=""/>
+        <p:cNvGrpSpPr/>
+        <p:nvPr/>
+      </p:nvGrpSpPr>
+      <p:grpSpPr>
+        <a:xfrm>
+          <a:off x="0" y="0"/>
+          <a:ext cx="0" cy="0"/>
+          <a:chOff x="0" y="0"/>
+          <a:chExt cx="0" cy="0"/>
+        </a:xfrm>
+      </p:grpSpPr>
+      <p:sp>
+        <p:nvSpPr>
+          <p:cNvPr id="2" name="Slide Image Placeholder 1"/>
+          <p:cNvSpPr>
+            <a:spLocks noGrp="1"/>
+          </p:cNvSpPr>
+          <p:nvPr>
+            <p:ph type="sldImg" idx="2"/>
+          </p:nvPr>
+        </p:nvSpPr>
+        <p:spPr/>
+      </p:sp>
+      <p:sp>
+        <p:nvSpPr>
+          <p:cNvPr id="3" name="Notes Placeholder 2"/>
+          <p:cNvSpPr>
+            <a:spLocks noGrp="1"/>
+          </p:cNvSpPr>
+          <p:nvPr>
+            <p:ph type="body" idx="3" sz="quarter"/>
+          </p:nvPr>
+        </p:nvSpPr>
+        <p:spPr/>
+        <p:txBody>
+          <a:bodyPr/>
+          <a:lstStyle/>
+          <a:p>
+            <a:r>
+              <a:t>Talk through any answers the class found difficult.</a:t>
+            </a:r>
+          </a:p>
+        </p:txBody>
+      </p:sp>
+      <p:sp>
+        <p:nvSpPr>
+          <p:cNvPr id="4" name="Slide Number Placeholder 3"/>
+          <p:cNvSpPr>
+            <a:spLocks noGrp="1"/>
+          </p:cNvSpPr>
+          <p:nvPr>
+            <p:ph type="sldNum" idx="5" sz="quarter"/>
+          </p:nvPr>
+        </p:nvSpPr>
+        <p:spPr/>
+      </p:sp>
+    </p:spTree>
+  </p:cSld>
+  <p:clrMapOvr>
+    <a:masterClrMapping/>
+  </p:clrMapOvr>
+</p:notes>
+</file>
+
+<file path=ppt/notesSlides/notesSlide7.xml><?xml version="1.0" encoding="utf-8"?>
 <p:notes xmlns:a="http://schemas.openxmlformats.org/drawingml/2006/main" xmlns:p="http://schemas.openxmlformats.org/presentationml/2006/main" xmlns:r="http://schemas.openxmlformats.org/officeDocument/2006/relationships">
   <p:cSld>
     <p:spTree>
@@ -4126,7 +4387,7 @@
                 </a:solidFill>
                 <a:latin typeface="Cambria"/>
               </a:rPr>
-              <a:t>Activity: Layer up</a:t>
+              <a:t>Operating systems and investigation</a:t>
             </a:r>
           </a:p>
         </p:txBody>
@@ -4193,6 +4454,3630 @@
                 <a:latin typeface="Calibri"/>
               </a:rPr>
               <a:t>10</a:t>
+            </a:r>
+          </a:p>
+        </p:txBody>
+      </p:sp>
+      <p:sp>
+        <p:nvSpPr>
+          <p:cNvPr id="6" name="Rounded Rectangle 5"/>
+          <p:cNvSpPr/>
+          <p:nvPr/>
+        </p:nvSpPr>
+        <p:spPr>
+          <a:xfrm>
+            <a:off x="548640" y="1600200"/>
+            <a:ext cx="5364327" cy="640080"/>
+          </a:xfrm>
+          <a:prstGeom prst="roundRect">
+            <a:avLst>
+              <a:gd name="adj" fmla="val 15000"/>
+            </a:avLst>
+          </a:prstGeom>
+          <a:solidFill>
+            <a:srgbClr val="03306E"/>
+          </a:solidFill>
+          <a:ln>
+            <a:noFill/>
+          </a:ln>
+          <a:effectLst/>
+        </p:spPr>
+        <p:style>
+          <a:lnRef idx="1">
+            <a:schemeClr val="accent1"/>
+          </a:lnRef>
+          <a:fillRef idx="3">
+            <a:schemeClr val="accent1"/>
+          </a:fillRef>
+          <a:effectRef idx="2">
+            <a:schemeClr val="accent1"/>
+          </a:effectRef>
+          <a:fontRef idx="minor">
+            <a:schemeClr val="lt1"/>
+          </a:fontRef>
+        </p:style>
+        <p:txBody>
+          <a:bodyPr rtlCol="0" anchor="ctr"/>
+          <a:lstStyle/>
+          <a:p/>
+        </p:txBody>
+      </p:sp>
+      <p:sp>
+        <p:nvSpPr>
+          <p:cNvPr id="7" name="TextBox 6"/>
+          <p:cNvSpPr txBox="1"/>
+          <p:nvPr/>
+        </p:nvSpPr>
+        <p:spPr>
+          <a:xfrm>
+            <a:off x="777240" y="1600200"/>
+            <a:ext cx="4907127" cy="640080"/>
+          </a:xfrm>
+          <a:prstGeom prst="rect">
+            <a:avLst/>
+          </a:prstGeom>
+          <a:noFill/>
+        </p:spPr>
+        <p:txBody>
+          <a:bodyPr wrap="square" anchor="ctr" lIns="0" rIns="0" tIns="0" bIns="0"/>
+          <a:lstStyle/>
+          <a:p>
+            <a:pPr algn="l"/>
+            <a:r>
+              <a:rPr sz="2000" b="1" i="0">
+                <a:solidFill>
+                  <a:srgbClr val="FFFFFF"/>
+                </a:solidFill>
+                <a:latin typeface="Calibri"/>
+              </a:rPr>
+              <a:t>OS types and functions</a:t>
+            </a:r>
+          </a:p>
+        </p:txBody>
+      </p:sp>
+      <p:sp>
+        <p:nvSpPr>
+          <p:cNvPr id="8" name="Rounded Rectangle 7"/>
+          <p:cNvSpPr/>
+          <p:nvPr/>
+        </p:nvSpPr>
+        <p:spPr>
+          <a:xfrm>
+            <a:off x="548640" y="2377440"/>
+            <a:ext cx="5364327" cy="3794760"/>
+          </a:xfrm>
+          <a:prstGeom prst="roundRect">
+            <a:avLst>
+              <a:gd name="adj" fmla="val 4000"/>
+            </a:avLst>
+          </a:prstGeom>
+          <a:solidFill>
+            <a:srgbClr val="EAF3FF"/>
+          </a:solidFill>
+          <a:ln>
+            <a:noFill/>
+          </a:ln>
+          <a:effectLst/>
+        </p:spPr>
+        <p:style>
+          <a:lnRef idx="1">
+            <a:schemeClr val="accent1"/>
+          </a:lnRef>
+          <a:fillRef idx="3">
+            <a:schemeClr val="accent1"/>
+          </a:fillRef>
+          <a:effectRef idx="2">
+            <a:schemeClr val="accent1"/>
+          </a:effectRef>
+          <a:fontRef idx="minor">
+            <a:schemeClr val="lt1"/>
+          </a:fontRef>
+        </p:style>
+        <p:txBody>
+          <a:bodyPr rtlCol="0" anchor="ctr"/>
+          <a:lstStyle/>
+          <a:p/>
+        </p:txBody>
+      </p:sp>
+      <p:sp>
+        <p:nvSpPr>
+          <p:cNvPr id="9" name="TextBox 8"/>
+          <p:cNvSpPr txBox="1"/>
+          <p:nvPr/>
+        </p:nvSpPr>
+        <p:spPr>
+          <a:xfrm>
+            <a:off x="822959" y="2606040"/>
+            <a:ext cx="4815687" cy="3337560"/>
+          </a:xfrm>
+          <a:prstGeom prst="rect">
+            <a:avLst/>
+          </a:prstGeom>
+          <a:noFill/>
+        </p:spPr>
+        <p:txBody>
+          <a:bodyPr wrap="square" lIns="0" rIns="0" tIns="0" bIns="0">
+            <a:spAutoFit/>
+          </a:bodyPr>
+          <a:lstStyle/>
+          <a:p>
+            <a:pPr marL="274320" indent="-274320">
+              <a:spcAft>
+                <a:spcPts val="990"/>
+              </a:spcAft>
+              <a:buClr>
+                <a:srgbClr val="0645AD"/>
+              </a:buClr>
+              <a:buFont typeface="Arial"/>
+              <a:buChar char="•"/>
+            </a:pPr>
+            <a:r>
+              <a:rPr sz="2200" b="1">
+                <a:solidFill>
+                  <a:srgbClr val="202122"/>
+                </a:solidFill>
+                <a:latin typeface="Calibri"/>
+              </a:rPr>
+              <a:t>Client:</a:t>
+            </a:r>
+            <a:r>
+              <a:rPr sz="2200" b="0">
+                <a:solidFill>
+                  <a:srgbClr val="202122"/>
+                </a:solidFill>
+                <a:latin typeface="Calibri"/>
+              </a:rPr>
+              <a:t> Windows, macOS, Linux</a:t>
+            </a:r>
+          </a:p>
+          <a:p>
+            <a:pPr marL="274320" indent="-274320">
+              <a:spcAft>
+                <a:spcPts val="990"/>
+              </a:spcAft>
+              <a:buClr>
+                <a:srgbClr val="0645AD"/>
+              </a:buClr>
+              <a:buFont typeface="Arial"/>
+              <a:buChar char="•"/>
+            </a:pPr>
+            <a:r>
+              <a:rPr sz="2200" b="1">
+                <a:solidFill>
+                  <a:srgbClr val="202122"/>
+                </a:solidFill>
+                <a:latin typeface="Calibri"/>
+              </a:rPr>
+              <a:t>Mobile:</a:t>
+            </a:r>
+            <a:r>
+              <a:rPr sz="2200" b="0">
+                <a:solidFill>
+                  <a:srgbClr val="202122"/>
+                </a:solidFill>
+                <a:latin typeface="Calibri"/>
+              </a:rPr>
+              <a:t> Android, iOS</a:t>
+            </a:r>
+          </a:p>
+          <a:p>
+            <a:pPr marL="274320" indent="-274320">
+              <a:spcAft>
+                <a:spcPts val="990"/>
+              </a:spcAft>
+              <a:buClr>
+                <a:srgbClr val="0645AD"/>
+              </a:buClr>
+              <a:buFont typeface="Arial"/>
+              <a:buChar char="•"/>
+            </a:pPr>
+            <a:r>
+              <a:rPr sz="2200" b="1">
+                <a:solidFill>
+                  <a:srgbClr val="202122"/>
+                </a:solidFill>
+                <a:latin typeface="Calibri"/>
+              </a:rPr>
+              <a:t>Server:</a:t>
+            </a:r>
+            <a:r>
+              <a:rPr sz="2200" b="0">
+                <a:solidFill>
+                  <a:srgbClr val="202122"/>
+                </a:solidFill>
+                <a:latin typeface="Calibri"/>
+              </a:rPr>
+              <a:t> Windows Server, Linux</a:t>
+            </a:r>
+          </a:p>
+          <a:p>
+            <a:pPr marL="274320" indent="-274320">
+              <a:spcAft>
+                <a:spcPts val="990"/>
+              </a:spcAft>
+              <a:buClr>
+                <a:srgbClr val="0645AD"/>
+              </a:buClr>
+              <a:buFont typeface="Arial"/>
+              <a:buChar char="•"/>
+            </a:pPr>
+            <a:r>
+              <a:rPr sz="2200" b="1">
+                <a:solidFill>
+                  <a:srgbClr val="202122"/>
+                </a:solidFill>
+                <a:latin typeface="Calibri"/>
+              </a:rPr>
+              <a:t>Functions:</a:t>
+            </a:r>
+            <a:r>
+              <a:rPr sz="2200" b="0">
+                <a:solidFill>
+                  <a:srgbClr val="202122"/>
+                </a:solidFill>
+                <a:latin typeface="Calibri"/>
+              </a:rPr>
+              <a:t> security, memory, processor, device and file management</a:t>
+            </a:r>
+          </a:p>
+        </p:txBody>
+      </p:sp>
+      <p:sp>
+        <p:nvSpPr>
+          <p:cNvPr id="10" name="Rounded Rectangle 9"/>
+          <p:cNvSpPr/>
+          <p:nvPr/>
+        </p:nvSpPr>
+        <p:spPr>
+          <a:xfrm>
+            <a:off x="6278727" y="1600200"/>
+            <a:ext cx="5364327" cy="640080"/>
+          </a:xfrm>
+          <a:prstGeom prst="roundRect">
+            <a:avLst>
+              <a:gd name="adj" fmla="val 15000"/>
+            </a:avLst>
+          </a:prstGeom>
+          <a:solidFill>
+            <a:srgbClr val="0645AD"/>
+          </a:solidFill>
+          <a:ln>
+            <a:noFill/>
+          </a:ln>
+          <a:effectLst/>
+        </p:spPr>
+        <p:style>
+          <a:lnRef idx="1">
+            <a:schemeClr val="accent1"/>
+          </a:lnRef>
+          <a:fillRef idx="3">
+            <a:schemeClr val="accent1"/>
+          </a:fillRef>
+          <a:effectRef idx="2">
+            <a:schemeClr val="accent1"/>
+          </a:effectRef>
+          <a:fontRef idx="minor">
+            <a:schemeClr val="lt1"/>
+          </a:fontRef>
+        </p:style>
+        <p:txBody>
+          <a:bodyPr rtlCol="0" anchor="ctr"/>
+          <a:lstStyle/>
+          <a:p/>
+        </p:txBody>
+      </p:sp>
+      <p:sp>
+        <p:nvSpPr>
+          <p:cNvPr id="11" name="TextBox 10"/>
+          <p:cNvSpPr txBox="1"/>
+          <p:nvPr/>
+        </p:nvSpPr>
+        <p:spPr>
+          <a:xfrm>
+            <a:off x="6507327" y="1600200"/>
+            <a:ext cx="4907127" cy="640080"/>
+          </a:xfrm>
+          <a:prstGeom prst="rect">
+            <a:avLst/>
+          </a:prstGeom>
+          <a:noFill/>
+        </p:spPr>
+        <p:txBody>
+          <a:bodyPr wrap="square" anchor="ctr" lIns="0" rIns="0" tIns="0" bIns="0"/>
+          <a:lstStyle/>
+          <a:p>
+            <a:pPr algn="l"/>
+            <a:r>
+              <a:rPr sz="2000" b="1" i="0">
+                <a:solidFill>
+                  <a:srgbClr val="FFFFFF"/>
+                </a:solidFill>
+                <a:latin typeface="Calibri"/>
+              </a:rPr>
+              <a:t>Useful evidence sources</a:t>
+            </a:r>
+          </a:p>
+        </p:txBody>
+      </p:sp>
+      <p:sp>
+        <p:nvSpPr>
+          <p:cNvPr id="12" name="Rounded Rectangle 11"/>
+          <p:cNvSpPr/>
+          <p:nvPr/>
+        </p:nvSpPr>
+        <p:spPr>
+          <a:xfrm>
+            <a:off x="6278727" y="2377440"/>
+            <a:ext cx="5364327" cy="3794760"/>
+          </a:xfrm>
+          <a:prstGeom prst="roundRect">
+            <a:avLst>
+              <a:gd name="adj" fmla="val 4000"/>
+            </a:avLst>
+          </a:prstGeom>
+          <a:solidFill>
+            <a:srgbClr val="EAF3FF"/>
+          </a:solidFill>
+          <a:ln>
+            <a:noFill/>
+          </a:ln>
+          <a:effectLst/>
+        </p:spPr>
+        <p:style>
+          <a:lnRef idx="1">
+            <a:schemeClr val="accent1"/>
+          </a:lnRef>
+          <a:fillRef idx="3">
+            <a:schemeClr val="accent1"/>
+          </a:fillRef>
+          <a:effectRef idx="2">
+            <a:schemeClr val="accent1"/>
+          </a:effectRef>
+          <a:fontRef idx="minor">
+            <a:schemeClr val="lt1"/>
+          </a:fontRef>
+        </p:style>
+        <p:txBody>
+          <a:bodyPr rtlCol="0" anchor="ctr"/>
+          <a:lstStyle/>
+          <a:p/>
+        </p:txBody>
+      </p:sp>
+      <p:sp>
+        <p:nvSpPr>
+          <p:cNvPr id="13" name="TextBox 12"/>
+          <p:cNvSpPr txBox="1"/>
+          <p:nvPr/>
+        </p:nvSpPr>
+        <p:spPr>
+          <a:xfrm>
+            <a:off x="6553047" y="2606040"/>
+            <a:ext cx="4815687" cy="3337560"/>
+          </a:xfrm>
+          <a:prstGeom prst="rect">
+            <a:avLst/>
+          </a:prstGeom>
+          <a:noFill/>
+        </p:spPr>
+        <p:txBody>
+          <a:bodyPr wrap="square" lIns="0" rIns="0" tIns="0" bIns="0">
+            <a:spAutoFit/>
+          </a:bodyPr>
+          <a:lstStyle/>
+          <a:p>
+            <a:pPr marL="274320" indent="-274320">
+              <a:spcAft>
+                <a:spcPts val="900"/>
+              </a:spcAft>
+              <a:buClr>
+                <a:srgbClr val="0645AD"/>
+              </a:buClr>
+              <a:buFont typeface="Arial"/>
+              <a:buChar char="•"/>
+            </a:pPr>
+            <a:r>
+              <a:rPr sz="2000" b="0">
+                <a:solidFill>
+                  <a:srgbClr val="202122"/>
+                </a:solidFill>
+                <a:latin typeface="Calibri"/>
+              </a:rPr>
+              <a:t>Windows registry</a:t>
+            </a:r>
+          </a:p>
+          <a:p>
+            <a:pPr marL="274320" indent="-274320">
+              <a:spcAft>
+                <a:spcPts val="900"/>
+              </a:spcAft>
+              <a:buClr>
+                <a:srgbClr val="0645AD"/>
+              </a:buClr>
+              <a:buFont typeface="Arial"/>
+              <a:buChar char="•"/>
+            </a:pPr>
+            <a:r>
+              <a:rPr sz="2000" b="0">
+                <a:solidFill>
+                  <a:srgbClr val="202122"/>
+                </a:solidFill>
+                <a:latin typeface="Calibri"/>
+              </a:rPr>
+              <a:t>Linux configuration files</a:t>
+            </a:r>
+          </a:p>
+          <a:p>
+            <a:pPr marL="274320" indent="-274320">
+              <a:spcAft>
+                <a:spcPts val="900"/>
+              </a:spcAft>
+              <a:buClr>
+                <a:srgbClr val="0645AD"/>
+              </a:buClr>
+              <a:buFont typeface="Arial"/>
+              <a:buChar char="•"/>
+            </a:pPr>
+            <a:r>
+              <a:rPr sz="2000" b="0">
+                <a:solidFill>
+                  <a:srgbClr val="202122"/>
+                </a:solidFill>
+                <a:latin typeface="Calibri"/>
+              </a:rPr>
+              <a:t>macOS library and preference files</a:t>
+            </a:r>
+          </a:p>
+          <a:p>
+            <a:pPr marL="274320" indent="-274320">
+              <a:spcAft>
+                <a:spcPts val="900"/>
+              </a:spcAft>
+              <a:buClr>
+                <a:srgbClr val="0645AD"/>
+              </a:buClr>
+              <a:buFont typeface="Arial"/>
+              <a:buChar char="•"/>
+            </a:pPr>
+            <a:r>
+              <a:rPr sz="2000" b="0">
+                <a:solidFill>
+                  <a:srgbClr val="202122"/>
+                </a:solidFill>
+                <a:latin typeface="Calibri"/>
+              </a:rPr>
+              <a:t>Network and traffic logs</a:t>
+            </a:r>
+          </a:p>
+          <a:p>
+            <a:pPr marL="274320" indent="-274320">
+              <a:spcAft>
+                <a:spcPts val="900"/>
+              </a:spcAft>
+              <a:buClr>
+                <a:srgbClr val="0645AD"/>
+              </a:buClr>
+              <a:buFont typeface="Arial"/>
+              <a:buChar char="•"/>
+            </a:pPr>
+            <a:r>
+              <a:rPr sz="2000" b="1">
+                <a:solidFill>
+                  <a:srgbClr val="202122"/>
+                </a:solidFill>
+                <a:latin typeface="Calibri"/>
+              </a:rPr>
+              <a:t>File system:</a:t>
+            </a:r>
+            <a:r>
+              <a:rPr sz="2000" b="0">
+                <a:solidFill>
+                  <a:srgbClr val="202122"/>
+                </a:solidFill>
+                <a:latin typeface="Calibri"/>
+              </a:rPr>
+              <a:t> NTFS, FAT32, exFAT, APFS, ext4</a:t>
+            </a:r>
+          </a:p>
+          <a:p>
+            <a:pPr marL="274320" indent="-274320">
+              <a:spcAft>
+                <a:spcPts val="900"/>
+              </a:spcAft>
+              <a:buClr>
+                <a:srgbClr val="0645AD"/>
+              </a:buClr>
+              <a:buFont typeface="Arial"/>
+              <a:buChar char="•"/>
+            </a:pPr>
+            <a:r>
+              <a:rPr sz="2000" b="0">
+                <a:solidFill>
+                  <a:srgbClr val="202122"/>
+                </a:solidFill>
+                <a:latin typeface="Calibri"/>
+              </a:rPr>
+              <a:t>Running processes</a:t>
+            </a:r>
+          </a:p>
+        </p:txBody>
+      </p:sp>
+    </p:spTree>
+  </p:cSld>
+  <p:clrMapOvr>
+    <a:masterClrMapping/>
+  </p:clrMapOvr>
+</p:sld>
+</file>
+
+<file path=ppt/slides/slide11.xml><?xml version="1.0" encoding="utf-8"?>
+<p:sld xmlns:a="http://schemas.openxmlformats.org/drawingml/2006/main" xmlns:p="http://schemas.openxmlformats.org/presentationml/2006/main" xmlns:r="http://schemas.openxmlformats.org/officeDocument/2006/relationships">
+  <p:cSld>
+    <p:bg>
+      <p:bgPr>
+        <a:solidFill>
+          <a:srgbClr val="FFFFFF"/>
+        </a:solidFill>
+        <a:effectLst/>
+      </p:bgPr>
+    </p:bg>
+    <p:spTree>
+      <p:nvGrpSpPr>
+        <p:cNvPr id="1" name=""/>
+        <p:cNvGrpSpPr/>
+        <p:nvPr/>
+      </p:nvGrpSpPr>
+      <p:grpSpPr/>
+      <p:sp>
+        <p:nvSpPr>
+          <p:cNvPr id="2" name="TextBox 1"/>
+          <p:cNvSpPr txBox="1"/>
+          <p:nvPr/>
+        </p:nvSpPr>
+        <p:spPr>
+          <a:xfrm>
+            <a:off x="548640" y="320040"/>
+            <a:ext cx="11094415" cy="274320"/>
+          </a:xfrm>
+          <a:prstGeom prst="rect">
+            <a:avLst/>
+          </a:prstGeom>
+          <a:noFill/>
+        </p:spPr>
+        <p:txBody>
+          <a:bodyPr wrap="square" anchor="t" lIns="0" rIns="0" tIns="0" bIns="0"/>
+          <a:lstStyle/>
+          <a:p>
+            <a:pPr algn="l"/>
+            <a:r>
+              <a:rPr sz="1100" b="1" i="0">
+                <a:solidFill>
+                  <a:srgbClr val="54595D"/>
+                </a:solidFill>
+                <a:latin typeface="Calibri"/>
+              </a:rPr>
+              <a:t>CYBER SECURITY  ·  Cyber Security Content Area 1</a:t>
+            </a:r>
+          </a:p>
+        </p:txBody>
+      </p:sp>
+      <p:sp>
+        <p:nvSpPr>
+          <p:cNvPr id="3" name="TextBox 2"/>
+          <p:cNvSpPr txBox="1"/>
+          <p:nvPr/>
+        </p:nvSpPr>
+        <p:spPr>
+          <a:xfrm>
+            <a:off x="548640" y="566928"/>
+            <a:ext cx="11094415" cy="822960"/>
+          </a:xfrm>
+          <a:prstGeom prst="rect">
+            <a:avLst/>
+          </a:prstGeom>
+          <a:noFill/>
+        </p:spPr>
+        <p:txBody>
+          <a:bodyPr wrap="square" anchor="ctr" lIns="0" rIns="0" tIns="0" bIns="0"/>
+          <a:lstStyle/>
+          <a:p>
+            <a:pPr algn="l"/>
+            <a:r>
+              <a:rPr sz="3200" b="1" i="0">
+                <a:solidFill>
+                  <a:srgbClr val="03306E"/>
+                </a:solidFill>
+                <a:latin typeface="Cambria"/>
+              </a:rPr>
+              <a:t>Quick check: Operating systems and investigation</a:t>
+            </a:r>
+          </a:p>
+        </p:txBody>
+      </p:sp>
+      <p:sp>
+        <p:nvSpPr>
+          <p:cNvPr id="4" name="TextBox 3"/>
+          <p:cNvSpPr txBox="1"/>
+          <p:nvPr/>
+        </p:nvSpPr>
+        <p:spPr>
+          <a:xfrm>
+            <a:off x="548640" y="6446520"/>
+            <a:ext cx="8229600" cy="274320"/>
+          </a:xfrm>
+          <a:prstGeom prst="rect">
+            <a:avLst/>
+          </a:prstGeom>
+          <a:noFill/>
+        </p:spPr>
+        <p:txBody>
+          <a:bodyPr wrap="square" anchor="t" lIns="0" rIns="0" tIns="0" bIns="0"/>
+          <a:lstStyle/>
+          <a:p>
+            <a:pPr algn="l"/>
+            <a:r>
+              <a:rPr sz="1000" b="0" i="0">
+                <a:solidFill>
+                  <a:srgbClr val="54595D"/>
+                </a:solidFill>
+                <a:latin typeface="Calibri"/>
+              </a:rPr>
+              <a:t>Digital Support and Security T Level  ·  Secure Design and Layered Protection</a:t>
+            </a:r>
+          </a:p>
+        </p:txBody>
+      </p:sp>
+      <p:sp>
+        <p:nvSpPr>
+          <p:cNvPr id="5" name="TextBox 4"/>
+          <p:cNvSpPr txBox="1"/>
+          <p:nvPr/>
+        </p:nvSpPr>
+        <p:spPr>
+          <a:xfrm>
+            <a:off x="10728655" y="6446520"/>
+            <a:ext cx="914400" cy="274320"/>
+          </a:xfrm>
+          <a:prstGeom prst="rect">
+            <a:avLst/>
+          </a:prstGeom>
+          <a:noFill/>
+        </p:spPr>
+        <p:txBody>
+          <a:bodyPr wrap="square" anchor="t" lIns="0" rIns="0" tIns="0" bIns="0"/>
+          <a:lstStyle/>
+          <a:p>
+            <a:pPr algn="r"/>
+            <a:r>
+              <a:rPr sz="1000" b="0" i="0">
+                <a:solidFill>
+                  <a:srgbClr val="54595D"/>
+                </a:solidFill>
+                <a:latin typeface="Calibri"/>
+              </a:rPr>
+              <a:t>11</a:t>
+            </a:r>
+          </a:p>
+        </p:txBody>
+      </p:sp>
+      <p:sp>
+        <p:nvSpPr>
+          <p:cNvPr id="6" name="Oval 5"/>
+          <p:cNvSpPr/>
+          <p:nvPr/>
+        </p:nvSpPr>
+        <p:spPr>
+          <a:xfrm>
+            <a:off x="548640" y="1691640"/>
+            <a:ext cx="502920" cy="502920"/>
+          </a:xfrm>
+          <a:prstGeom prst="ellipse">
+            <a:avLst/>
+          </a:prstGeom>
+          <a:solidFill>
+            <a:srgbClr val="E0463A"/>
+          </a:solidFill>
+          <a:ln>
+            <a:noFill/>
+          </a:ln>
+          <a:effectLst/>
+        </p:spPr>
+        <p:style>
+          <a:lnRef idx="1">
+            <a:schemeClr val="accent1"/>
+          </a:lnRef>
+          <a:fillRef idx="3">
+            <a:schemeClr val="accent1"/>
+          </a:fillRef>
+          <a:effectRef idx="2">
+            <a:schemeClr val="accent1"/>
+          </a:effectRef>
+          <a:fontRef idx="minor">
+            <a:schemeClr val="lt1"/>
+          </a:fontRef>
+        </p:style>
+        <p:txBody>
+          <a:bodyPr rtlCol="0" anchor="ctr" lIns="0" rIns="0" tIns="0" bIns="0"/>
+          <a:lstStyle/>
+          <a:p>
+            <a:pPr algn="ctr"/>
+            <a:r>
+              <a:rPr sz="1600" b="1">
+                <a:solidFill>
+                  <a:srgbClr val="FFFFFF"/>
+                </a:solidFill>
+                <a:latin typeface="Calibri"/>
+              </a:rPr>
+              <a:t>1</a:t>
+            </a:r>
+          </a:p>
+        </p:txBody>
+      </p:sp>
+      <p:sp>
+        <p:nvSpPr>
+          <p:cNvPr id="7" name="TextBox 6"/>
+          <p:cNvSpPr txBox="1"/>
+          <p:nvPr/>
+        </p:nvSpPr>
+        <p:spPr>
+          <a:xfrm>
+            <a:off x="1371600" y="1645920"/>
+            <a:ext cx="10271455" cy="1188720"/>
+          </a:xfrm>
+          <a:prstGeom prst="rect">
+            <a:avLst/>
+          </a:prstGeom>
+          <a:noFill/>
+        </p:spPr>
+        <p:txBody>
+          <a:bodyPr wrap="square" anchor="t" lIns="0" rIns="0" tIns="0" bIns="0"/>
+          <a:lstStyle/>
+          <a:p>
+            <a:pPr algn="l"/>
+            <a:r>
+              <a:rPr sz="2400" b="0" i="0">
+                <a:solidFill>
+                  <a:srgbClr val="202122"/>
+                </a:solidFill>
+                <a:latin typeface="Calibri"/>
+              </a:rPr>
+              <a:t>Where does Windows store configuration?</a:t>
+            </a:r>
+          </a:p>
+        </p:txBody>
+      </p:sp>
+      <p:sp>
+        <p:nvSpPr>
+          <p:cNvPr id="8" name="Oval 7"/>
+          <p:cNvSpPr/>
+          <p:nvPr/>
+        </p:nvSpPr>
+        <p:spPr>
+          <a:xfrm>
+            <a:off x="548640" y="3108960"/>
+            <a:ext cx="502920" cy="502920"/>
+          </a:xfrm>
+          <a:prstGeom prst="ellipse">
+            <a:avLst/>
+          </a:prstGeom>
+          <a:solidFill>
+            <a:srgbClr val="E0463A"/>
+          </a:solidFill>
+          <a:ln>
+            <a:noFill/>
+          </a:ln>
+          <a:effectLst/>
+        </p:spPr>
+        <p:style>
+          <a:lnRef idx="1">
+            <a:schemeClr val="accent1"/>
+          </a:lnRef>
+          <a:fillRef idx="3">
+            <a:schemeClr val="accent1"/>
+          </a:fillRef>
+          <a:effectRef idx="2">
+            <a:schemeClr val="accent1"/>
+          </a:effectRef>
+          <a:fontRef idx="minor">
+            <a:schemeClr val="lt1"/>
+          </a:fontRef>
+        </p:style>
+        <p:txBody>
+          <a:bodyPr rtlCol="0" anchor="ctr" lIns="0" rIns="0" tIns="0" bIns="0"/>
+          <a:lstStyle/>
+          <a:p>
+            <a:pPr algn="ctr"/>
+            <a:r>
+              <a:rPr sz="1600" b="1">
+                <a:solidFill>
+                  <a:srgbClr val="FFFFFF"/>
+                </a:solidFill>
+                <a:latin typeface="Calibri"/>
+              </a:rPr>
+              <a:t>2</a:t>
+            </a:r>
+          </a:p>
+        </p:txBody>
+      </p:sp>
+      <p:sp>
+        <p:nvSpPr>
+          <p:cNvPr id="9" name="TextBox 8"/>
+          <p:cNvSpPr txBox="1"/>
+          <p:nvPr/>
+        </p:nvSpPr>
+        <p:spPr>
+          <a:xfrm>
+            <a:off x="1371600" y="3063240"/>
+            <a:ext cx="10271455" cy="1188720"/>
+          </a:xfrm>
+          <a:prstGeom prst="rect">
+            <a:avLst/>
+          </a:prstGeom>
+          <a:noFill/>
+        </p:spPr>
+        <p:txBody>
+          <a:bodyPr wrap="square" anchor="t" lIns="0" rIns="0" tIns="0" bIns="0"/>
+          <a:lstStyle/>
+          <a:p>
+            <a:pPr algn="l"/>
+            <a:r>
+              <a:rPr sz="2400" b="0" i="0">
+                <a:solidFill>
+                  <a:srgbClr val="202122"/>
+                </a:solidFill>
+                <a:latin typeface="Calibri"/>
+              </a:rPr>
+              <a:t>Why look at running processes?</a:t>
+            </a:r>
+          </a:p>
+        </p:txBody>
+      </p:sp>
+      <p:sp>
+        <p:nvSpPr>
+          <p:cNvPr id="10" name="Oval 9"/>
+          <p:cNvSpPr/>
+          <p:nvPr/>
+        </p:nvSpPr>
+        <p:spPr>
+          <a:xfrm>
+            <a:off x="548640" y="4526280"/>
+            <a:ext cx="502920" cy="502920"/>
+          </a:xfrm>
+          <a:prstGeom prst="ellipse">
+            <a:avLst/>
+          </a:prstGeom>
+          <a:solidFill>
+            <a:srgbClr val="E0463A"/>
+          </a:solidFill>
+          <a:ln>
+            <a:noFill/>
+          </a:ln>
+          <a:effectLst/>
+        </p:spPr>
+        <p:style>
+          <a:lnRef idx="1">
+            <a:schemeClr val="accent1"/>
+          </a:lnRef>
+          <a:fillRef idx="3">
+            <a:schemeClr val="accent1"/>
+          </a:fillRef>
+          <a:effectRef idx="2">
+            <a:schemeClr val="accent1"/>
+          </a:effectRef>
+          <a:fontRef idx="minor">
+            <a:schemeClr val="lt1"/>
+          </a:fontRef>
+        </p:style>
+        <p:txBody>
+          <a:bodyPr rtlCol="0" anchor="ctr" lIns="0" rIns="0" tIns="0" bIns="0"/>
+          <a:lstStyle/>
+          <a:p>
+            <a:pPr algn="ctr"/>
+            <a:r>
+              <a:rPr sz="1600" b="1">
+                <a:solidFill>
+                  <a:srgbClr val="FFFFFF"/>
+                </a:solidFill>
+                <a:latin typeface="Calibri"/>
+              </a:rPr>
+              <a:t>3</a:t>
+            </a:r>
+          </a:p>
+        </p:txBody>
+      </p:sp>
+      <p:sp>
+        <p:nvSpPr>
+          <p:cNvPr id="11" name="TextBox 10"/>
+          <p:cNvSpPr txBox="1"/>
+          <p:nvPr/>
+        </p:nvSpPr>
+        <p:spPr>
+          <a:xfrm>
+            <a:off x="1371600" y="4480560"/>
+            <a:ext cx="10271455" cy="1188720"/>
+          </a:xfrm>
+          <a:prstGeom prst="rect">
+            <a:avLst/>
+          </a:prstGeom>
+          <a:noFill/>
+        </p:spPr>
+        <p:txBody>
+          <a:bodyPr wrap="square" anchor="t" lIns="0" rIns="0" tIns="0" bIns="0"/>
+          <a:lstStyle/>
+          <a:p>
+            <a:pPr algn="l"/>
+            <a:r>
+              <a:rPr sz="2400" b="0" i="0">
+                <a:solidFill>
+                  <a:srgbClr val="202122"/>
+                </a:solidFill>
+                <a:latin typeface="Calibri"/>
+              </a:rPr>
+              <a:t>Name a file system used by macOS.</a:t>
+            </a:r>
+          </a:p>
+        </p:txBody>
+      </p:sp>
+      <p:sp>
+        <p:nvSpPr>
+          <p:cNvPr id="12" name="TextBox 11"/>
+          <p:cNvSpPr txBox="1"/>
+          <p:nvPr/>
+        </p:nvSpPr>
+        <p:spPr>
+          <a:xfrm>
+            <a:off x="548640" y="5852160"/>
+            <a:ext cx="11094415" cy="365760"/>
+          </a:xfrm>
+          <a:prstGeom prst="rect">
+            <a:avLst/>
+          </a:prstGeom>
+          <a:noFill/>
+        </p:spPr>
+        <p:txBody>
+          <a:bodyPr wrap="square" anchor="t" lIns="0" rIns="0" tIns="0" bIns="0"/>
+          <a:lstStyle/>
+          <a:p>
+            <a:pPr algn="l"/>
+            <a:r>
+              <a:rPr sz="1300" b="0" i="1">
+                <a:solidFill>
+                  <a:srgbClr val="54595D"/>
+                </a:solidFill>
+                <a:latin typeface="Calibri"/>
+              </a:rPr>
+              <a:t>Answer on mini whiteboards or in your book. Answers are in the speaker notes.</a:t>
+            </a:r>
+          </a:p>
+        </p:txBody>
+      </p:sp>
+    </p:spTree>
+  </p:cSld>
+  <p:clrMapOvr>
+    <a:masterClrMapping/>
+  </p:clrMapOvr>
+</p:sld>
+</file>
+
+<file path=ppt/slides/slide12.xml><?xml version="1.0" encoding="utf-8"?>
+<p:sld xmlns:a="http://schemas.openxmlformats.org/drawingml/2006/main" xmlns:p="http://schemas.openxmlformats.org/presentationml/2006/main" xmlns:r="http://schemas.openxmlformats.org/officeDocument/2006/relationships">
+  <p:cSld>
+    <p:bg>
+      <p:bgPr>
+        <a:solidFill>
+          <a:srgbClr val="FFFFFF"/>
+        </a:solidFill>
+        <a:effectLst/>
+      </p:bgPr>
+    </p:bg>
+    <p:spTree>
+      <p:nvGrpSpPr>
+        <p:cNvPr id="1" name=""/>
+        <p:cNvGrpSpPr/>
+        <p:nvPr/>
+      </p:nvGrpSpPr>
+      <p:grpSpPr/>
+      <p:sp>
+        <p:nvSpPr>
+          <p:cNvPr id="2" name="TextBox 1"/>
+          <p:cNvSpPr txBox="1"/>
+          <p:nvPr/>
+        </p:nvSpPr>
+        <p:spPr>
+          <a:xfrm>
+            <a:off x="548640" y="320040"/>
+            <a:ext cx="11094415" cy="274320"/>
+          </a:xfrm>
+          <a:prstGeom prst="rect">
+            <a:avLst/>
+          </a:prstGeom>
+          <a:noFill/>
+        </p:spPr>
+        <p:txBody>
+          <a:bodyPr wrap="square" anchor="t" lIns="0" rIns="0" tIns="0" bIns="0"/>
+          <a:lstStyle/>
+          <a:p>
+            <a:pPr algn="l"/>
+            <a:r>
+              <a:rPr sz="1100" b="1" i="0">
+                <a:solidFill>
+                  <a:srgbClr val="54595D"/>
+                </a:solidFill>
+                <a:latin typeface="Calibri"/>
+              </a:rPr>
+              <a:t>CYBER SECURITY  ·  Cyber Security Content Area 1</a:t>
+            </a:r>
+          </a:p>
+        </p:txBody>
+      </p:sp>
+      <p:sp>
+        <p:nvSpPr>
+          <p:cNvPr id="3" name="TextBox 2"/>
+          <p:cNvSpPr txBox="1"/>
+          <p:nvPr/>
+        </p:nvSpPr>
+        <p:spPr>
+          <a:xfrm>
+            <a:off x="548640" y="566928"/>
+            <a:ext cx="11094415" cy="822960"/>
+          </a:xfrm>
+          <a:prstGeom prst="rect">
+            <a:avLst/>
+          </a:prstGeom>
+          <a:noFill/>
+        </p:spPr>
+        <p:txBody>
+          <a:bodyPr wrap="square" anchor="ctr" lIns="0" rIns="0" tIns="0" bIns="0"/>
+          <a:lstStyle/>
+          <a:p>
+            <a:pPr algn="l"/>
+            <a:r>
+              <a:rPr sz="3200" b="1" i="0">
+                <a:solidFill>
+                  <a:srgbClr val="03306E"/>
+                </a:solidFill>
+                <a:latin typeface="Cambria"/>
+              </a:rPr>
+              <a:t>Physical and virtual servers</a:t>
+            </a:r>
+          </a:p>
+        </p:txBody>
+      </p:sp>
+      <p:sp>
+        <p:nvSpPr>
+          <p:cNvPr id="4" name="TextBox 3"/>
+          <p:cNvSpPr txBox="1"/>
+          <p:nvPr/>
+        </p:nvSpPr>
+        <p:spPr>
+          <a:xfrm>
+            <a:off x="548640" y="6446520"/>
+            <a:ext cx="8229600" cy="274320"/>
+          </a:xfrm>
+          <a:prstGeom prst="rect">
+            <a:avLst/>
+          </a:prstGeom>
+          <a:noFill/>
+        </p:spPr>
+        <p:txBody>
+          <a:bodyPr wrap="square" anchor="t" lIns="0" rIns="0" tIns="0" bIns="0"/>
+          <a:lstStyle/>
+          <a:p>
+            <a:pPr algn="l"/>
+            <a:r>
+              <a:rPr sz="1000" b="0" i="0">
+                <a:solidFill>
+                  <a:srgbClr val="54595D"/>
+                </a:solidFill>
+                <a:latin typeface="Calibri"/>
+              </a:rPr>
+              <a:t>Digital Support and Security T Level  ·  Secure Design and Layered Protection</a:t>
+            </a:r>
+          </a:p>
+        </p:txBody>
+      </p:sp>
+      <p:sp>
+        <p:nvSpPr>
+          <p:cNvPr id="5" name="TextBox 4"/>
+          <p:cNvSpPr txBox="1"/>
+          <p:nvPr/>
+        </p:nvSpPr>
+        <p:spPr>
+          <a:xfrm>
+            <a:off x="10728655" y="6446520"/>
+            <a:ext cx="914400" cy="274320"/>
+          </a:xfrm>
+          <a:prstGeom prst="rect">
+            <a:avLst/>
+          </a:prstGeom>
+          <a:noFill/>
+        </p:spPr>
+        <p:txBody>
+          <a:bodyPr wrap="square" anchor="t" lIns="0" rIns="0" tIns="0" bIns="0"/>
+          <a:lstStyle/>
+          <a:p>
+            <a:pPr algn="r"/>
+            <a:r>
+              <a:rPr sz="1000" b="0" i="0">
+                <a:solidFill>
+                  <a:srgbClr val="54595D"/>
+                </a:solidFill>
+                <a:latin typeface="Calibri"/>
+              </a:rPr>
+              <a:t>12</a:t>
+            </a:r>
+          </a:p>
+        </p:txBody>
+      </p:sp>
+      <p:sp>
+        <p:nvSpPr>
+          <p:cNvPr id="6" name="Rounded Rectangle 5"/>
+          <p:cNvSpPr/>
+          <p:nvPr/>
+        </p:nvSpPr>
+        <p:spPr>
+          <a:xfrm>
+            <a:off x="548640" y="1600200"/>
+            <a:ext cx="5364327" cy="640080"/>
+          </a:xfrm>
+          <a:prstGeom prst="roundRect">
+            <a:avLst>
+              <a:gd name="adj" fmla="val 15000"/>
+            </a:avLst>
+          </a:prstGeom>
+          <a:solidFill>
+            <a:srgbClr val="03306E"/>
+          </a:solidFill>
+          <a:ln>
+            <a:noFill/>
+          </a:ln>
+          <a:effectLst/>
+        </p:spPr>
+        <p:style>
+          <a:lnRef idx="1">
+            <a:schemeClr val="accent1"/>
+          </a:lnRef>
+          <a:fillRef idx="3">
+            <a:schemeClr val="accent1"/>
+          </a:fillRef>
+          <a:effectRef idx="2">
+            <a:schemeClr val="accent1"/>
+          </a:effectRef>
+          <a:fontRef idx="minor">
+            <a:schemeClr val="lt1"/>
+          </a:fontRef>
+        </p:style>
+        <p:txBody>
+          <a:bodyPr rtlCol="0" anchor="ctr"/>
+          <a:lstStyle/>
+          <a:p/>
+        </p:txBody>
+      </p:sp>
+      <p:sp>
+        <p:nvSpPr>
+          <p:cNvPr id="7" name="TextBox 6"/>
+          <p:cNvSpPr txBox="1"/>
+          <p:nvPr/>
+        </p:nvSpPr>
+        <p:spPr>
+          <a:xfrm>
+            <a:off x="777240" y="1600200"/>
+            <a:ext cx="4907127" cy="640080"/>
+          </a:xfrm>
+          <a:prstGeom prst="rect">
+            <a:avLst/>
+          </a:prstGeom>
+          <a:noFill/>
+        </p:spPr>
+        <p:txBody>
+          <a:bodyPr wrap="square" anchor="ctr" lIns="0" rIns="0" tIns="0" bIns="0"/>
+          <a:lstStyle/>
+          <a:p>
+            <a:pPr algn="l"/>
+            <a:r>
+              <a:rPr sz="2000" b="1" i="0">
+                <a:solidFill>
+                  <a:srgbClr val="FFFFFF"/>
+                </a:solidFill>
+                <a:latin typeface="Calibri"/>
+              </a:rPr>
+              <a:t>Physical servers</a:t>
+            </a:r>
+          </a:p>
+        </p:txBody>
+      </p:sp>
+      <p:sp>
+        <p:nvSpPr>
+          <p:cNvPr id="8" name="Rounded Rectangle 7"/>
+          <p:cNvSpPr/>
+          <p:nvPr/>
+        </p:nvSpPr>
+        <p:spPr>
+          <a:xfrm>
+            <a:off x="548640" y="2377440"/>
+            <a:ext cx="5364327" cy="3794760"/>
+          </a:xfrm>
+          <a:prstGeom prst="roundRect">
+            <a:avLst>
+              <a:gd name="adj" fmla="val 4000"/>
+            </a:avLst>
+          </a:prstGeom>
+          <a:solidFill>
+            <a:srgbClr val="EAF3FF"/>
+          </a:solidFill>
+          <a:ln>
+            <a:noFill/>
+          </a:ln>
+          <a:effectLst/>
+        </p:spPr>
+        <p:style>
+          <a:lnRef idx="1">
+            <a:schemeClr val="accent1"/>
+          </a:lnRef>
+          <a:fillRef idx="3">
+            <a:schemeClr val="accent1"/>
+          </a:fillRef>
+          <a:effectRef idx="2">
+            <a:schemeClr val="accent1"/>
+          </a:effectRef>
+          <a:fontRef idx="minor">
+            <a:schemeClr val="lt1"/>
+          </a:fontRef>
+        </p:style>
+        <p:txBody>
+          <a:bodyPr rtlCol="0" anchor="ctr"/>
+          <a:lstStyle/>
+          <a:p/>
+        </p:txBody>
+      </p:sp>
+      <p:sp>
+        <p:nvSpPr>
+          <p:cNvPr id="9" name="TextBox 8"/>
+          <p:cNvSpPr txBox="1"/>
+          <p:nvPr/>
+        </p:nvSpPr>
+        <p:spPr>
+          <a:xfrm>
+            <a:off x="822959" y="2606040"/>
+            <a:ext cx="4815687" cy="3337560"/>
+          </a:xfrm>
+          <a:prstGeom prst="rect">
+            <a:avLst/>
+          </a:prstGeom>
+          <a:noFill/>
+        </p:spPr>
+        <p:txBody>
+          <a:bodyPr wrap="square" lIns="0" rIns="0" tIns="0" bIns="0">
+            <a:spAutoFit/>
+          </a:bodyPr>
+          <a:lstStyle/>
+          <a:p>
+            <a:pPr marL="274320" indent="-274320">
+              <a:spcAft>
+                <a:spcPts val="990"/>
+              </a:spcAft>
+              <a:buClr>
+                <a:srgbClr val="0645AD"/>
+              </a:buClr>
+              <a:buFont typeface="Arial"/>
+              <a:buChar char="•"/>
+            </a:pPr>
+            <a:r>
+              <a:rPr sz="2200" b="0">
+                <a:solidFill>
+                  <a:srgbClr val="202122"/>
+                </a:solidFill>
+                <a:latin typeface="Calibri"/>
+              </a:rPr>
+              <a:t>Applications run directly on hardware</a:t>
+            </a:r>
+          </a:p>
+          <a:p>
+            <a:pPr marL="274320" indent="-274320">
+              <a:spcAft>
+                <a:spcPts val="990"/>
+              </a:spcAft>
+              <a:buClr>
+                <a:srgbClr val="0645AD"/>
+              </a:buClr>
+              <a:buFont typeface="Arial"/>
+              <a:buChar char="•"/>
+            </a:pPr>
+            <a:r>
+              <a:rPr sz="2200" b="0">
+                <a:solidFill>
+                  <a:srgbClr val="202122"/>
+                </a:solidFill>
+                <a:latin typeface="Calibri"/>
+              </a:rPr>
+              <a:t>Full access to hardware resources</a:t>
+            </a:r>
+          </a:p>
+        </p:txBody>
+      </p:sp>
+      <p:sp>
+        <p:nvSpPr>
+          <p:cNvPr id="10" name="Rounded Rectangle 9"/>
+          <p:cNvSpPr/>
+          <p:nvPr/>
+        </p:nvSpPr>
+        <p:spPr>
+          <a:xfrm>
+            <a:off x="6278727" y="1600200"/>
+            <a:ext cx="5364327" cy="640080"/>
+          </a:xfrm>
+          <a:prstGeom prst="roundRect">
+            <a:avLst>
+              <a:gd name="adj" fmla="val 15000"/>
+            </a:avLst>
+          </a:prstGeom>
+          <a:solidFill>
+            <a:srgbClr val="0645AD"/>
+          </a:solidFill>
+          <a:ln>
+            <a:noFill/>
+          </a:ln>
+          <a:effectLst/>
+        </p:spPr>
+        <p:style>
+          <a:lnRef idx="1">
+            <a:schemeClr val="accent1"/>
+          </a:lnRef>
+          <a:fillRef idx="3">
+            <a:schemeClr val="accent1"/>
+          </a:fillRef>
+          <a:effectRef idx="2">
+            <a:schemeClr val="accent1"/>
+          </a:effectRef>
+          <a:fontRef idx="minor">
+            <a:schemeClr val="lt1"/>
+          </a:fontRef>
+        </p:style>
+        <p:txBody>
+          <a:bodyPr rtlCol="0" anchor="ctr"/>
+          <a:lstStyle/>
+          <a:p/>
+        </p:txBody>
+      </p:sp>
+      <p:sp>
+        <p:nvSpPr>
+          <p:cNvPr id="11" name="TextBox 10"/>
+          <p:cNvSpPr txBox="1"/>
+          <p:nvPr/>
+        </p:nvSpPr>
+        <p:spPr>
+          <a:xfrm>
+            <a:off x="6507327" y="1600200"/>
+            <a:ext cx="4907127" cy="640080"/>
+          </a:xfrm>
+          <a:prstGeom prst="rect">
+            <a:avLst/>
+          </a:prstGeom>
+          <a:noFill/>
+        </p:spPr>
+        <p:txBody>
+          <a:bodyPr wrap="square" anchor="ctr" lIns="0" rIns="0" tIns="0" bIns="0"/>
+          <a:lstStyle/>
+          <a:p>
+            <a:pPr algn="l"/>
+            <a:r>
+              <a:rPr sz="2000" b="1" i="0">
+                <a:solidFill>
+                  <a:srgbClr val="FFFFFF"/>
+                </a:solidFill>
+                <a:latin typeface="Calibri"/>
+              </a:rPr>
+              <a:t>Virtualisation</a:t>
+            </a:r>
+          </a:p>
+        </p:txBody>
+      </p:sp>
+      <p:sp>
+        <p:nvSpPr>
+          <p:cNvPr id="12" name="Rounded Rectangle 11"/>
+          <p:cNvSpPr/>
+          <p:nvPr/>
+        </p:nvSpPr>
+        <p:spPr>
+          <a:xfrm>
+            <a:off x="6278727" y="2377440"/>
+            <a:ext cx="5364327" cy="3794760"/>
+          </a:xfrm>
+          <a:prstGeom prst="roundRect">
+            <a:avLst>
+              <a:gd name="adj" fmla="val 4000"/>
+            </a:avLst>
+          </a:prstGeom>
+          <a:solidFill>
+            <a:srgbClr val="EAF3FF"/>
+          </a:solidFill>
+          <a:ln>
+            <a:noFill/>
+          </a:ln>
+          <a:effectLst/>
+        </p:spPr>
+        <p:style>
+          <a:lnRef idx="1">
+            <a:schemeClr val="accent1"/>
+          </a:lnRef>
+          <a:fillRef idx="3">
+            <a:schemeClr val="accent1"/>
+          </a:fillRef>
+          <a:effectRef idx="2">
+            <a:schemeClr val="accent1"/>
+          </a:effectRef>
+          <a:fontRef idx="minor">
+            <a:schemeClr val="lt1"/>
+          </a:fontRef>
+        </p:style>
+        <p:txBody>
+          <a:bodyPr rtlCol="0" anchor="ctr"/>
+          <a:lstStyle/>
+          <a:p/>
+        </p:txBody>
+      </p:sp>
+      <p:sp>
+        <p:nvSpPr>
+          <p:cNvPr id="13" name="TextBox 12"/>
+          <p:cNvSpPr txBox="1"/>
+          <p:nvPr/>
+        </p:nvSpPr>
+        <p:spPr>
+          <a:xfrm>
+            <a:off x="6553047" y="2606040"/>
+            <a:ext cx="4815687" cy="3337560"/>
+          </a:xfrm>
+          <a:prstGeom prst="rect">
+            <a:avLst/>
+          </a:prstGeom>
+          <a:noFill/>
+        </p:spPr>
+        <p:txBody>
+          <a:bodyPr wrap="square" lIns="0" rIns="0" tIns="0" bIns="0">
+            <a:spAutoFit/>
+          </a:bodyPr>
+          <a:lstStyle/>
+          <a:p>
+            <a:pPr marL="274320" indent="-274320">
+              <a:spcAft>
+                <a:spcPts val="990"/>
+              </a:spcAft>
+              <a:buClr>
+                <a:srgbClr val="0645AD"/>
+              </a:buClr>
+              <a:buFont typeface="Arial"/>
+              <a:buChar char="•"/>
+            </a:pPr>
+            <a:r>
+              <a:rPr sz="2200" b="1">
+                <a:solidFill>
+                  <a:srgbClr val="202122"/>
+                </a:solidFill>
+                <a:latin typeface="Calibri"/>
+              </a:rPr>
+              <a:t>Virtual servers:</a:t>
+            </a:r>
+            <a:r>
+              <a:rPr sz="2200" b="0">
+                <a:solidFill>
+                  <a:srgbClr val="202122"/>
+                </a:solidFill>
+                <a:latin typeface="Calibri"/>
+              </a:rPr>
+              <a:t> many isolated OS instances on one machine</a:t>
+            </a:r>
+          </a:p>
+          <a:p>
+            <a:pPr marL="274320" indent="-274320">
+              <a:spcAft>
+                <a:spcPts val="990"/>
+              </a:spcAft>
+              <a:buClr>
+                <a:srgbClr val="0645AD"/>
+              </a:buClr>
+              <a:buFont typeface="Arial"/>
+              <a:buChar char="•"/>
+            </a:pPr>
+            <a:r>
+              <a:rPr sz="2200" b="1">
+                <a:solidFill>
+                  <a:srgbClr val="202122"/>
+                </a:solidFill>
+                <a:latin typeface="Calibri"/>
+              </a:rPr>
+              <a:t>Containers:</a:t>
+            </a:r>
+            <a:r>
+              <a:rPr sz="2200" b="0">
+                <a:solidFill>
+                  <a:srgbClr val="202122"/>
+                </a:solidFill>
+                <a:latin typeface="Calibri"/>
+              </a:rPr>
+              <a:t> portable packages holding only what an app needs</a:t>
+            </a:r>
+          </a:p>
+          <a:p>
+            <a:pPr marL="274320" indent="-274320">
+              <a:spcAft>
+                <a:spcPts val="990"/>
+              </a:spcAft>
+              <a:buClr>
+                <a:srgbClr val="0645AD"/>
+              </a:buClr>
+              <a:buFont typeface="Arial"/>
+              <a:buChar char="•"/>
+            </a:pPr>
+            <a:r>
+              <a:rPr sz="2200" b="0">
+                <a:solidFill>
+                  <a:srgbClr val="202122"/>
+                </a:solidFill>
+                <a:latin typeface="Calibri"/>
+              </a:rPr>
+              <a:t>Isolation adds security and portability</a:t>
+            </a:r>
+          </a:p>
+        </p:txBody>
+      </p:sp>
+    </p:spTree>
+  </p:cSld>
+  <p:clrMapOvr>
+    <a:masterClrMapping/>
+  </p:clrMapOvr>
+</p:sld>
+</file>
+
+<file path=ppt/slides/slide13.xml><?xml version="1.0" encoding="utf-8"?>
+<p:sld xmlns:a="http://schemas.openxmlformats.org/drawingml/2006/main" xmlns:p="http://schemas.openxmlformats.org/presentationml/2006/main" xmlns:r="http://schemas.openxmlformats.org/officeDocument/2006/relationships">
+  <p:cSld>
+    <p:bg>
+      <p:bgPr>
+        <a:solidFill>
+          <a:srgbClr val="FFFFFF"/>
+        </a:solidFill>
+        <a:effectLst/>
+      </p:bgPr>
+    </p:bg>
+    <p:spTree>
+      <p:nvGrpSpPr>
+        <p:cNvPr id="1" name=""/>
+        <p:cNvGrpSpPr/>
+        <p:nvPr/>
+      </p:nvGrpSpPr>
+      <p:grpSpPr/>
+      <p:sp>
+        <p:nvSpPr>
+          <p:cNvPr id="2" name="TextBox 1"/>
+          <p:cNvSpPr txBox="1"/>
+          <p:nvPr/>
+        </p:nvSpPr>
+        <p:spPr>
+          <a:xfrm>
+            <a:off x="548640" y="320040"/>
+            <a:ext cx="11094415" cy="274320"/>
+          </a:xfrm>
+          <a:prstGeom prst="rect">
+            <a:avLst/>
+          </a:prstGeom>
+          <a:noFill/>
+        </p:spPr>
+        <p:txBody>
+          <a:bodyPr wrap="square" anchor="t" lIns="0" rIns="0" tIns="0" bIns="0"/>
+          <a:lstStyle/>
+          <a:p>
+            <a:pPr algn="l"/>
+            <a:r>
+              <a:rPr sz="1100" b="1" i="0">
+                <a:solidFill>
+                  <a:srgbClr val="54595D"/>
+                </a:solidFill>
+                <a:latin typeface="Calibri"/>
+              </a:rPr>
+              <a:t>CYBER SECURITY  ·  Cyber Security Content Area 1</a:t>
+            </a:r>
+          </a:p>
+        </p:txBody>
+      </p:sp>
+      <p:sp>
+        <p:nvSpPr>
+          <p:cNvPr id="3" name="TextBox 2"/>
+          <p:cNvSpPr txBox="1"/>
+          <p:nvPr/>
+        </p:nvSpPr>
+        <p:spPr>
+          <a:xfrm>
+            <a:off x="548640" y="566928"/>
+            <a:ext cx="11094415" cy="822960"/>
+          </a:xfrm>
+          <a:prstGeom prst="rect">
+            <a:avLst/>
+          </a:prstGeom>
+          <a:noFill/>
+        </p:spPr>
+        <p:txBody>
+          <a:bodyPr wrap="square" anchor="ctr" lIns="0" rIns="0" tIns="0" bIns="0"/>
+          <a:lstStyle/>
+          <a:p>
+            <a:pPr algn="l"/>
+            <a:r>
+              <a:rPr sz="3200" b="1" i="0">
+                <a:solidFill>
+                  <a:srgbClr val="03306E"/>
+                </a:solidFill>
+                <a:latin typeface="Cambria"/>
+              </a:rPr>
+              <a:t>Key terms</a:t>
+            </a:r>
+          </a:p>
+        </p:txBody>
+      </p:sp>
+      <p:sp>
+        <p:nvSpPr>
+          <p:cNvPr id="4" name="TextBox 3"/>
+          <p:cNvSpPr txBox="1"/>
+          <p:nvPr/>
+        </p:nvSpPr>
+        <p:spPr>
+          <a:xfrm>
+            <a:off x="548640" y="6446520"/>
+            <a:ext cx="8229600" cy="274320"/>
+          </a:xfrm>
+          <a:prstGeom prst="rect">
+            <a:avLst/>
+          </a:prstGeom>
+          <a:noFill/>
+        </p:spPr>
+        <p:txBody>
+          <a:bodyPr wrap="square" anchor="t" lIns="0" rIns="0" tIns="0" bIns="0"/>
+          <a:lstStyle/>
+          <a:p>
+            <a:pPr algn="l"/>
+            <a:r>
+              <a:rPr sz="1000" b="0" i="0">
+                <a:solidFill>
+                  <a:srgbClr val="54595D"/>
+                </a:solidFill>
+                <a:latin typeface="Calibri"/>
+              </a:rPr>
+              <a:t>Digital Support and Security T Level  ·  Secure Design and Layered Protection</a:t>
+            </a:r>
+          </a:p>
+        </p:txBody>
+      </p:sp>
+      <p:sp>
+        <p:nvSpPr>
+          <p:cNvPr id="5" name="TextBox 4"/>
+          <p:cNvSpPr txBox="1"/>
+          <p:nvPr/>
+        </p:nvSpPr>
+        <p:spPr>
+          <a:xfrm>
+            <a:off x="10728655" y="6446520"/>
+            <a:ext cx="914400" cy="274320"/>
+          </a:xfrm>
+          <a:prstGeom prst="rect">
+            <a:avLst/>
+          </a:prstGeom>
+          <a:noFill/>
+        </p:spPr>
+        <p:txBody>
+          <a:bodyPr wrap="square" anchor="t" lIns="0" rIns="0" tIns="0" bIns="0"/>
+          <a:lstStyle/>
+          <a:p>
+            <a:pPr algn="r"/>
+            <a:r>
+              <a:rPr sz="1000" b="0" i="0">
+                <a:solidFill>
+                  <a:srgbClr val="54595D"/>
+                </a:solidFill>
+                <a:latin typeface="Calibri"/>
+              </a:rPr>
+              <a:t>13</a:t>
+            </a:r>
+          </a:p>
+        </p:txBody>
+      </p:sp>
+      <p:sp>
+        <p:nvSpPr>
+          <p:cNvPr id="6" name="Rounded Rectangle 5"/>
+          <p:cNvSpPr/>
+          <p:nvPr/>
+        </p:nvSpPr>
+        <p:spPr>
+          <a:xfrm>
+            <a:off x="548640" y="1600200"/>
+            <a:ext cx="5432907" cy="1371600"/>
+          </a:xfrm>
+          <a:prstGeom prst="roundRect">
+            <a:avLst>
+              <a:gd name="adj" fmla="val 8000"/>
+            </a:avLst>
+          </a:prstGeom>
+          <a:solidFill>
+            <a:srgbClr val="EAF3FF"/>
+          </a:solidFill>
+          <a:ln>
+            <a:noFill/>
+          </a:ln>
+          <a:effectLst/>
+        </p:spPr>
+        <p:style>
+          <a:lnRef idx="1">
+            <a:schemeClr val="accent1"/>
+          </a:lnRef>
+          <a:fillRef idx="3">
+            <a:schemeClr val="accent1"/>
+          </a:fillRef>
+          <a:effectRef idx="2">
+            <a:schemeClr val="accent1"/>
+          </a:effectRef>
+          <a:fontRef idx="minor">
+            <a:schemeClr val="lt1"/>
+          </a:fontRef>
+        </p:style>
+        <p:txBody>
+          <a:bodyPr rtlCol="0" anchor="ctr"/>
+          <a:lstStyle/>
+          <a:p/>
+        </p:txBody>
+      </p:sp>
+      <p:sp>
+        <p:nvSpPr>
+          <p:cNvPr id="7" name="TextBox 6"/>
+          <p:cNvSpPr txBox="1"/>
+          <p:nvPr/>
+        </p:nvSpPr>
+        <p:spPr>
+          <a:xfrm>
+            <a:off x="777240" y="1691640"/>
+            <a:ext cx="4975707" cy="1188720"/>
+          </a:xfrm>
+          <a:prstGeom prst="rect">
+            <a:avLst/>
+          </a:prstGeom>
+          <a:noFill/>
+        </p:spPr>
+        <p:txBody>
+          <a:bodyPr wrap="square" anchor="ctr" lIns="0" rIns="0" tIns="0" bIns="0"/>
+          <a:lstStyle/>
+          <a:p>
+            <a:pPr algn="l"/>
+            <a:r>
+              <a:rPr sz="1900" b="1" i="0">
+                <a:solidFill>
+                  <a:srgbClr val="03306E"/>
+                </a:solidFill>
+                <a:latin typeface="Calibri"/>
+              </a:rPr>
+              <a:t>Confidentiality</a:t>
+            </a:r>
+            <a:r>
+              <a:rPr sz="1900">
+                <a:solidFill>
+                  <a:srgbClr val="202122"/>
+                </a:solidFill>
+                <a:latin typeface="Calibri"/>
+              </a:rPr>
+              <a:t>  access restricted to authorised users.</a:t>
+            </a:r>
+          </a:p>
+        </p:txBody>
+      </p:sp>
+      <p:sp>
+        <p:nvSpPr>
+          <p:cNvPr id="8" name="Rounded Rectangle 7"/>
+          <p:cNvSpPr/>
+          <p:nvPr/>
+        </p:nvSpPr>
+        <p:spPr>
+          <a:xfrm>
+            <a:off x="6210147" y="1600200"/>
+            <a:ext cx="5432907" cy="1371600"/>
+          </a:xfrm>
+          <a:prstGeom prst="roundRect">
+            <a:avLst>
+              <a:gd name="adj" fmla="val 8000"/>
+            </a:avLst>
+          </a:prstGeom>
+          <a:solidFill>
+            <a:srgbClr val="EAF3FF"/>
+          </a:solidFill>
+          <a:ln>
+            <a:noFill/>
+          </a:ln>
+          <a:effectLst/>
+        </p:spPr>
+        <p:style>
+          <a:lnRef idx="1">
+            <a:schemeClr val="accent1"/>
+          </a:lnRef>
+          <a:fillRef idx="3">
+            <a:schemeClr val="accent1"/>
+          </a:fillRef>
+          <a:effectRef idx="2">
+            <a:schemeClr val="accent1"/>
+          </a:effectRef>
+          <a:fontRef idx="minor">
+            <a:schemeClr val="lt1"/>
+          </a:fontRef>
+        </p:style>
+        <p:txBody>
+          <a:bodyPr rtlCol="0" anchor="ctr"/>
+          <a:lstStyle/>
+          <a:p/>
+        </p:txBody>
+      </p:sp>
+      <p:sp>
+        <p:nvSpPr>
+          <p:cNvPr id="9" name="TextBox 8"/>
+          <p:cNvSpPr txBox="1"/>
+          <p:nvPr/>
+        </p:nvSpPr>
+        <p:spPr>
+          <a:xfrm>
+            <a:off x="6438747" y="1691640"/>
+            <a:ext cx="4975707" cy="1188720"/>
+          </a:xfrm>
+          <a:prstGeom prst="rect">
+            <a:avLst/>
+          </a:prstGeom>
+          <a:noFill/>
+        </p:spPr>
+        <p:txBody>
+          <a:bodyPr wrap="square" anchor="ctr" lIns="0" rIns="0" tIns="0" bIns="0"/>
+          <a:lstStyle/>
+          <a:p>
+            <a:pPr algn="l"/>
+            <a:r>
+              <a:rPr sz="1900" b="1" i="0">
+                <a:solidFill>
+                  <a:srgbClr val="03306E"/>
+                </a:solidFill>
+                <a:latin typeface="Calibri"/>
+              </a:rPr>
+              <a:t>Integrity</a:t>
+            </a:r>
+            <a:r>
+              <a:rPr sz="1900">
+                <a:solidFill>
+                  <a:srgbClr val="202122"/>
+                </a:solidFill>
+                <a:latin typeface="Calibri"/>
+              </a:rPr>
+              <a:t>  data cannot be changed without authorisation.</a:t>
+            </a:r>
+          </a:p>
+        </p:txBody>
+      </p:sp>
+      <p:sp>
+        <p:nvSpPr>
+          <p:cNvPr id="10" name="Rounded Rectangle 9"/>
+          <p:cNvSpPr/>
+          <p:nvPr/>
+        </p:nvSpPr>
+        <p:spPr>
+          <a:xfrm>
+            <a:off x="548640" y="3200400"/>
+            <a:ext cx="5432907" cy="1371600"/>
+          </a:xfrm>
+          <a:prstGeom prst="roundRect">
+            <a:avLst>
+              <a:gd name="adj" fmla="val 8000"/>
+            </a:avLst>
+          </a:prstGeom>
+          <a:solidFill>
+            <a:srgbClr val="EAF3FF"/>
+          </a:solidFill>
+          <a:ln>
+            <a:noFill/>
+          </a:ln>
+          <a:effectLst/>
+        </p:spPr>
+        <p:style>
+          <a:lnRef idx="1">
+            <a:schemeClr val="accent1"/>
+          </a:lnRef>
+          <a:fillRef idx="3">
+            <a:schemeClr val="accent1"/>
+          </a:fillRef>
+          <a:effectRef idx="2">
+            <a:schemeClr val="accent1"/>
+          </a:effectRef>
+          <a:fontRef idx="minor">
+            <a:schemeClr val="lt1"/>
+          </a:fontRef>
+        </p:style>
+        <p:txBody>
+          <a:bodyPr rtlCol="0" anchor="ctr"/>
+          <a:lstStyle/>
+          <a:p/>
+        </p:txBody>
+      </p:sp>
+      <p:sp>
+        <p:nvSpPr>
+          <p:cNvPr id="11" name="TextBox 10"/>
+          <p:cNvSpPr txBox="1"/>
+          <p:nvPr/>
+        </p:nvSpPr>
+        <p:spPr>
+          <a:xfrm>
+            <a:off x="777240" y="3291840"/>
+            <a:ext cx="4975707" cy="1188720"/>
+          </a:xfrm>
+          <a:prstGeom prst="rect">
+            <a:avLst/>
+          </a:prstGeom>
+          <a:noFill/>
+        </p:spPr>
+        <p:txBody>
+          <a:bodyPr wrap="square" anchor="ctr" lIns="0" rIns="0" tIns="0" bIns="0"/>
+          <a:lstStyle/>
+          <a:p>
+            <a:pPr algn="l"/>
+            <a:r>
+              <a:rPr sz="1900" b="1" i="0">
+                <a:solidFill>
+                  <a:srgbClr val="03306E"/>
+                </a:solidFill>
+                <a:latin typeface="Calibri"/>
+              </a:rPr>
+              <a:t>Availability</a:t>
+            </a:r>
+            <a:r>
+              <a:rPr sz="1900">
+                <a:solidFill>
+                  <a:srgbClr val="202122"/>
+                </a:solidFill>
+                <a:latin typeface="Calibri"/>
+              </a:rPr>
+              <a:t>  authorised users can access data when needed.</a:t>
+            </a:r>
+          </a:p>
+        </p:txBody>
+      </p:sp>
+      <p:sp>
+        <p:nvSpPr>
+          <p:cNvPr id="12" name="Rounded Rectangle 11"/>
+          <p:cNvSpPr/>
+          <p:nvPr/>
+        </p:nvSpPr>
+        <p:spPr>
+          <a:xfrm>
+            <a:off x="6210147" y="3200400"/>
+            <a:ext cx="5432907" cy="1371600"/>
+          </a:xfrm>
+          <a:prstGeom prst="roundRect">
+            <a:avLst>
+              <a:gd name="adj" fmla="val 8000"/>
+            </a:avLst>
+          </a:prstGeom>
+          <a:solidFill>
+            <a:srgbClr val="EAF3FF"/>
+          </a:solidFill>
+          <a:ln>
+            <a:noFill/>
+          </a:ln>
+          <a:effectLst/>
+        </p:spPr>
+        <p:style>
+          <a:lnRef idx="1">
+            <a:schemeClr val="accent1"/>
+          </a:lnRef>
+          <a:fillRef idx="3">
+            <a:schemeClr val="accent1"/>
+          </a:fillRef>
+          <a:effectRef idx="2">
+            <a:schemeClr val="accent1"/>
+          </a:effectRef>
+          <a:fontRef idx="minor">
+            <a:schemeClr val="lt1"/>
+          </a:fontRef>
+        </p:style>
+        <p:txBody>
+          <a:bodyPr rtlCol="0" anchor="ctr"/>
+          <a:lstStyle/>
+          <a:p/>
+        </p:txBody>
+      </p:sp>
+      <p:sp>
+        <p:nvSpPr>
+          <p:cNvPr id="13" name="TextBox 12"/>
+          <p:cNvSpPr txBox="1"/>
+          <p:nvPr/>
+        </p:nvSpPr>
+        <p:spPr>
+          <a:xfrm>
+            <a:off x="6438747" y="3291840"/>
+            <a:ext cx="4975707" cy="1188720"/>
+          </a:xfrm>
+          <a:prstGeom prst="rect">
+            <a:avLst/>
+          </a:prstGeom>
+          <a:noFill/>
+        </p:spPr>
+        <p:txBody>
+          <a:bodyPr wrap="square" anchor="ctr" lIns="0" rIns="0" tIns="0" bIns="0"/>
+          <a:lstStyle/>
+          <a:p>
+            <a:pPr algn="l"/>
+            <a:r>
+              <a:rPr sz="1900" b="1" i="0">
+                <a:solidFill>
+                  <a:srgbClr val="03306E"/>
+                </a:solidFill>
+                <a:latin typeface="Calibri"/>
+              </a:rPr>
+              <a:t>IAAA</a:t>
+            </a:r>
+            <a:r>
+              <a:rPr sz="1900">
+                <a:solidFill>
+                  <a:srgbClr val="202122"/>
+                </a:solidFill>
+                <a:latin typeface="Calibri"/>
+              </a:rPr>
+              <a:t>  identification, authentication, authorisation, accountability.</a:t>
+            </a:r>
+          </a:p>
+        </p:txBody>
+      </p:sp>
+      <p:sp>
+        <p:nvSpPr>
+          <p:cNvPr id="14" name="Rounded Rectangle 13"/>
+          <p:cNvSpPr/>
+          <p:nvPr/>
+        </p:nvSpPr>
+        <p:spPr>
+          <a:xfrm>
+            <a:off x="548640" y="4800600"/>
+            <a:ext cx="5432907" cy="1371600"/>
+          </a:xfrm>
+          <a:prstGeom prst="roundRect">
+            <a:avLst>
+              <a:gd name="adj" fmla="val 8000"/>
+            </a:avLst>
+          </a:prstGeom>
+          <a:solidFill>
+            <a:srgbClr val="EAF3FF"/>
+          </a:solidFill>
+          <a:ln>
+            <a:noFill/>
+          </a:ln>
+          <a:effectLst/>
+        </p:spPr>
+        <p:style>
+          <a:lnRef idx="1">
+            <a:schemeClr val="accent1"/>
+          </a:lnRef>
+          <a:fillRef idx="3">
+            <a:schemeClr val="accent1"/>
+          </a:fillRef>
+          <a:effectRef idx="2">
+            <a:schemeClr val="accent1"/>
+          </a:effectRef>
+          <a:fontRef idx="minor">
+            <a:schemeClr val="lt1"/>
+          </a:fontRef>
+        </p:style>
+        <p:txBody>
+          <a:bodyPr rtlCol="0" anchor="ctr"/>
+          <a:lstStyle/>
+          <a:p/>
+        </p:txBody>
+      </p:sp>
+      <p:sp>
+        <p:nvSpPr>
+          <p:cNvPr id="15" name="TextBox 14"/>
+          <p:cNvSpPr txBox="1"/>
+          <p:nvPr/>
+        </p:nvSpPr>
+        <p:spPr>
+          <a:xfrm>
+            <a:off x="777240" y="4892040"/>
+            <a:ext cx="4975707" cy="1188720"/>
+          </a:xfrm>
+          <a:prstGeom prst="rect">
+            <a:avLst/>
+          </a:prstGeom>
+          <a:noFill/>
+        </p:spPr>
+        <p:txBody>
+          <a:bodyPr wrap="square" anchor="ctr" lIns="0" rIns="0" tIns="0" bIns="0"/>
+          <a:lstStyle/>
+          <a:p>
+            <a:pPr algn="l"/>
+            <a:r>
+              <a:rPr sz="1900" b="1" i="0">
+                <a:solidFill>
+                  <a:srgbClr val="03306E"/>
+                </a:solidFill>
+                <a:latin typeface="Calibri"/>
+              </a:rPr>
+              <a:t>Defence in depth</a:t>
+            </a:r>
+            <a:r>
+              <a:rPr sz="1900">
+                <a:solidFill>
+                  <a:srgbClr val="202122"/>
+                </a:solidFill>
+                <a:latin typeface="Calibri"/>
+              </a:rPr>
+              <a:t>  layered security so one failure does not compromise everything.</a:t>
+            </a:r>
+          </a:p>
+        </p:txBody>
+      </p:sp>
+      <p:sp>
+        <p:nvSpPr>
+          <p:cNvPr id="16" name="Rounded Rectangle 15"/>
+          <p:cNvSpPr/>
+          <p:nvPr/>
+        </p:nvSpPr>
+        <p:spPr>
+          <a:xfrm>
+            <a:off x="6210147" y="4800600"/>
+            <a:ext cx="5432907" cy="1371600"/>
+          </a:xfrm>
+          <a:prstGeom prst="roundRect">
+            <a:avLst>
+              <a:gd name="adj" fmla="val 8000"/>
+            </a:avLst>
+          </a:prstGeom>
+          <a:solidFill>
+            <a:srgbClr val="EAF3FF"/>
+          </a:solidFill>
+          <a:ln>
+            <a:noFill/>
+          </a:ln>
+          <a:effectLst/>
+        </p:spPr>
+        <p:style>
+          <a:lnRef idx="1">
+            <a:schemeClr val="accent1"/>
+          </a:lnRef>
+          <a:fillRef idx="3">
+            <a:schemeClr val="accent1"/>
+          </a:fillRef>
+          <a:effectRef idx="2">
+            <a:schemeClr val="accent1"/>
+          </a:effectRef>
+          <a:fontRef idx="minor">
+            <a:schemeClr val="lt1"/>
+          </a:fontRef>
+        </p:style>
+        <p:txBody>
+          <a:bodyPr rtlCol="0" anchor="ctr"/>
+          <a:lstStyle/>
+          <a:p/>
+        </p:txBody>
+      </p:sp>
+      <p:sp>
+        <p:nvSpPr>
+          <p:cNvPr id="17" name="TextBox 16"/>
+          <p:cNvSpPr txBox="1"/>
+          <p:nvPr/>
+        </p:nvSpPr>
+        <p:spPr>
+          <a:xfrm>
+            <a:off x="6438747" y="4892040"/>
+            <a:ext cx="4975707" cy="1188720"/>
+          </a:xfrm>
+          <a:prstGeom prst="rect">
+            <a:avLst/>
+          </a:prstGeom>
+          <a:noFill/>
+        </p:spPr>
+        <p:txBody>
+          <a:bodyPr wrap="square" anchor="ctr" lIns="0" rIns="0" tIns="0" bIns="0"/>
+          <a:lstStyle/>
+          <a:p>
+            <a:pPr algn="l"/>
+            <a:r>
+              <a:rPr sz="1900" b="1" i="0">
+                <a:solidFill>
+                  <a:srgbClr val="03306E"/>
+                </a:solidFill>
+                <a:latin typeface="Calibri"/>
+              </a:rPr>
+              <a:t>Assurance</a:t>
+            </a:r>
+            <a:r>
+              <a:rPr sz="1900">
+                <a:solidFill>
+                  <a:srgbClr val="202122"/>
+                </a:solidFill>
+                <a:latin typeface="Calibri"/>
+              </a:rPr>
+              <a:t>  confirming that security requirements have actually been met.</a:t>
+            </a:r>
+          </a:p>
+        </p:txBody>
+      </p:sp>
+    </p:spTree>
+  </p:cSld>
+  <p:clrMapOvr>
+    <a:masterClrMapping/>
+  </p:clrMapOvr>
+</p:sld>
+</file>
+
+<file path=ppt/slides/slide14.xml><?xml version="1.0" encoding="utf-8"?>
+<p:sld xmlns:a="http://schemas.openxmlformats.org/drawingml/2006/main" xmlns:p="http://schemas.openxmlformats.org/presentationml/2006/main" xmlns:r="http://schemas.openxmlformats.org/officeDocument/2006/relationships">
+  <p:cSld>
+    <p:bg>
+      <p:bgPr>
+        <a:solidFill>
+          <a:srgbClr val="FFFFFF"/>
+        </a:solidFill>
+        <a:effectLst/>
+      </p:bgPr>
+    </p:bg>
+    <p:spTree>
+      <p:nvGrpSpPr>
+        <p:cNvPr id="1" name=""/>
+        <p:cNvGrpSpPr/>
+        <p:nvPr/>
+      </p:nvGrpSpPr>
+      <p:grpSpPr/>
+      <p:sp>
+        <p:nvSpPr>
+          <p:cNvPr id="2" name="TextBox 1"/>
+          <p:cNvSpPr txBox="1"/>
+          <p:nvPr/>
+        </p:nvSpPr>
+        <p:spPr>
+          <a:xfrm>
+            <a:off x="548640" y="320040"/>
+            <a:ext cx="11094415" cy="274320"/>
+          </a:xfrm>
+          <a:prstGeom prst="rect">
+            <a:avLst/>
+          </a:prstGeom>
+          <a:noFill/>
+        </p:spPr>
+        <p:txBody>
+          <a:bodyPr wrap="square" anchor="t" lIns="0" rIns="0" tIns="0" bIns="0"/>
+          <a:lstStyle/>
+          <a:p>
+            <a:pPr algn="l"/>
+            <a:r>
+              <a:rPr sz="1100" b="1" i="0">
+                <a:solidFill>
+                  <a:srgbClr val="54595D"/>
+                </a:solidFill>
+                <a:latin typeface="Calibri"/>
+              </a:rPr>
+              <a:t>CYBER SECURITY  ·  Cyber Security Content Area 1</a:t>
+            </a:r>
+          </a:p>
+        </p:txBody>
+      </p:sp>
+      <p:sp>
+        <p:nvSpPr>
+          <p:cNvPr id="3" name="TextBox 2"/>
+          <p:cNvSpPr txBox="1"/>
+          <p:nvPr/>
+        </p:nvSpPr>
+        <p:spPr>
+          <a:xfrm>
+            <a:off x="548640" y="566928"/>
+            <a:ext cx="11094415" cy="822960"/>
+          </a:xfrm>
+          <a:prstGeom prst="rect">
+            <a:avLst/>
+          </a:prstGeom>
+          <a:noFill/>
+        </p:spPr>
+        <p:txBody>
+          <a:bodyPr wrap="square" anchor="ctr" lIns="0" rIns="0" tIns="0" bIns="0"/>
+          <a:lstStyle/>
+          <a:p>
+            <a:pPr algn="l"/>
+            <a:r>
+              <a:rPr sz="3200" b="1" i="0">
+                <a:solidFill>
+                  <a:srgbClr val="03306E"/>
+                </a:solidFill>
+                <a:latin typeface="Cambria"/>
+              </a:rPr>
+              <a:t>Check your understanding</a:t>
+            </a:r>
+          </a:p>
+        </p:txBody>
+      </p:sp>
+      <p:sp>
+        <p:nvSpPr>
+          <p:cNvPr id="4" name="TextBox 3"/>
+          <p:cNvSpPr txBox="1"/>
+          <p:nvPr/>
+        </p:nvSpPr>
+        <p:spPr>
+          <a:xfrm>
+            <a:off x="548640" y="6446520"/>
+            <a:ext cx="8229600" cy="274320"/>
+          </a:xfrm>
+          <a:prstGeom prst="rect">
+            <a:avLst/>
+          </a:prstGeom>
+          <a:noFill/>
+        </p:spPr>
+        <p:txBody>
+          <a:bodyPr wrap="square" anchor="t" lIns="0" rIns="0" tIns="0" bIns="0"/>
+          <a:lstStyle/>
+          <a:p>
+            <a:pPr algn="l"/>
+            <a:r>
+              <a:rPr sz="1000" b="0" i="0">
+                <a:solidFill>
+                  <a:srgbClr val="54595D"/>
+                </a:solidFill>
+                <a:latin typeface="Calibri"/>
+              </a:rPr>
+              <a:t>Digital Support and Security T Level  ·  Secure Design and Layered Protection</a:t>
+            </a:r>
+          </a:p>
+        </p:txBody>
+      </p:sp>
+      <p:sp>
+        <p:nvSpPr>
+          <p:cNvPr id="5" name="TextBox 4"/>
+          <p:cNvSpPr txBox="1"/>
+          <p:nvPr/>
+        </p:nvSpPr>
+        <p:spPr>
+          <a:xfrm>
+            <a:off x="10728655" y="6446520"/>
+            <a:ext cx="914400" cy="274320"/>
+          </a:xfrm>
+          <a:prstGeom prst="rect">
+            <a:avLst/>
+          </a:prstGeom>
+          <a:noFill/>
+        </p:spPr>
+        <p:txBody>
+          <a:bodyPr wrap="square" anchor="t" lIns="0" rIns="0" tIns="0" bIns="0"/>
+          <a:lstStyle/>
+          <a:p>
+            <a:pPr algn="r"/>
+            <a:r>
+              <a:rPr sz="1000" b="0" i="0">
+                <a:solidFill>
+                  <a:srgbClr val="54595D"/>
+                </a:solidFill>
+                <a:latin typeface="Calibri"/>
+              </a:rPr>
+              <a:t>14</a:t>
+            </a:r>
+          </a:p>
+        </p:txBody>
+      </p:sp>
+      <p:sp>
+        <p:nvSpPr>
+          <p:cNvPr id="6" name="Oval 5"/>
+          <p:cNvSpPr/>
+          <p:nvPr/>
+        </p:nvSpPr>
+        <p:spPr>
+          <a:xfrm>
+            <a:off x="548640" y="1618488"/>
+            <a:ext cx="411480" cy="411480"/>
+          </a:xfrm>
+          <a:prstGeom prst="ellipse">
+            <a:avLst/>
+          </a:prstGeom>
+          <a:solidFill>
+            <a:srgbClr val="E0463A"/>
+          </a:solidFill>
+          <a:ln>
+            <a:noFill/>
+          </a:ln>
+          <a:effectLst/>
+        </p:spPr>
+        <p:style>
+          <a:lnRef idx="1">
+            <a:schemeClr val="accent1"/>
+          </a:lnRef>
+          <a:fillRef idx="3">
+            <a:schemeClr val="accent1"/>
+          </a:fillRef>
+          <a:effectRef idx="2">
+            <a:schemeClr val="accent1"/>
+          </a:effectRef>
+          <a:fontRef idx="minor">
+            <a:schemeClr val="lt1"/>
+          </a:fontRef>
+        </p:style>
+        <p:txBody>
+          <a:bodyPr rtlCol="0" anchor="ctr" lIns="0" rIns="0" tIns="0" bIns="0"/>
+          <a:lstStyle/>
+          <a:p>
+            <a:pPr algn="ctr"/>
+            <a:r>
+              <a:rPr sz="1400" b="1">
+                <a:solidFill>
+                  <a:srgbClr val="FFFFFF"/>
+                </a:solidFill>
+                <a:latin typeface="Calibri"/>
+              </a:rPr>
+              <a:t>1</a:t>
+            </a:r>
+          </a:p>
+        </p:txBody>
+      </p:sp>
+      <p:sp>
+        <p:nvSpPr>
+          <p:cNvPr id="7" name="TextBox 6"/>
+          <p:cNvSpPr txBox="1"/>
+          <p:nvPr/>
+        </p:nvSpPr>
+        <p:spPr>
+          <a:xfrm>
+            <a:off x="1234440" y="1600200"/>
+            <a:ext cx="10408615" cy="791870"/>
+          </a:xfrm>
+          <a:prstGeom prst="rect">
+            <a:avLst/>
+          </a:prstGeom>
+          <a:noFill/>
+        </p:spPr>
+        <p:txBody>
+          <a:bodyPr wrap="square" anchor="t" lIns="0" rIns="0" tIns="0" bIns="0"/>
+          <a:lstStyle/>
+          <a:p>
+            <a:pPr algn="l"/>
+            <a:r>
+              <a:rPr sz="2200" b="0" i="0">
+                <a:solidFill>
+                  <a:srgbClr val="202122"/>
+                </a:solidFill>
+                <a:latin typeface="Calibri"/>
+              </a:rPr>
+              <a:t>What does segmentation limit?</a:t>
+            </a:r>
+          </a:p>
+        </p:txBody>
+      </p:sp>
+      <p:sp>
+        <p:nvSpPr>
+          <p:cNvPr id="8" name="Oval 7"/>
+          <p:cNvSpPr/>
+          <p:nvPr/>
+        </p:nvSpPr>
+        <p:spPr>
+          <a:xfrm>
+            <a:off x="548640" y="2574950"/>
+            <a:ext cx="411480" cy="411480"/>
+          </a:xfrm>
+          <a:prstGeom prst="ellipse">
+            <a:avLst/>
+          </a:prstGeom>
+          <a:solidFill>
+            <a:srgbClr val="E0463A"/>
+          </a:solidFill>
+          <a:ln>
+            <a:noFill/>
+          </a:ln>
+          <a:effectLst/>
+        </p:spPr>
+        <p:style>
+          <a:lnRef idx="1">
+            <a:schemeClr val="accent1"/>
+          </a:lnRef>
+          <a:fillRef idx="3">
+            <a:schemeClr val="accent1"/>
+          </a:fillRef>
+          <a:effectRef idx="2">
+            <a:schemeClr val="accent1"/>
+          </a:effectRef>
+          <a:fontRef idx="minor">
+            <a:schemeClr val="lt1"/>
+          </a:fontRef>
+        </p:style>
+        <p:txBody>
+          <a:bodyPr rtlCol="0" anchor="ctr" lIns="0" rIns="0" tIns="0" bIns="0"/>
+          <a:lstStyle/>
+          <a:p>
+            <a:pPr algn="ctr"/>
+            <a:r>
+              <a:rPr sz="1400" b="1">
+                <a:solidFill>
+                  <a:srgbClr val="FFFFFF"/>
+                </a:solidFill>
+                <a:latin typeface="Calibri"/>
+              </a:rPr>
+              <a:t>2</a:t>
+            </a:r>
+          </a:p>
+        </p:txBody>
+      </p:sp>
+      <p:sp>
+        <p:nvSpPr>
+          <p:cNvPr id="9" name="TextBox 8"/>
+          <p:cNvSpPr txBox="1"/>
+          <p:nvPr/>
+        </p:nvSpPr>
+        <p:spPr>
+          <a:xfrm>
+            <a:off x="1234440" y="2556662"/>
+            <a:ext cx="10408615" cy="791870"/>
+          </a:xfrm>
+          <a:prstGeom prst="rect">
+            <a:avLst/>
+          </a:prstGeom>
+          <a:noFill/>
+        </p:spPr>
+        <p:txBody>
+          <a:bodyPr wrap="square" anchor="t" lIns="0" rIns="0" tIns="0" bIns="0"/>
+          <a:lstStyle/>
+          <a:p>
+            <a:pPr algn="l"/>
+            <a:r>
+              <a:rPr sz="2200" b="0" i="0">
+                <a:solidFill>
+                  <a:srgbClr val="202122"/>
+                </a:solidFill>
+                <a:latin typeface="Calibri"/>
+              </a:rPr>
+              <a:t>What is zero trust?</a:t>
+            </a:r>
+          </a:p>
+        </p:txBody>
+      </p:sp>
+      <p:sp>
+        <p:nvSpPr>
+          <p:cNvPr id="10" name="Oval 9"/>
+          <p:cNvSpPr/>
+          <p:nvPr/>
+        </p:nvSpPr>
+        <p:spPr>
+          <a:xfrm>
+            <a:off x="548640" y="3531412"/>
+            <a:ext cx="411480" cy="411480"/>
+          </a:xfrm>
+          <a:prstGeom prst="ellipse">
+            <a:avLst/>
+          </a:prstGeom>
+          <a:solidFill>
+            <a:srgbClr val="E0463A"/>
+          </a:solidFill>
+          <a:ln>
+            <a:noFill/>
+          </a:ln>
+          <a:effectLst/>
+        </p:spPr>
+        <p:style>
+          <a:lnRef idx="1">
+            <a:schemeClr val="accent1"/>
+          </a:lnRef>
+          <a:fillRef idx="3">
+            <a:schemeClr val="accent1"/>
+          </a:fillRef>
+          <a:effectRef idx="2">
+            <a:schemeClr val="accent1"/>
+          </a:effectRef>
+          <a:fontRef idx="minor">
+            <a:schemeClr val="lt1"/>
+          </a:fontRef>
+        </p:style>
+        <p:txBody>
+          <a:bodyPr rtlCol="0" anchor="ctr" lIns="0" rIns="0" tIns="0" bIns="0"/>
+          <a:lstStyle/>
+          <a:p>
+            <a:pPr algn="ctr"/>
+            <a:r>
+              <a:rPr sz="1400" b="1">
+                <a:solidFill>
+                  <a:srgbClr val="FFFFFF"/>
+                </a:solidFill>
+                <a:latin typeface="Calibri"/>
+              </a:rPr>
+              <a:t>3</a:t>
+            </a:r>
+          </a:p>
+        </p:txBody>
+      </p:sp>
+      <p:sp>
+        <p:nvSpPr>
+          <p:cNvPr id="11" name="TextBox 10"/>
+          <p:cNvSpPr txBox="1"/>
+          <p:nvPr/>
+        </p:nvSpPr>
+        <p:spPr>
+          <a:xfrm>
+            <a:off x="1234440" y="3513124"/>
+            <a:ext cx="10408615" cy="791870"/>
+          </a:xfrm>
+          <a:prstGeom prst="rect">
+            <a:avLst/>
+          </a:prstGeom>
+          <a:noFill/>
+        </p:spPr>
+        <p:txBody>
+          <a:bodyPr wrap="square" anchor="t" lIns="0" rIns="0" tIns="0" bIns="0"/>
+          <a:lstStyle/>
+          <a:p>
+            <a:pPr algn="l"/>
+            <a:r>
+              <a:rPr sz="2200" b="0" i="0">
+                <a:solidFill>
+                  <a:srgbClr val="202122"/>
+                </a:solidFill>
+                <a:latin typeface="Calibri"/>
+              </a:rPr>
+              <a:t>Where would you look for configuration evidence on a Windows PC?</a:t>
+            </a:r>
+          </a:p>
+        </p:txBody>
+      </p:sp>
+      <p:sp>
+        <p:nvSpPr>
+          <p:cNvPr id="12" name="Oval 11"/>
+          <p:cNvSpPr/>
+          <p:nvPr/>
+        </p:nvSpPr>
+        <p:spPr>
+          <a:xfrm>
+            <a:off x="548640" y="4487875"/>
+            <a:ext cx="411480" cy="411480"/>
+          </a:xfrm>
+          <a:prstGeom prst="ellipse">
+            <a:avLst/>
+          </a:prstGeom>
+          <a:solidFill>
+            <a:srgbClr val="E0463A"/>
+          </a:solidFill>
+          <a:ln>
+            <a:noFill/>
+          </a:ln>
+          <a:effectLst/>
+        </p:spPr>
+        <p:style>
+          <a:lnRef idx="1">
+            <a:schemeClr val="accent1"/>
+          </a:lnRef>
+          <a:fillRef idx="3">
+            <a:schemeClr val="accent1"/>
+          </a:fillRef>
+          <a:effectRef idx="2">
+            <a:schemeClr val="accent1"/>
+          </a:effectRef>
+          <a:fontRef idx="minor">
+            <a:schemeClr val="lt1"/>
+          </a:fontRef>
+        </p:style>
+        <p:txBody>
+          <a:bodyPr rtlCol="0" anchor="ctr" lIns="0" rIns="0" tIns="0" bIns="0"/>
+          <a:lstStyle/>
+          <a:p>
+            <a:pPr algn="ctr"/>
+            <a:r>
+              <a:rPr sz="1400" b="1">
+                <a:solidFill>
+                  <a:srgbClr val="FFFFFF"/>
+                </a:solidFill>
+                <a:latin typeface="Calibri"/>
+              </a:rPr>
+              <a:t>4</a:t>
+            </a:r>
+          </a:p>
+        </p:txBody>
+      </p:sp>
+      <p:sp>
+        <p:nvSpPr>
+          <p:cNvPr id="13" name="TextBox 12"/>
+          <p:cNvSpPr txBox="1"/>
+          <p:nvPr/>
+        </p:nvSpPr>
+        <p:spPr>
+          <a:xfrm>
+            <a:off x="1234440" y="4469587"/>
+            <a:ext cx="10408615" cy="791870"/>
+          </a:xfrm>
+          <a:prstGeom prst="rect">
+            <a:avLst/>
+          </a:prstGeom>
+          <a:noFill/>
+        </p:spPr>
+        <p:txBody>
+          <a:bodyPr wrap="square" anchor="t" lIns="0" rIns="0" tIns="0" bIns="0"/>
+          <a:lstStyle/>
+          <a:p>
+            <a:pPr algn="l"/>
+            <a:r>
+              <a:rPr sz="2200" b="0" i="0">
+                <a:solidFill>
+                  <a:srgbClr val="202122"/>
+                </a:solidFill>
+                <a:latin typeface="Calibri"/>
+              </a:rPr>
+              <a:t>What is a container?</a:t>
+            </a:r>
+          </a:p>
+        </p:txBody>
+      </p:sp>
+      <p:sp>
+        <p:nvSpPr>
+          <p:cNvPr id="14" name="Oval 13"/>
+          <p:cNvSpPr/>
+          <p:nvPr/>
+        </p:nvSpPr>
+        <p:spPr>
+          <a:xfrm>
+            <a:off x="548640" y="5444337"/>
+            <a:ext cx="411480" cy="411480"/>
+          </a:xfrm>
+          <a:prstGeom prst="ellipse">
+            <a:avLst/>
+          </a:prstGeom>
+          <a:solidFill>
+            <a:srgbClr val="E0463A"/>
+          </a:solidFill>
+          <a:ln>
+            <a:noFill/>
+          </a:ln>
+          <a:effectLst/>
+        </p:spPr>
+        <p:style>
+          <a:lnRef idx="1">
+            <a:schemeClr val="accent1"/>
+          </a:lnRef>
+          <a:fillRef idx="3">
+            <a:schemeClr val="accent1"/>
+          </a:fillRef>
+          <a:effectRef idx="2">
+            <a:schemeClr val="accent1"/>
+          </a:effectRef>
+          <a:fontRef idx="minor">
+            <a:schemeClr val="lt1"/>
+          </a:fontRef>
+        </p:style>
+        <p:txBody>
+          <a:bodyPr rtlCol="0" anchor="ctr" lIns="0" rIns="0" tIns="0" bIns="0"/>
+          <a:lstStyle/>
+          <a:p>
+            <a:pPr algn="ctr"/>
+            <a:r>
+              <a:rPr sz="1400" b="1">
+                <a:solidFill>
+                  <a:srgbClr val="FFFFFF"/>
+                </a:solidFill>
+                <a:latin typeface="Calibri"/>
+              </a:rPr>
+              <a:t>5</a:t>
+            </a:r>
+          </a:p>
+        </p:txBody>
+      </p:sp>
+      <p:sp>
+        <p:nvSpPr>
+          <p:cNvPr id="15" name="TextBox 14"/>
+          <p:cNvSpPr txBox="1"/>
+          <p:nvPr/>
+        </p:nvSpPr>
+        <p:spPr>
+          <a:xfrm>
+            <a:off x="1234440" y="5426049"/>
+            <a:ext cx="10408615" cy="791870"/>
+          </a:xfrm>
+          <a:prstGeom prst="rect">
+            <a:avLst/>
+          </a:prstGeom>
+          <a:noFill/>
+        </p:spPr>
+        <p:txBody>
+          <a:bodyPr wrap="square" anchor="t" lIns="0" rIns="0" tIns="0" bIns="0"/>
+          <a:lstStyle/>
+          <a:p>
+            <a:pPr algn="l"/>
+            <a:r>
+              <a:rPr sz="2200" b="0" i="0">
+                <a:solidFill>
+                  <a:srgbClr val="202122"/>
+                </a:solidFill>
+                <a:latin typeface="Calibri"/>
+              </a:rPr>
+              <a:t>Define defence in depth.</a:t>
+            </a:r>
+          </a:p>
+        </p:txBody>
+      </p:sp>
+    </p:spTree>
+  </p:cSld>
+  <p:clrMapOvr>
+    <a:masterClrMapping/>
+  </p:clrMapOvr>
+</p:sld>
+</file>
+
+<file path=ppt/slides/slide15.xml><?xml version="1.0" encoding="utf-8"?>
+<p:sld xmlns:a="http://schemas.openxmlformats.org/drawingml/2006/main" xmlns:p="http://schemas.openxmlformats.org/presentationml/2006/main" xmlns:r="http://schemas.openxmlformats.org/officeDocument/2006/relationships">
+  <p:cSld>
+    <p:bg>
+      <p:bgPr>
+        <a:solidFill>
+          <a:srgbClr val="FFFFFF"/>
+        </a:solidFill>
+        <a:effectLst/>
+      </p:bgPr>
+    </p:bg>
+    <p:spTree>
+      <p:nvGrpSpPr>
+        <p:cNvPr id="1" name=""/>
+        <p:cNvGrpSpPr/>
+        <p:nvPr/>
+      </p:nvGrpSpPr>
+      <p:grpSpPr/>
+      <p:sp>
+        <p:nvSpPr>
+          <p:cNvPr id="2" name="TextBox 1"/>
+          <p:cNvSpPr txBox="1"/>
+          <p:nvPr/>
+        </p:nvSpPr>
+        <p:spPr>
+          <a:xfrm>
+            <a:off x="548640" y="320040"/>
+            <a:ext cx="11094415" cy="274320"/>
+          </a:xfrm>
+          <a:prstGeom prst="rect">
+            <a:avLst/>
+          </a:prstGeom>
+          <a:noFill/>
+        </p:spPr>
+        <p:txBody>
+          <a:bodyPr wrap="square" anchor="t" lIns="0" rIns="0" tIns="0" bIns="0"/>
+          <a:lstStyle/>
+          <a:p>
+            <a:pPr algn="l"/>
+            <a:r>
+              <a:rPr sz="1100" b="1" i="0">
+                <a:solidFill>
+                  <a:srgbClr val="54595D"/>
+                </a:solidFill>
+                <a:latin typeface="Calibri"/>
+              </a:rPr>
+              <a:t>CYBER SECURITY  ·  Cyber Security Content Area 1</a:t>
+            </a:r>
+          </a:p>
+        </p:txBody>
+      </p:sp>
+      <p:sp>
+        <p:nvSpPr>
+          <p:cNvPr id="3" name="TextBox 2"/>
+          <p:cNvSpPr txBox="1"/>
+          <p:nvPr/>
+        </p:nvSpPr>
+        <p:spPr>
+          <a:xfrm>
+            <a:off x="548640" y="566928"/>
+            <a:ext cx="11094415" cy="822960"/>
+          </a:xfrm>
+          <a:prstGeom prst="rect">
+            <a:avLst/>
+          </a:prstGeom>
+          <a:noFill/>
+        </p:spPr>
+        <p:txBody>
+          <a:bodyPr wrap="square" anchor="ctr" lIns="0" rIns="0" tIns="0" bIns="0"/>
+          <a:lstStyle/>
+          <a:p>
+            <a:pPr algn="l"/>
+            <a:r>
+              <a:rPr sz="3200" b="1" i="0">
+                <a:solidFill>
+                  <a:srgbClr val="03306E"/>
+                </a:solidFill>
+                <a:latin typeface="Cambria"/>
+              </a:rPr>
+              <a:t>Answers</a:t>
+            </a:r>
+          </a:p>
+        </p:txBody>
+      </p:sp>
+      <p:sp>
+        <p:nvSpPr>
+          <p:cNvPr id="4" name="TextBox 3"/>
+          <p:cNvSpPr txBox="1"/>
+          <p:nvPr/>
+        </p:nvSpPr>
+        <p:spPr>
+          <a:xfrm>
+            <a:off x="548640" y="6446520"/>
+            <a:ext cx="8229600" cy="274320"/>
+          </a:xfrm>
+          <a:prstGeom prst="rect">
+            <a:avLst/>
+          </a:prstGeom>
+          <a:noFill/>
+        </p:spPr>
+        <p:txBody>
+          <a:bodyPr wrap="square" anchor="t" lIns="0" rIns="0" tIns="0" bIns="0"/>
+          <a:lstStyle/>
+          <a:p>
+            <a:pPr algn="l"/>
+            <a:r>
+              <a:rPr sz="1000" b="0" i="0">
+                <a:solidFill>
+                  <a:srgbClr val="54595D"/>
+                </a:solidFill>
+                <a:latin typeface="Calibri"/>
+              </a:rPr>
+              <a:t>Digital Support and Security T Level  ·  Secure Design and Layered Protection</a:t>
+            </a:r>
+          </a:p>
+        </p:txBody>
+      </p:sp>
+      <p:sp>
+        <p:nvSpPr>
+          <p:cNvPr id="5" name="TextBox 4"/>
+          <p:cNvSpPr txBox="1"/>
+          <p:nvPr/>
+        </p:nvSpPr>
+        <p:spPr>
+          <a:xfrm>
+            <a:off x="10728655" y="6446520"/>
+            <a:ext cx="914400" cy="274320"/>
+          </a:xfrm>
+          <a:prstGeom prst="rect">
+            <a:avLst/>
+          </a:prstGeom>
+          <a:noFill/>
+        </p:spPr>
+        <p:txBody>
+          <a:bodyPr wrap="square" anchor="t" lIns="0" rIns="0" tIns="0" bIns="0"/>
+          <a:lstStyle/>
+          <a:p>
+            <a:pPr algn="r"/>
+            <a:r>
+              <a:rPr sz="1000" b="0" i="0">
+                <a:solidFill>
+                  <a:srgbClr val="54595D"/>
+                </a:solidFill>
+                <a:latin typeface="Calibri"/>
+              </a:rPr>
+              <a:t>15</a:t>
+            </a:r>
+          </a:p>
+        </p:txBody>
+      </p:sp>
+      <p:sp>
+        <p:nvSpPr>
+          <p:cNvPr id="6" name="Oval 5"/>
+          <p:cNvSpPr/>
+          <p:nvPr/>
+        </p:nvSpPr>
+        <p:spPr>
+          <a:xfrm>
+            <a:off x="548640" y="1618488"/>
+            <a:ext cx="411480" cy="411480"/>
+          </a:xfrm>
+          <a:prstGeom prst="ellipse">
+            <a:avLst/>
+          </a:prstGeom>
+          <a:solidFill>
+            <a:srgbClr val="E0463A"/>
+          </a:solidFill>
+          <a:ln>
+            <a:noFill/>
+          </a:ln>
+          <a:effectLst/>
+        </p:spPr>
+        <p:style>
+          <a:lnRef idx="1">
+            <a:schemeClr val="accent1"/>
+          </a:lnRef>
+          <a:fillRef idx="3">
+            <a:schemeClr val="accent1"/>
+          </a:fillRef>
+          <a:effectRef idx="2">
+            <a:schemeClr val="accent1"/>
+          </a:effectRef>
+          <a:fontRef idx="minor">
+            <a:schemeClr val="lt1"/>
+          </a:fontRef>
+        </p:style>
+        <p:txBody>
+          <a:bodyPr rtlCol="0" anchor="ctr" lIns="0" rIns="0" tIns="0" bIns="0"/>
+          <a:lstStyle/>
+          <a:p>
+            <a:pPr algn="ctr"/>
+            <a:r>
+              <a:rPr sz="1400" b="1">
+                <a:solidFill>
+                  <a:srgbClr val="FFFFFF"/>
+                </a:solidFill>
+                <a:latin typeface="Calibri"/>
+              </a:rPr>
+              <a:t>1</a:t>
+            </a:r>
+          </a:p>
+        </p:txBody>
+      </p:sp>
+      <p:sp>
+        <p:nvSpPr>
+          <p:cNvPr id="7" name="TextBox 6"/>
+          <p:cNvSpPr txBox="1"/>
+          <p:nvPr/>
+        </p:nvSpPr>
+        <p:spPr>
+          <a:xfrm>
+            <a:off x="1234440" y="1600200"/>
+            <a:ext cx="10408615" cy="791870"/>
+          </a:xfrm>
+          <a:prstGeom prst="rect">
+            <a:avLst/>
+          </a:prstGeom>
+          <a:noFill/>
+        </p:spPr>
+        <p:txBody>
+          <a:bodyPr wrap="square" anchor="t" lIns="0" rIns="0" tIns="0" bIns="0"/>
+          <a:lstStyle/>
+          <a:p>
+            <a:pPr algn="l"/>
+            <a:r>
+              <a:rPr sz="1800" b="0" i="0">
+                <a:solidFill>
+                  <a:srgbClr val="54595D"/>
+                </a:solidFill>
+                <a:latin typeface="Calibri"/>
+              </a:rPr>
+              <a:t>What does segmentation limit?</a:t>
+            </a:r>
+          </a:p>
+          <a:p>
+            <a:r>
+              <a:rPr sz="1800" b="1">
+                <a:solidFill>
+                  <a:srgbClr val="03306E"/>
+                </a:solidFill>
+                <a:latin typeface="Calibri"/>
+              </a:rPr>
+              <a:t>Lateral movement of attackers or malware.</a:t>
+            </a:r>
+          </a:p>
+        </p:txBody>
+      </p:sp>
+      <p:sp>
+        <p:nvSpPr>
+          <p:cNvPr id="8" name="Oval 7"/>
+          <p:cNvSpPr/>
+          <p:nvPr/>
+        </p:nvSpPr>
+        <p:spPr>
+          <a:xfrm>
+            <a:off x="548640" y="2574950"/>
+            <a:ext cx="411480" cy="411480"/>
+          </a:xfrm>
+          <a:prstGeom prst="ellipse">
+            <a:avLst/>
+          </a:prstGeom>
+          <a:solidFill>
+            <a:srgbClr val="E0463A"/>
+          </a:solidFill>
+          <a:ln>
+            <a:noFill/>
+          </a:ln>
+          <a:effectLst/>
+        </p:spPr>
+        <p:style>
+          <a:lnRef idx="1">
+            <a:schemeClr val="accent1"/>
+          </a:lnRef>
+          <a:fillRef idx="3">
+            <a:schemeClr val="accent1"/>
+          </a:fillRef>
+          <a:effectRef idx="2">
+            <a:schemeClr val="accent1"/>
+          </a:effectRef>
+          <a:fontRef idx="minor">
+            <a:schemeClr val="lt1"/>
+          </a:fontRef>
+        </p:style>
+        <p:txBody>
+          <a:bodyPr rtlCol="0" anchor="ctr" lIns="0" rIns="0" tIns="0" bIns="0"/>
+          <a:lstStyle/>
+          <a:p>
+            <a:pPr algn="ctr"/>
+            <a:r>
+              <a:rPr sz="1400" b="1">
+                <a:solidFill>
+                  <a:srgbClr val="FFFFFF"/>
+                </a:solidFill>
+                <a:latin typeface="Calibri"/>
+              </a:rPr>
+              <a:t>2</a:t>
+            </a:r>
+          </a:p>
+        </p:txBody>
+      </p:sp>
+      <p:sp>
+        <p:nvSpPr>
+          <p:cNvPr id="9" name="TextBox 8"/>
+          <p:cNvSpPr txBox="1"/>
+          <p:nvPr/>
+        </p:nvSpPr>
+        <p:spPr>
+          <a:xfrm>
+            <a:off x="1234440" y="2556662"/>
+            <a:ext cx="10408615" cy="791870"/>
+          </a:xfrm>
+          <a:prstGeom prst="rect">
+            <a:avLst/>
+          </a:prstGeom>
+          <a:noFill/>
+        </p:spPr>
+        <p:txBody>
+          <a:bodyPr wrap="square" anchor="t" lIns="0" rIns="0" tIns="0" bIns="0"/>
+          <a:lstStyle/>
+          <a:p>
+            <a:pPr algn="l"/>
+            <a:r>
+              <a:rPr sz="1800" b="0" i="0">
+                <a:solidFill>
+                  <a:srgbClr val="54595D"/>
+                </a:solidFill>
+                <a:latin typeface="Calibri"/>
+              </a:rPr>
+              <a:t>What is zero trust?</a:t>
+            </a:r>
+          </a:p>
+          <a:p>
+            <a:r>
+              <a:rPr sz="1800" b="1">
+                <a:solidFill>
+                  <a:srgbClr val="03306E"/>
+                </a:solidFill>
+                <a:latin typeface="Calibri"/>
+              </a:rPr>
+              <a:t>Never trusting any user or device by default, even inside the network.</a:t>
+            </a:r>
+          </a:p>
+        </p:txBody>
+      </p:sp>
+      <p:sp>
+        <p:nvSpPr>
+          <p:cNvPr id="10" name="Oval 9"/>
+          <p:cNvSpPr/>
+          <p:nvPr/>
+        </p:nvSpPr>
+        <p:spPr>
+          <a:xfrm>
+            <a:off x="548640" y="3531412"/>
+            <a:ext cx="411480" cy="411480"/>
+          </a:xfrm>
+          <a:prstGeom prst="ellipse">
+            <a:avLst/>
+          </a:prstGeom>
+          <a:solidFill>
+            <a:srgbClr val="E0463A"/>
+          </a:solidFill>
+          <a:ln>
+            <a:noFill/>
+          </a:ln>
+          <a:effectLst/>
+        </p:spPr>
+        <p:style>
+          <a:lnRef idx="1">
+            <a:schemeClr val="accent1"/>
+          </a:lnRef>
+          <a:fillRef idx="3">
+            <a:schemeClr val="accent1"/>
+          </a:fillRef>
+          <a:effectRef idx="2">
+            <a:schemeClr val="accent1"/>
+          </a:effectRef>
+          <a:fontRef idx="minor">
+            <a:schemeClr val="lt1"/>
+          </a:fontRef>
+        </p:style>
+        <p:txBody>
+          <a:bodyPr rtlCol="0" anchor="ctr" lIns="0" rIns="0" tIns="0" bIns="0"/>
+          <a:lstStyle/>
+          <a:p>
+            <a:pPr algn="ctr"/>
+            <a:r>
+              <a:rPr sz="1400" b="1">
+                <a:solidFill>
+                  <a:srgbClr val="FFFFFF"/>
+                </a:solidFill>
+                <a:latin typeface="Calibri"/>
+              </a:rPr>
+              <a:t>3</a:t>
+            </a:r>
+          </a:p>
+        </p:txBody>
+      </p:sp>
+      <p:sp>
+        <p:nvSpPr>
+          <p:cNvPr id="11" name="TextBox 10"/>
+          <p:cNvSpPr txBox="1"/>
+          <p:nvPr/>
+        </p:nvSpPr>
+        <p:spPr>
+          <a:xfrm>
+            <a:off x="1234440" y="3513124"/>
+            <a:ext cx="10408615" cy="791870"/>
+          </a:xfrm>
+          <a:prstGeom prst="rect">
+            <a:avLst/>
+          </a:prstGeom>
+          <a:noFill/>
+        </p:spPr>
+        <p:txBody>
+          <a:bodyPr wrap="square" anchor="t" lIns="0" rIns="0" tIns="0" bIns="0"/>
+          <a:lstStyle/>
+          <a:p>
+            <a:pPr algn="l"/>
+            <a:r>
+              <a:rPr sz="1800" b="0" i="0">
+                <a:solidFill>
+                  <a:srgbClr val="54595D"/>
+                </a:solidFill>
+                <a:latin typeface="Calibri"/>
+              </a:rPr>
+              <a:t>Where would you look for configuration evidence on a Windows PC?</a:t>
+            </a:r>
+          </a:p>
+          <a:p>
+            <a:r>
+              <a:rPr sz="1800" b="1">
+                <a:solidFill>
+                  <a:srgbClr val="03306E"/>
+                </a:solidFill>
+                <a:latin typeface="Calibri"/>
+              </a:rPr>
+              <a:t>The registry.</a:t>
+            </a:r>
+          </a:p>
+        </p:txBody>
+      </p:sp>
+      <p:sp>
+        <p:nvSpPr>
+          <p:cNvPr id="12" name="Oval 11"/>
+          <p:cNvSpPr/>
+          <p:nvPr/>
+        </p:nvSpPr>
+        <p:spPr>
+          <a:xfrm>
+            <a:off x="548640" y="4487875"/>
+            <a:ext cx="411480" cy="411480"/>
+          </a:xfrm>
+          <a:prstGeom prst="ellipse">
+            <a:avLst/>
+          </a:prstGeom>
+          <a:solidFill>
+            <a:srgbClr val="E0463A"/>
+          </a:solidFill>
+          <a:ln>
+            <a:noFill/>
+          </a:ln>
+          <a:effectLst/>
+        </p:spPr>
+        <p:style>
+          <a:lnRef idx="1">
+            <a:schemeClr val="accent1"/>
+          </a:lnRef>
+          <a:fillRef idx="3">
+            <a:schemeClr val="accent1"/>
+          </a:fillRef>
+          <a:effectRef idx="2">
+            <a:schemeClr val="accent1"/>
+          </a:effectRef>
+          <a:fontRef idx="minor">
+            <a:schemeClr val="lt1"/>
+          </a:fontRef>
+        </p:style>
+        <p:txBody>
+          <a:bodyPr rtlCol="0" anchor="ctr" lIns="0" rIns="0" tIns="0" bIns="0"/>
+          <a:lstStyle/>
+          <a:p>
+            <a:pPr algn="ctr"/>
+            <a:r>
+              <a:rPr sz="1400" b="1">
+                <a:solidFill>
+                  <a:srgbClr val="FFFFFF"/>
+                </a:solidFill>
+                <a:latin typeface="Calibri"/>
+              </a:rPr>
+              <a:t>4</a:t>
+            </a:r>
+          </a:p>
+        </p:txBody>
+      </p:sp>
+      <p:sp>
+        <p:nvSpPr>
+          <p:cNvPr id="13" name="TextBox 12"/>
+          <p:cNvSpPr txBox="1"/>
+          <p:nvPr/>
+        </p:nvSpPr>
+        <p:spPr>
+          <a:xfrm>
+            <a:off x="1234440" y="4469587"/>
+            <a:ext cx="10408615" cy="791870"/>
+          </a:xfrm>
+          <a:prstGeom prst="rect">
+            <a:avLst/>
+          </a:prstGeom>
+          <a:noFill/>
+        </p:spPr>
+        <p:txBody>
+          <a:bodyPr wrap="square" anchor="t" lIns="0" rIns="0" tIns="0" bIns="0"/>
+          <a:lstStyle/>
+          <a:p>
+            <a:pPr algn="l"/>
+            <a:r>
+              <a:rPr sz="1800" b="0" i="0">
+                <a:solidFill>
+                  <a:srgbClr val="54595D"/>
+                </a:solidFill>
+                <a:latin typeface="Calibri"/>
+              </a:rPr>
+              <a:t>What is a container?</a:t>
+            </a:r>
+          </a:p>
+          <a:p>
+            <a:r>
+              <a:rPr sz="1800" b="1">
+                <a:solidFill>
+                  <a:srgbClr val="03306E"/>
+                </a:solidFill>
+                <a:latin typeface="Calibri"/>
+              </a:rPr>
+              <a:t>An isolated, portable package holding only what an application needs to run.</a:t>
+            </a:r>
+          </a:p>
+        </p:txBody>
+      </p:sp>
+      <p:sp>
+        <p:nvSpPr>
+          <p:cNvPr id="14" name="Oval 13"/>
+          <p:cNvSpPr/>
+          <p:nvPr/>
+        </p:nvSpPr>
+        <p:spPr>
+          <a:xfrm>
+            <a:off x="548640" y="5444337"/>
+            <a:ext cx="411480" cy="411480"/>
+          </a:xfrm>
+          <a:prstGeom prst="ellipse">
+            <a:avLst/>
+          </a:prstGeom>
+          <a:solidFill>
+            <a:srgbClr val="E0463A"/>
+          </a:solidFill>
+          <a:ln>
+            <a:noFill/>
+          </a:ln>
+          <a:effectLst/>
+        </p:spPr>
+        <p:style>
+          <a:lnRef idx="1">
+            <a:schemeClr val="accent1"/>
+          </a:lnRef>
+          <a:fillRef idx="3">
+            <a:schemeClr val="accent1"/>
+          </a:fillRef>
+          <a:effectRef idx="2">
+            <a:schemeClr val="accent1"/>
+          </a:effectRef>
+          <a:fontRef idx="minor">
+            <a:schemeClr val="lt1"/>
+          </a:fontRef>
+        </p:style>
+        <p:txBody>
+          <a:bodyPr rtlCol="0" anchor="ctr" lIns="0" rIns="0" tIns="0" bIns="0"/>
+          <a:lstStyle/>
+          <a:p>
+            <a:pPr algn="ctr"/>
+            <a:r>
+              <a:rPr sz="1400" b="1">
+                <a:solidFill>
+                  <a:srgbClr val="FFFFFF"/>
+                </a:solidFill>
+                <a:latin typeface="Calibri"/>
+              </a:rPr>
+              <a:t>5</a:t>
+            </a:r>
+          </a:p>
+        </p:txBody>
+      </p:sp>
+      <p:sp>
+        <p:nvSpPr>
+          <p:cNvPr id="15" name="TextBox 14"/>
+          <p:cNvSpPr txBox="1"/>
+          <p:nvPr/>
+        </p:nvSpPr>
+        <p:spPr>
+          <a:xfrm>
+            <a:off x="1234440" y="5426049"/>
+            <a:ext cx="10408615" cy="791870"/>
+          </a:xfrm>
+          <a:prstGeom prst="rect">
+            <a:avLst/>
+          </a:prstGeom>
+          <a:noFill/>
+        </p:spPr>
+        <p:txBody>
+          <a:bodyPr wrap="square" anchor="t" lIns="0" rIns="0" tIns="0" bIns="0"/>
+          <a:lstStyle/>
+          <a:p>
+            <a:pPr algn="l"/>
+            <a:r>
+              <a:rPr sz="1800" b="0" i="0">
+                <a:solidFill>
+                  <a:srgbClr val="54595D"/>
+                </a:solidFill>
+                <a:latin typeface="Calibri"/>
+              </a:rPr>
+              <a:t>Define defence in depth.</a:t>
+            </a:r>
+          </a:p>
+          <a:p>
+            <a:r>
+              <a:rPr sz="1800" b="1">
+                <a:solidFill>
+                  <a:srgbClr val="03306E"/>
+                </a:solidFill>
+                <a:latin typeface="Calibri"/>
+              </a:rPr>
+              <a:t>Layered security so a single failure does not compromise the whole system.</a:t>
+            </a:r>
+          </a:p>
+        </p:txBody>
+      </p:sp>
+    </p:spTree>
+  </p:cSld>
+  <p:clrMapOvr>
+    <a:masterClrMapping/>
+  </p:clrMapOvr>
+</p:sld>
+</file>
+
+<file path=ppt/slides/slide16.xml><?xml version="1.0" encoding="utf-8"?>
+<p:sld xmlns:a="http://schemas.openxmlformats.org/drawingml/2006/main" xmlns:p="http://schemas.openxmlformats.org/presentationml/2006/main" xmlns:r="http://schemas.openxmlformats.org/officeDocument/2006/relationships">
+  <p:cSld>
+    <p:bg>
+      <p:bgPr>
+        <a:solidFill>
+          <a:srgbClr val="FFFFFF"/>
+        </a:solidFill>
+        <a:effectLst/>
+      </p:bgPr>
+    </p:bg>
+    <p:spTree>
+      <p:nvGrpSpPr>
+        <p:cNvPr id="1" name=""/>
+        <p:cNvGrpSpPr/>
+        <p:nvPr/>
+      </p:nvGrpSpPr>
+      <p:grpSpPr/>
+      <p:sp>
+        <p:nvSpPr>
+          <p:cNvPr id="2" name="TextBox 1"/>
+          <p:cNvSpPr txBox="1"/>
+          <p:nvPr/>
+        </p:nvSpPr>
+        <p:spPr>
+          <a:xfrm>
+            <a:off x="548640" y="320040"/>
+            <a:ext cx="11094415" cy="274320"/>
+          </a:xfrm>
+          <a:prstGeom prst="rect">
+            <a:avLst/>
+          </a:prstGeom>
+          <a:noFill/>
+        </p:spPr>
+        <p:txBody>
+          <a:bodyPr wrap="square" anchor="t" lIns="0" rIns="0" tIns="0" bIns="0"/>
+          <a:lstStyle/>
+          <a:p>
+            <a:pPr algn="l"/>
+            <a:r>
+              <a:rPr sz="1100" b="1" i="0">
+                <a:solidFill>
+                  <a:srgbClr val="54595D"/>
+                </a:solidFill>
+                <a:latin typeface="Calibri"/>
+              </a:rPr>
+              <a:t>CYBER SECURITY  ·  Cyber Security Content Area 1</a:t>
+            </a:r>
+          </a:p>
+        </p:txBody>
+      </p:sp>
+      <p:sp>
+        <p:nvSpPr>
+          <p:cNvPr id="3" name="TextBox 2"/>
+          <p:cNvSpPr txBox="1"/>
+          <p:nvPr/>
+        </p:nvSpPr>
+        <p:spPr>
+          <a:xfrm>
+            <a:off x="548640" y="566928"/>
+            <a:ext cx="11094415" cy="822960"/>
+          </a:xfrm>
+          <a:prstGeom prst="rect">
+            <a:avLst/>
+          </a:prstGeom>
+          <a:noFill/>
+        </p:spPr>
+        <p:txBody>
+          <a:bodyPr wrap="square" anchor="ctr" lIns="0" rIns="0" tIns="0" bIns="0"/>
+          <a:lstStyle/>
+          <a:p>
+            <a:pPr algn="l"/>
+            <a:r>
+              <a:rPr sz="3200" b="1" i="0">
+                <a:solidFill>
+                  <a:srgbClr val="03306E"/>
+                </a:solidFill>
+                <a:latin typeface="Cambria"/>
+              </a:rPr>
+              <a:t>Activity: Layer up</a:t>
+            </a:r>
+          </a:p>
+        </p:txBody>
+      </p:sp>
+      <p:sp>
+        <p:nvSpPr>
+          <p:cNvPr id="4" name="TextBox 3"/>
+          <p:cNvSpPr txBox="1"/>
+          <p:nvPr/>
+        </p:nvSpPr>
+        <p:spPr>
+          <a:xfrm>
+            <a:off x="548640" y="6446520"/>
+            <a:ext cx="8229600" cy="274320"/>
+          </a:xfrm>
+          <a:prstGeom prst="rect">
+            <a:avLst/>
+          </a:prstGeom>
+          <a:noFill/>
+        </p:spPr>
+        <p:txBody>
+          <a:bodyPr wrap="square" anchor="t" lIns="0" rIns="0" tIns="0" bIns="0"/>
+          <a:lstStyle/>
+          <a:p>
+            <a:pPr algn="l"/>
+            <a:r>
+              <a:rPr sz="1000" b="0" i="0">
+                <a:solidFill>
+                  <a:srgbClr val="54595D"/>
+                </a:solidFill>
+                <a:latin typeface="Calibri"/>
+              </a:rPr>
+              <a:t>Digital Support and Security T Level  ·  Secure Design and Layered Protection</a:t>
+            </a:r>
+          </a:p>
+        </p:txBody>
+      </p:sp>
+      <p:sp>
+        <p:nvSpPr>
+          <p:cNvPr id="5" name="TextBox 4"/>
+          <p:cNvSpPr txBox="1"/>
+          <p:nvPr/>
+        </p:nvSpPr>
+        <p:spPr>
+          <a:xfrm>
+            <a:off x="10728655" y="6446520"/>
+            <a:ext cx="914400" cy="274320"/>
+          </a:xfrm>
+          <a:prstGeom prst="rect">
+            <a:avLst/>
+          </a:prstGeom>
+          <a:noFill/>
+        </p:spPr>
+        <p:txBody>
+          <a:bodyPr wrap="square" anchor="t" lIns="0" rIns="0" tIns="0" bIns="0"/>
+          <a:lstStyle/>
+          <a:p>
+            <a:pPr algn="r"/>
+            <a:r>
+              <a:rPr sz="1000" b="0" i="0">
+                <a:solidFill>
+                  <a:srgbClr val="54595D"/>
+                </a:solidFill>
+                <a:latin typeface="Calibri"/>
+              </a:rPr>
+              <a:t>16</a:t>
             </a:r>
           </a:p>
         </p:txBody>
@@ -4822,7 +8707,7 @@
 </p:sld>
 </file>
 
-<file path=ppt/slides/slide11.xml><?xml version="1.0" encoding="utf-8"?>
+<file path=ppt/slides/slide17.xml><?xml version="1.0" encoding="utf-8"?>
 <p:sld xmlns:a="http://schemas.openxmlformats.org/drawingml/2006/main" xmlns:p="http://schemas.openxmlformats.org/presentationml/2006/main" xmlns:r="http://schemas.openxmlformats.org/officeDocument/2006/relationships">
   <p:cSld>
     <p:bg>
@@ -6139,6 +10024,491 @@
                 <a:latin typeface="Calibri"/>
               </a:rPr>
               <a:t>3</a:t>
+            </a:r>
+          </a:p>
+        </p:txBody>
+      </p:sp>
+      <p:sp>
+        <p:nvSpPr>
+          <p:cNvPr id="6" name="TextBox 5"/>
+          <p:cNvSpPr txBox="1"/>
+          <p:nvPr/>
+        </p:nvSpPr>
+        <p:spPr>
+          <a:xfrm>
+            <a:off x="548640" y="1554480"/>
+            <a:ext cx="6720840" cy="4617720"/>
+          </a:xfrm>
+          <a:prstGeom prst="rect">
+            <a:avLst/>
+          </a:prstGeom>
+          <a:noFill/>
+        </p:spPr>
+        <p:txBody>
+          <a:bodyPr wrap="square" lIns="0" rIns="0" tIns="0" bIns="0">
+            <a:spAutoFit/>
+          </a:bodyPr>
+          <a:lstStyle/>
+          <a:p>
+            <a:pPr>
+              <a:spcAft>
+                <a:spcPts val="1080"/>
+              </a:spcAft>
+            </a:pPr>
+            <a:r>
+              <a:rPr sz="1800" b="0">
+                <a:solidFill>
+                  <a:srgbClr val="202122"/>
+                </a:solidFill>
+                <a:latin typeface="Calibri"/>
+              </a:rPr>
+              <a:t>Defence in depth protects every layer so one failure doesn't expose everything.</a:t>
+            </a:r>
+          </a:p>
+          <a:p>
+            <a:pPr>
+              <a:spcAft>
+                <a:spcPts val="1080"/>
+              </a:spcAft>
+            </a:pPr>
+            <a:r>
+              <a:rPr sz="1800" b="1">
+                <a:solidFill>
+                  <a:srgbClr val="202122"/>
+                </a:solidFill>
+                <a:latin typeface="Calibri"/>
+              </a:rPr>
+              <a:t>Hardware:</a:t>
+            </a:r>
+            <a:r>
+              <a:rPr sz="1800" b="0">
+                <a:solidFill>
+                  <a:srgbClr val="202122"/>
+                </a:solidFill>
+                <a:latin typeface="Calibri"/>
+              </a:rPr>
+              <a:t> physical controls such as locked cages, CCTV and key-card doors, plus device hardening.</a:t>
+            </a:r>
+          </a:p>
+          <a:p>
+            <a:pPr>
+              <a:spcAft>
+                <a:spcPts val="1080"/>
+              </a:spcAft>
+            </a:pPr>
+            <a:r>
+              <a:rPr sz="1800" b="1">
+                <a:solidFill>
+                  <a:srgbClr val="202122"/>
+                </a:solidFill>
+                <a:latin typeface="Calibri"/>
+              </a:rPr>
+              <a:t>Operating system:</a:t>
+            </a:r>
+            <a:r>
+              <a:rPr sz="1800" b="0">
+                <a:solidFill>
+                  <a:srgbClr val="202122"/>
+                </a:solidFill>
+                <a:latin typeface="Calibri"/>
+              </a:rPr>
+              <a:t> install patches, with a system snapshot to roll back a bad update, and harden the OS by removing unneeded accounts, functions, apps and ports.</a:t>
+            </a:r>
+          </a:p>
+          <a:p>
+            <a:pPr>
+              <a:spcAft>
+                <a:spcPts val="1080"/>
+              </a:spcAft>
+            </a:pPr>
+            <a:r>
+              <a:rPr sz="1800" b="1">
+                <a:solidFill>
+                  <a:srgbClr val="202122"/>
+                </a:solidFill>
+                <a:latin typeface="Calibri"/>
+              </a:rPr>
+              <a:t>Network:</a:t>
+            </a:r>
+            <a:r>
+              <a:rPr sz="1800" b="0">
+                <a:solidFill>
+                  <a:srgbClr val="202122"/>
+                </a:solidFill>
+                <a:latin typeface="Calibri"/>
+              </a:rPr>
+              <a:t> segmentation to limit how far an attacker can move, monitoring, hardening and firewalls.</a:t>
+            </a:r>
+          </a:p>
+          <a:p>
+            <a:pPr>
+              <a:spcAft>
+                <a:spcPts val="1080"/>
+              </a:spcAft>
+            </a:pPr>
+            <a:r>
+              <a:rPr sz="1800" b="1">
+                <a:solidFill>
+                  <a:srgbClr val="202122"/>
+                </a:solidFill>
+                <a:latin typeface="Calibri"/>
+              </a:rPr>
+              <a:t>Software:</a:t>
+            </a:r>
+            <a:r>
+              <a:rPr sz="1800" b="0">
+                <a:solidFill>
+                  <a:srgbClr val="202122"/>
+                </a:solidFill>
+                <a:latin typeface="Calibri"/>
+              </a:rPr>
+              <a:t> anti-malware, single sign-on, MFA, privileged access management, application firewalls, vulnerability scanning and strong password policies.</a:t>
+            </a:r>
+          </a:p>
+          <a:p>
+            <a:pPr>
+              <a:spcAft>
+                <a:spcPts val="1080"/>
+              </a:spcAft>
+            </a:pPr>
+            <a:r>
+              <a:rPr sz="1800" b="1">
+                <a:solidFill>
+                  <a:srgbClr val="202122"/>
+                </a:solidFill>
+                <a:latin typeface="Calibri"/>
+              </a:rPr>
+              <a:t>Cloud:</a:t>
+            </a:r>
+            <a:r>
+              <a:rPr sz="1800" b="0">
+                <a:solidFill>
+                  <a:srgbClr val="202122"/>
+                </a:solidFill>
+                <a:latin typeface="Calibri"/>
+              </a:rPr>
+              <a:t> audit logs, access controls and MFA, including location checks.</a:t>
+            </a:r>
+          </a:p>
+        </p:txBody>
+      </p:sp>
+      <p:sp>
+        <p:nvSpPr>
+          <p:cNvPr id="7" name="Rounded Rectangle 6"/>
+          <p:cNvSpPr/>
+          <p:nvPr/>
+        </p:nvSpPr>
+        <p:spPr>
+          <a:xfrm>
+            <a:off x="7772400" y="1554480"/>
+            <a:ext cx="3867912" cy="4526280"/>
+          </a:xfrm>
+          <a:prstGeom prst="roundRect">
+            <a:avLst>
+              <a:gd name="adj" fmla="val 8000"/>
+            </a:avLst>
+          </a:prstGeom>
+          <a:solidFill>
+            <a:srgbClr val="03306E"/>
+          </a:solidFill>
+          <a:ln>
+            <a:noFill/>
+          </a:ln>
+          <a:effectLst/>
+        </p:spPr>
+        <p:style>
+          <a:lnRef idx="1">
+            <a:schemeClr val="accent1"/>
+          </a:lnRef>
+          <a:fillRef idx="3">
+            <a:schemeClr val="accent1"/>
+          </a:fillRef>
+          <a:effectRef idx="2">
+            <a:schemeClr val="accent1"/>
+          </a:effectRef>
+          <a:fontRef idx="minor">
+            <a:schemeClr val="lt1"/>
+          </a:fontRef>
+        </p:style>
+        <p:txBody>
+          <a:bodyPr rtlCol="0" anchor="ctr"/>
+          <a:lstStyle/>
+          <a:p/>
+        </p:txBody>
+      </p:sp>
+      <p:sp>
+        <p:nvSpPr>
+          <p:cNvPr id="8" name="Oval 7"/>
+          <p:cNvSpPr/>
+          <p:nvPr/>
+        </p:nvSpPr>
+        <p:spPr>
+          <a:xfrm>
+            <a:off x="8046720" y="1828800"/>
+            <a:ext cx="548640" cy="548640"/>
+          </a:xfrm>
+          <a:prstGeom prst="ellipse">
+            <a:avLst/>
+          </a:prstGeom>
+          <a:solidFill>
+            <a:srgbClr val="E0463A"/>
+          </a:solidFill>
+          <a:ln>
+            <a:noFill/>
+          </a:ln>
+          <a:effectLst/>
+        </p:spPr>
+        <p:style>
+          <a:lnRef idx="1">
+            <a:schemeClr val="accent1"/>
+          </a:lnRef>
+          <a:fillRef idx="3">
+            <a:schemeClr val="accent1"/>
+          </a:fillRef>
+          <a:effectRef idx="2">
+            <a:schemeClr val="accent1"/>
+          </a:effectRef>
+          <a:fontRef idx="minor">
+            <a:schemeClr val="lt1"/>
+          </a:fontRef>
+        </p:style>
+        <p:txBody>
+          <a:bodyPr rtlCol="0" anchor="ctr" lIns="0" rIns="0" tIns="0" bIns="0"/>
+          <a:lstStyle/>
+          <a:p>
+            <a:pPr algn="ctr"/>
+            <a:r>
+              <a:rPr sz="1300" b="1">
+                <a:solidFill>
+                  <a:srgbClr val="FFFFFF"/>
+                </a:solidFill>
+                <a:latin typeface="Calibri"/>
+              </a:rPr>
+              <a:t>e.g.</a:t>
+            </a:r>
+          </a:p>
+        </p:txBody>
+      </p:sp>
+      <p:sp>
+        <p:nvSpPr>
+          <p:cNvPr id="9" name="TextBox 8"/>
+          <p:cNvSpPr txBox="1"/>
+          <p:nvPr/>
+        </p:nvSpPr>
+        <p:spPr>
+          <a:xfrm>
+            <a:off x="8046720" y="2560320"/>
+            <a:ext cx="3291840" cy="365760"/>
+          </a:xfrm>
+          <a:prstGeom prst="rect">
+            <a:avLst/>
+          </a:prstGeom>
+          <a:noFill/>
+        </p:spPr>
+        <p:txBody>
+          <a:bodyPr wrap="square" anchor="t" lIns="0" rIns="0" tIns="0" bIns="0"/>
+          <a:lstStyle/>
+          <a:p>
+            <a:pPr algn="l"/>
+            <a:r>
+              <a:rPr sz="1300" b="1" i="0">
+                <a:solidFill>
+                  <a:srgbClr val="A9C8F0"/>
+                </a:solidFill>
+                <a:latin typeface="Calibri"/>
+              </a:rPr>
+              <a:t>EXAMPLE</a:t>
+            </a:r>
+          </a:p>
+        </p:txBody>
+      </p:sp>
+      <p:sp>
+        <p:nvSpPr>
+          <p:cNvPr id="10" name="TextBox 9"/>
+          <p:cNvSpPr txBox="1"/>
+          <p:nvPr/>
+        </p:nvSpPr>
+        <p:spPr>
+          <a:xfrm>
+            <a:off x="8046720" y="2971800"/>
+            <a:ext cx="3291840" cy="2971800"/>
+          </a:xfrm>
+          <a:prstGeom prst="rect">
+            <a:avLst/>
+          </a:prstGeom>
+          <a:noFill/>
+        </p:spPr>
+        <p:txBody>
+          <a:bodyPr wrap="square" anchor="t" lIns="0" rIns="0" tIns="0" bIns="0"/>
+          <a:lstStyle/>
+          <a:p>
+            <a:pPr algn="l"/>
+            <a:r>
+              <a:rPr sz="1900" b="0" i="0">
+                <a:solidFill>
+                  <a:srgbClr val="FFFFFF"/>
+                </a:solidFill>
+                <a:latin typeface="Cambria"/>
+              </a:rPr>
+              <a:t>An attacker who phishes a password still faces MFA (software), can't reach servers from the guest VLAN (network), and triggers an alert in the cloud logs.</a:t>
+            </a:r>
+          </a:p>
+        </p:txBody>
+      </p:sp>
+    </p:spTree>
+  </p:cSld>
+  <p:clrMapOvr>
+    <a:masterClrMapping/>
+  </p:clrMapOvr>
+</p:sld>
+</file>
+
+<file path=ppt/slides/slide4.xml><?xml version="1.0" encoding="utf-8"?>
+<p:sld xmlns:a="http://schemas.openxmlformats.org/drawingml/2006/main" xmlns:p="http://schemas.openxmlformats.org/presentationml/2006/main" xmlns:r="http://schemas.openxmlformats.org/officeDocument/2006/relationships">
+  <p:cSld>
+    <p:bg>
+      <p:bgPr>
+        <a:solidFill>
+          <a:srgbClr val="FFFFFF"/>
+        </a:solidFill>
+        <a:effectLst/>
+      </p:bgPr>
+    </p:bg>
+    <p:spTree>
+      <p:nvGrpSpPr>
+        <p:cNvPr id="1" name=""/>
+        <p:cNvGrpSpPr/>
+        <p:nvPr/>
+      </p:nvGrpSpPr>
+      <p:grpSpPr/>
+      <p:sp>
+        <p:nvSpPr>
+          <p:cNvPr id="2" name="TextBox 1"/>
+          <p:cNvSpPr txBox="1"/>
+          <p:nvPr/>
+        </p:nvSpPr>
+        <p:spPr>
+          <a:xfrm>
+            <a:off x="548640" y="320040"/>
+            <a:ext cx="11094415" cy="274320"/>
+          </a:xfrm>
+          <a:prstGeom prst="rect">
+            <a:avLst/>
+          </a:prstGeom>
+          <a:noFill/>
+        </p:spPr>
+        <p:txBody>
+          <a:bodyPr wrap="square" anchor="t" lIns="0" rIns="0" tIns="0" bIns="0"/>
+          <a:lstStyle/>
+          <a:p>
+            <a:pPr algn="l"/>
+            <a:r>
+              <a:rPr sz="1100" b="1" i="0">
+                <a:solidFill>
+                  <a:srgbClr val="54595D"/>
+                </a:solidFill>
+                <a:latin typeface="Calibri"/>
+              </a:rPr>
+              <a:t>CYBER SECURITY  ·  Cyber Security Content Area 1</a:t>
+            </a:r>
+          </a:p>
+        </p:txBody>
+      </p:sp>
+      <p:sp>
+        <p:nvSpPr>
+          <p:cNvPr id="3" name="TextBox 2"/>
+          <p:cNvSpPr txBox="1"/>
+          <p:nvPr/>
+        </p:nvSpPr>
+        <p:spPr>
+          <a:xfrm>
+            <a:off x="548640" y="566928"/>
+            <a:ext cx="11094415" cy="822960"/>
+          </a:xfrm>
+          <a:prstGeom prst="rect">
+            <a:avLst/>
+          </a:prstGeom>
+          <a:noFill/>
+        </p:spPr>
+        <p:txBody>
+          <a:bodyPr wrap="square" anchor="ctr" lIns="0" rIns="0" tIns="0" bIns="0"/>
+          <a:lstStyle/>
+          <a:p>
+            <a:pPr algn="l"/>
+            <a:r>
+              <a:rPr sz="3200" b="1" i="0">
+                <a:solidFill>
+                  <a:srgbClr val="03306E"/>
+                </a:solidFill>
+                <a:latin typeface="Cambria"/>
+              </a:rPr>
+              <a:t>Protection methods by layer</a:t>
+            </a:r>
+          </a:p>
+        </p:txBody>
+      </p:sp>
+      <p:sp>
+        <p:nvSpPr>
+          <p:cNvPr id="4" name="TextBox 3"/>
+          <p:cNvSpPr txBox="1"/>
+          <p:nvPr/>
+        </p:nvSpPr>
+        <p:spPr>
+          <a:xfrm>
+            <a:off x="548640" y="6446520"/>
+            <a:ext cx="8229600" cy="274320"/>
+          </a:xfrm>
+          <a:prstGeom prst="rect">
+            <a:avLst/>
+          </a:prstGeom>
+          <a:noFill/>
+        </p:spPr>
+        <p:txBody>
+          <a:bodyPr wrap="square" anchor="t" lIns="0" rIns="0" tIns="0" bIns="0"/>
+          <a:lstStyle/>
+          <a:p>
+            <a:pPr algn="l"/>
+            <a:r>
+              <a:rPr sz="1000" b="0" i="0">
+                <a:solidFill>
+                  <a:srgbClr val="54595D"/>
+                </a:solidFill>
+                <a:latin typeface="Calibri"/>
+              </a:rPr>
+              <a:t>Digital Support and Security T Level  ·  Secure Design and Layered Protection</a:t>
+            </a:r>
+          </a:p>
+        </p:txBody>
+      </p:sp>
+      <p:sp>
+        <p:nvSpPr>
+          <p:cNvPr id="5" name="TextBox 4"/>
+          <p:cNvSpPr txBox="1"/>
+          <p:nvPr/>
+        </p:nvSpPr>
+        <p:spPr>
+          <a:xfrm>
+            <a:off x="10728655" y="6446520"/>
+            <a:ext cx="914400" cy="274320"/>
+          </a:xfrm>
+          <a:prstGeom prst="rect">
+            <a:avLst/>
+          </a:prstGeom>
+          <a:noFill/>
+        </p:spPr>
+        <p:txBody>
+          <a:bodyPr wrap="square" anchor="t" lIns="0" rIns="0" tIns="0" bIns="0"/>
+          <a:lstStyle/>
+          <a:p>
+            <a:pPr algn="r"/>
+            <a:r>
+              <a:rPr sz="1000" b="0" i="0">
+                <a:solidFill>
+                  <a:srgbClr val="54595D"/>
+                </a:solidFill>
+                <a:latin typeface="Calibri"/>
+              </a:rPr>
+              <a:t>4</a:t>
             </a:r>
           </a:p>
         </p:txBody>
@@ -6453,979 +10823,6 @@
 </p:sld>
 </file>
 
-<file path=ppt/slides/slide4.xml><?xml version="1.0" encoding="utf-8"?>
-<p:sld xmlns:a="http://schemas.openxmlformats.org/drawingml/2006/main" xmlns:p="http://schemas.openxmlformats.org/presentationml/2006/main" xmlns:r="http://schemas.openxmlformats.org/officeDocument/2006/relationships">
-  <p:cSld>
-    <p:bg>
-      <p:bgPr>
-        <a:solidFill>
-          <a:srgbClr val="FFFFFF"/>
-        </a:solidFill>
-        <a:effectLst/>
-      </p:bgPr>
-    </p:bg>
-    <p:spTree>
-      <p:nvGrpSpPr>
-        <p:cNvPr id="1" name=""/>
-        <p:cNvGrpSpPr/>
-        <p:nvPr/>
-      </p:nvGrpSpPr>
-      <p:grpSpPr/>
-      <p:sp>
-        <p:nvSpPr>
-          <p:cNvPr id="2" name="TextBox 1"/>
-          <p:cNvSpPr txBox="1"/>
-          <p:nvPr/>
-        </p:nvSpPr>
-        <p:spPr>
-          <a:xfrm>
-            <a:off x="548640" y="320040"/>
-            <a:ext cx="11094415" cy="274320"/>
-          </a:xfrm>
-          <a:prstGeom prst="rect">
-            <a:avLst/>
-          </a:prstGeom>
-          <a:noFill/>
-        </p:spPr>
-        <p:txBody>
-          <a:bodyPr wrap="square" anchor="t" lIns="0" rIns="0" tIns="0" bIns="0"/>
-          <a:lstStyle/>
-          <a:p>
-            <a:pPr algn="l"/>
-            <a:r>
-              <a:rPr sz="1100" b="1" i="0">
-                <a:solidFill>
-                  <a:srgbClr val="54595D"/>
-                </a:solidFill>
-                <a:latin typeface="Calibri"/>
-              </a:rPr>
-              <a:t>CYBER SECURITY  ·  Cyber Security Content Area 1</a:t>
-            </a:r>
-          </a:p>
-        </p:txBody>
-      </p:sp>
-      <p:sp>
-        <p:nvSpPr>
-          <p:cNvPr id="3" name="TextBox 2"/>
-          <p:cNvSpPr txBox="1"/>
-          <p:nvPr/>
-        </p:nvSpPr>
-        <p:spPr>
-          <a:xfrm>
-            <a:off x="548640" y="566928"/>
-            <a:ext cx="11094415" cy="822960"/>
-          </a:xfrm>
-          <a:prstGeom prst="rect">
-            <a:avLst/>
-          </a:prstGeom>
-          <a:noFill/>
-        </p:spPr>
-        <p:txBody>
-          <a:bodyPr wrap="square" anchor="ctr" lIns="0" rIns="0" tIns="0" bIns="0"/>
-          <a:lstStyle/>
-          <a:p>
-            <a:pPr algn="l"/>
-            <a:r>
-              <a:rPr sz="3200" b="1" i="0">
-                <a:solidFill>
-                  <a:srgbClr val="03306E"/>
-                </a:solidFill>
-                <a:latin typeface="Cambria"/>
-              </a:rPr>
-              <a:t>Five secure design aims</a:t>
-            </a:r>
-          </a:p>
-        </p:txBody>
-      </p:sp>
-      <p:sp>
-        <p:nvSpPr>
-          <p:cNvPr id="4" name="TextBox 3"/>
-          <p:cNvSpPr txBox="1"/>
-          <p:nvPr/>
-        </p:nvSpPr>
-        <p:spPr>
-          <a:xfrm>
-            <a:off x="548640" y="6446520"/>
-            <a:ext cx="8229600" cy="274320"/>
-          </a:xfrm>
-          <a:prstGeom prst="rect">
-            <a:avLst/>
-          </a:prstGeom>
-          <a:noFill/>
-        </p:spPr>
-        <p:txBody>
-          <a:bodyPr wrap="square" anchor="t" lIns="0" rIns="0" tIns="0" bIns="0"/>
-          <a:lstStyle/>
-          <a:p>
-            <a:pPr algn="l"/>
-            <a:r>
-              <a:rPr sz="1000" b="0" i="0">
-                <a:solidFill>
-                  <a:srgbClr val="54595D"/>
-                </a:solidFill>
-                <a:latin typeface="Calibri"/>
-              </a:rPr>
-              <a:t>Digital Support and Security T Level  ·  Secure Design and Layered Protection</a:t>
-            </a:r>
-          </a:p>
-        </p:txBody>
-      </p:sp>
-      <p:sp>
-        <p:nvSpPr>
-          <p:cNvPr id="5" name="TextBox 4"/>
-          <p:cNvSpPr txBox="1"/>
-          <p:nvPr/>
-        </p:nvSpPr>
-        <p:spPr>
-          <a:xfrm>
-            <a:off x="10728655" y="6446520"/>
-            <a:ext cx="914400" cy="274320"/>
-          </a:xfrm>
-          <a:prstGeom prst="rect">
-            <a:avLst/>
-          </a:prstGeom>
-          <a:noFill/>
-        </p:spPr>
-        <p:txBody>
-          <a:bodyPr wrap="square" anchor="t" lIns="0" rIns="0" tIns="0" bIns="0"/>
-          <a:lstStyle/>
-          <a:p>
-            <a:pPr algn="r"/>
-            <a:r>
-              <a:rPr sz="1000" b="0" i="0">
-                <a:solidFill>
-                  <a:srgbClr val="54595D"/>
-                </a:solidFill>
-                <a:latin typeface="Calibri"/>
-              </a:rPr>
-              <a:t>4</a:t>
-            </a:r>
-          </a:p>
-        </p:txBody>
-      </p:sp>
-      <p:sp>
-        <p:nvSpPr>
-          <p:cNvPr id="6" name="Rounded Rectangle 5"/>
-          <p:cNvSpPr/>
-          <p:nvPr/>
-        </p:nvSpPr>
-        <p:spPr>
-          <a:xfrm>
-            <a:off x="548640" y="1600200"/>
-            <a:ext cx="3515258" cy="2148840"/>
-          </a:xfrm>
-          <a:prstGeom prst="roundRect">
-            <a:avLst>
-              <a:gd name="adj" fmla="val 6000"/>
-            </a:avLst>
-          </a:prstGeom>
-          <a:solidFill>
-            <a:srgbClr val="EAF3FF"/>
-          </a:solidFill>
-          <a:ln>
-            <a:noFill/>
-          </a:ln>
-          <a:effectLst/>
-        </p:spPr>
-        <p:style>
-          <a:lnRef idx="1">
-            <a:schemeClr val="accent1"/>
-          </a:lnRef>
-          <a:fillRef idx="3">
-            <a:schemeClr val="accent1"/>
-          </a:fillRef>
-          <a:effectRef idx="2">
-            <a:schemeClr val="accent1"/>
-          </a:effectRef>
-          <a:fontRef idx="minor">
-            <a:schemeClr val="lt1"/>
-          </a:fontRef>
-        </p:style>
-        <p:txBody>
-          <a:bodyPr rtlCol="0" anchor="ctr"/>
-          <a:lstStyle/>
-          <a:p/>
-        </p:txBody>
-      </p:sp>
-      <p:sp>
-        <p:nvSpPr>
-          <p:cNvPr id="7" name="Oval 6"/>
-          <p:cNvSpPr/>
-          <p:nvPr/>
-        </p:nvSpPr>
-        <p:spPr>
-          <a:xfrm>
-            <a:off x="777240" y="1828800"/>
-            <a:ext cx="457200" cy="457200"/>
-          </a:xfrm>
-          <a:prstGeom prst="ellipse">
-            <a:avLst/>
-          </a:prstGeom>
-          <a:solidFill>
-            <a:srgbClr val="E0463A"/>
-          </a:solidFill>
-          <a:ln>
-            <a:noFill/>
-          </a:ln>
-          <a:effectLst/>
-        </p:spPr>
-        <p:style>
-          <a:lnRef idx="1">
-            <a:schemeClr val="accent1"/>
-          </a:lnRef>
-          <a:fillRef idx="3">
-            <a:schemeClr val="accent1"/>
-          </a:fillRef>
-          <a:effectRef idx="2">
-            <a:schemeClr val="accent1"/>
-          </a:effectRef>
-          <a:fontRef idx="minor">
-            <a:schemeClr val="lt1"/>
-          </a:fontRef>
-        </p:style>
-        <p:txBody>
-          <a:bodyPr rtlCol="0" anchor="ctr" lIns="0" rIns="0" tIns="0" bIns="0"/>
-          <a:lstStyle/>
-          <a:p>
-            <a:pPr algn="ctr"/>
-            <a:r>
-              <a:rPr sz="1500" b="1">
-                <a:solidFill>
-                  <a:srgbClr val="FFFFFF"/>
-                </a:solidFill>
-                <a:latin typeface="Calibri"/>
-              </a:rPr>
-              <a:t>1</a:t>
-            </a:r>
-          </a:p>
-        </p:txBody>
-      </p:sp>
-      <p:sp>
-        <p:nvSpPr>
-          <p:cNvPr id="8" name="TextBox 7"/>
-          <p:cNvSpPr txBox="1"/>
-          <p:nvPr/>
-        </p:nvSpPr>
-        <p:spPr>
-          <a:xfrm>
-            <a:off x="1371600" y="1801368"/>
-            <a:ext cx="2509418" cy="512064"/>
-          </a:xfrm>
-          <a:prstGeom prst="rect">
-            <a:avLst/>
-          </a:prstGeom>
-          <a:noFill/>
-        </p:spPr>
-        <p:txBody>
-          <a:bodyPr wrap="square" anchor="ctr" lIns="0" rIns="0" tIns="0" bIns="0"/>
-          <a:lstStyle/>
-          <a:p>
-            <a:pPr algn="l"/>
-            <a:r>
-              <a:rPr sz="1700" b="1" i="0">
-                <a:solidFill>
-                  <a:srgbClr val="03306E"/>
-                </a:solidFill>
-                <a:latin typeface="Calibri"/>
-              </a:rPr>
-              <a:t>Establish the context</a:t>
-            </a:r>
-          </a:p>
-        </p:txBody>
-      </p:sp>
-      <p:sp>
-        <p:nvSpPr>
-          <p:cNvPr id="9" name="TextBox 8"/>
-          <p:cNvSpPr txBox="1"/>
-          <p:nvPr/>
-        </p:nvSpPr>
-        <p:spPr>
-          <a:xfrm>
-            <a:off x="777240" y="2468880"/>
-            <a:ext cx="3058058" cy="1143000"/>
-          </a:xfrm>
-          <a:prstGeom prst="rect">
-            <a:avLst/>
-          </a:prstGeom>
-          <a:noFill/>
-        </p:spPr>
-        <p:txBody>
-          <a:bodyPr wrap="square" anchor="t" lIns="0" rIns="0" tIns="0" bIns="0"/>
-          <a:lstStyle/>
-          <a:p>
-            <a:pPr algn="l"/>
-            <a:r>
-              <a:rPr sz="1900" b="0" i="0">
-                <a:solidFill>
-                  <a:srgbClr val="202122"/>
-                </a:solidFill>
-                <a:latin typeface="Calibri"/>
-              </a:rPr>
-              <a:t>Adopt zero trust, define acceptable risk, map where sensitive data lives.</a:t>
-            </a:r>
-          </a:p>
-        </p:txBody>
-      </p:sp>
-      <p:sp>
-        <p:nvSpPr>
-          <p:cNvPr id="10" name="Rounded Rectangle 9"/>
-          <p:cNvSpPr/>
-          <p:nvPr/>
-        </p:nvSpPr>
-        <p:spPr>
-          <a:xfrm>
-            <a:off x="4338218" y="1600200"/>
-            <a:ext cx="3515258" cy="2148840"/>
-          </a:xfrm>
-          <a:prstGeom prst="roundRect">
-            <a:avLst>
-              <a:gd name="adj" fmla="val 6000"/>
-            </a:avLst>
-          </a:prstGeom>
-          <a:solidFill>
-            <a:srgbClr val="EAF3FF"/>
-          </a:solidFill>
-          <a:ln>
-            <a:noFill/>
-          </a:ln>
-          <a:effectLst/>
-        </p:spPr>
-        <p:style>
-          <a:lnRef idx="1">
-            <a:schemeClr val="accent1"/>
-          </a:lnRef>
-          <a:fillRef idx="3">
-            <a:schemeClr val="accent1"/>
-          </a:fillRef>
-          <a:effectRef idx="2">
-            <a:schemeClr val="accent1"/>
-          </a:effectRef>
-          <a:fontRef idx="minor">
-            <a:schemeClr val="lt1"/>
-          </a:fontRef>
-        </p:style>
-        <p:txBody>
-          <a:bodyPr rtlCol="0" anchor="ctr"/>
-          <a:lstStyle/>
-          <a:p/>
-        </p:txBody>
-      </p:sp>
-      <p:sp>
-        <p:nvSpPr>
-          <p:cNvPr id="11" name="Oval 10"/>
-          <p:cNvSpPr/>
-          <p:nvPr/>
-        </p:nvSpPr>
-        <p:spPr>
-          <a:xfrm>
-            <a:off x="4566818" y="1828800"/>
-            <a:ext cx="457200" cy="457200"/>
-          </a:xfrm>
-          <a:prstGeom prst="ellipse">
-            <a:avLst/>
-          </a:prstGeom>
-          <a:solidFill>
-            <a:srgbClr val="E0463A"/>
-          </a:solidFill>
-          <a:ln>
-            <a:noFill/>
-          </a:ln>
-          <a:effectLst/>
-        </p:spPr>
-        <p:style>
-          <a:lnRef idx="1">
-            <a:schemeClr val="accent1"/>
-          </a:lnRef>
-          <a:fillRef idx="3">
-            <a:schemeClr val="accent1"/>
-          </a:fillRef>
-          <a:effectRef idx="2">
-            <a:schemeClr val="accent1"/>
-          </a:effectRef>
-          <a:fontRef idx="minor">
-            <a:schemeClr val="lt1"/>
-          </a:fontRef>
-        </p:style>
-        <p:txBody>
-          <a:bodyPr rtlCol="0" anchor="ctr" lIns="0" rIns="0" tIns="0" bIns="0"/>
-          <a:lstStyle/>
-          <a:p>
-            <a:pPr algn="ctr"/>
-            <a:r>
-              <a:rPr sz="1500" b="1">
-                <a:solidFill>
-                  <a:srgbClr val="FFFFFF"/>
-                </a:solidFill>
-                <a:latin typeface="Calibri"/>
-              </a:rPr>
-              <a:t>2</a:t>
-            </a:r>
-          </a:p>
-        </p:txBody>
-      </p:sp>
-      <p:sp>
-        <p:nvSpPr>
-          <p:cNvPr id="12" name="TextBox 11"/>
-          <p:cNvSpPr txBox="1"/>
-          <p:nvPr/>
-        </p:nvSpPr>
-        <p:spPr>
-          <a:xfrm>
-            <a:off x="5161178" y="1801368"/>
-            <a:ext cx="2509418" cy="512064"/>
-          </a:xfrm>
-          <a:prstGeom prst="rect">
-            <a:avLst/>
-          </a:prstGeom>
-          <a:noFill/>
-        </p:spPr>
-        <p:txBody>
-          <a:bodyPr wrap="square" anchor="ctr" lIns="0" rIns="0" tIns="0" bIns="0"/>
-          <a:lstStyle/>
-          <a:p>
-            <a:pPr algn="l"/>
-            <a:r>
-              <a:rPr sz="1600" b="1" i="0">
-                <a:solidFill>
-                  <a:srgbClr val="03306E"/>
-                </a:solidFill>
-                <a:latin typeface="Calibri"/>
-              </a:rPr>
-              <a:t>Make compromise difficult</a:t>
-            </a:r>
-          </a:p>
-        </p:txBody>
-      </p:sp>
-      <p:sp>
-        <p:nvSpPr>
-          <p:cNvPr id="13" name="TextBox 12"/>
-          <p:cNvSpPr txBox="1"/>
-          <p:nvPr/>
-        </p:nvSpPr>
-        <p:spPr>
-          <a:xfrm>
-            <a:off x="4566818" y="2468880"/>
-            <a:ext cx="3058058" cy="1143000"/>
-          </a:xfrm>
-          <a:prstGeom prst="rect">
-            <a:avLst/>
-          </a:prstGeom>
-          <a:noFill/>
-        </p:spPr>
-        <p:txBody>
-          <a:bodyPr wrap="square" anchor="t" lIns="0" rIns="0" tIns="0" bIns="0"/>
-          <a:lstStyle/>
-          <a:p>
-            <a:pPr algn="l"/>
-            <a:r>
-              <a:rPr sz="2000" b="0" i="0">
-                <a:solidFill>
-                  <a:srgbClr val="202122"/>
-                </a:solidFill>
-                <a:latin typeface="Calibri"/>
-              </a:rPr>
-              <a:t>Reduce the attack surface, use proven solutions, audit operations.</a:t>
-            </a:r>
-          </a:p>
-        </p:txBody>
-      </p:sp>
-      <p:sp>
-        <p:nvSpPr>
-          <p:cNvPr id="14" name="Rounded Rectangle 13"/>
-          <p:cNvSpPr/>
-          <p:nvPr/>
-        </p:nvSpPr>
-        <p:spPr>
-          <a:xfrm>
-            <a:off x="8127796" y="1600200"/>
-            <a:ext cx="3515258" cy="2148840"/>
-          </a:xfrm>
-          <a:prstGeom prst="roundRect">
-            <a:avLst>
-              <a:gd name="adj" fmla="val 6000"/>
-            </a:avLst>
-          </a:prstGeom>
-          <a:solidFill>
-            <a:srgbClr val="EAF3FF"/>
-          </a:solidFill>
-          <a:ln>
-            <a:noFill/>
-          </a:ln>
-          <a:effectLst/>
-        </p:spPr>
-        <p:style>
-          <a:lnRef idx="1">
-            <a:schemeClr val="accent1"/>
-          </a:lnRef>
-          <a:fillRef idx="3">
-            <a:schemeClr val="accent1"/>
-          </a:fillRef>
-          <a:effectRef idx="2">
-            <a:schemeClr val="accent1"/>
-          </a:effectRef>
-          <a:fontRef idx="minor">
-            <a:schemeClr val="lt1"/>
-          </a:fontRef>
-        </p:style>
-        <p:txBody>
-          <a:bodyPr rtlCol="0" anchor="ctr"/>
-          <a:lstStyle/>
-          <a:p/>
-        </p:txBody>
-      </p:sp>
-      <p:sp>
-        <p:nvSpPr>
-          <p:cNvPr id="15" name="Oval 14"/>
-          <p:cNvSpPr/>
-          <p:nvPr/>
-        </p:nvSpPr>
-        <p:spPr>
-          <a:xfrm>
-            <a:off x="8356396" y="1828800"/>
-            <a:ext cx="457200" cy="457200"/>
-          </a:xfrm>
-          <a:prstGeom prst="ellipse">
-            <a:avLst/>
-          </a:prstGeom>
-          <a:solidFill>
-            <a:srgbClr val="E0463A"/>
-          </a:solidFill>
-          <a:ln>
-            <a:noFill/>
-          </a:ln>
-          <a:effectLst/>
-        </p:spPr>
-        <p:style>
-          <a:lnRef idx="1">
-            <a:schemeClr val="accent1"/>
-          </a:lnRef>
-          <a:fillRef idx="3">
-            <a:schemeClr val="accent1"/>
-          </a:fillRef>
-          <a:effectRef idx="2">
-            <a:schemeClr val="accent1"/>
-          </a:effectRef>
-          <a:fontRef idx="minor">
-            <a:schemeClr val="lt1"/>
-          </a:fontRef>
-        </p:style>
-        <p:txBody>
-          <a:bodyPr rtlCol="0" anchor="ctr" lIns="0" rIns="0" tIns="0" bIns="0"/>
-          <a:lstStyle/>
-          <a:p>
-            <a:pPr algn="ctr"/>
-            <a:r>
-              <a:rPr sz="1500" b="1">
-                <a:solidFill>
-                  <a:srgbClr val="FFFFFF"/>
-                </a:solidFill>
-                <a:latin typeface="Calibri"/>
-              </a:rPr>
-              <a:t>3</a:t>
-            </a:r>
-          </a:p>
-        </p:txBody>
-      </p:sp>
-      <p:sp>
-        <p:nvSpPr>
-          <p:cNvPr id="16" name="TextBox 15"/>
-          <p:cNvSpPr txBox="1"/>
-          <p:nvPr/>
-        </p:nvSpPr>
-        <p:spPr>
-          <a:xfrm>
-            <a:off x="8950756" y="1801368"/>
-            <a:ext cx="2509418" cy="512064"/>
-          </a:xfrm>
-          <a:prstGeom prst="rect">
-            <a:avLst/>
-          </a:prstGeom>
-          <a:noFill/>
-        </p:spPr>
-        <p:txBody>
-          <a:bodyPr wrap="square" anchor="ctr" lIns="0" rIns="0" tIns="0" bIns="0"/>
-          <a:lstStyle/>
-          <a:p>
-            <a:pPr algn="l"/>
-            <a:r>
-              <a:rPr sz="1600" b="1" i="0">
-                <a:solidFill>
-                  <a:srgbClr val="03306E"/>
-                </a:solidFill>
-                <a:latin typeface="Calibri"/>
-              </a:rPr>
-              <a:t>Make disruption difficult</a:t>
-            </a:r>
-          </a:p>
-        </p:txBody>
-      </p:sp>
-      <p:sp>
-        <p:nvSpPr>
-          <p:cNvPr id="17" name="TextBox 16"/>
-          <p:cNvSpPr txBox="1"/>
-          <p:nvPr/>
-        </p:nvSpPr>
-        <p:spPr>
-          <a:xfrm>
-            <a:off x="8356396" y="2468880"/>
-            <a:ext cx="3058058" cy="1143000"/>
-          </a:xfrm>
-          <a:prstGeom prst="rect">
-            <a:avLst/>
-          </a:prstGeom>
-          <a:noFill/>
-        </p:spPr>
-        <p:txBody>
-          <a:bodyPr wrap="square" anchor="t" lIns="0" rIns="0" tIns="0" bIns="0"/>
-          <a:lstStyle/>
-          <a:p>
-            <a:pPr algn="l"/>
-            <a:r>
-              <a:rPr sz="2000" b="0" i="0">
-                <a:solidFill>
-                  <a:srgbClr val="202122"/>
-                </a:solidFill>
-                <a:latin typeface="Calibri"/>
-              </a:rPr>
-              <a:t>Build resilience and scalability, plan for third-party failure.</a:t>
-            </a:r>
-          </a:p>
-        </p:txBody>
-      </p:sp>
-      <p:sp>
-        <p:nvSpPr>
-          <p:cNvPr id="18" name="Rounded Rectangle 17"/>
-          <p:cNvSpPr/>
-          <p:nvPr/>
-        </p:nvSpPr>
-        <p:spPr>
-          <a:xfrm>
-            <a:off x="548640" y="4023360"/>
-            <a:ext cx="3515258" cy="2148840"/>
-          </a:xfrm>
-          <a:prstGeom prst="roundRect">
-            <a:avLst>
-              <a:gd name="adj" fmla="val 6000"/>
-            </a:avLst>
-          </a:prstGeom>
-          <a:solidFill>
-            <a:srgbClr val="EAF3FF"/>
-          </a:solidFill>
-          <a:ln>
-            <a:noFill/>
-          </a:ln>
-          <a:effectLst/>
-        </p:spPr>
-        <p:style>
-          <a:lnRef idx="1">
-            <a:schemeClr val="accent1"/>
-          </a:lnRef>
-          <a:fillRef idx="3">
-            <a:schemeClr val="accent1"/>
-          </a:fillRef>
-          <a:effectRef idx="2">
-            <a:schemeClr val="accent1"/>
-          </a:effectRef>
-          <a:fontRef idx="minor">
-            <a:schemeClr val="lt1"/>
-          </a:fontRef>
-        </p:style>
-        <p:txBody>
-          <a:bodyPr rtlCol="0" anchor="ctr"/>
-          <a:lstStyle/>
-          <a:p/>
-        </p:txBody>
-      </p:sp>
-      <p:sp>
-        <p:nvSpPr>
-          <p:cNvPr id="19" name="Oval 18"/>
-          <p:cNvSpPr/>
-          <p:nvPr/>
-        </p:nvSpPr>
-        <p:spPr>
-          <a:xfrm>
-            <a:off x="777240" y="4251960"/>
-            <a:ext cx="457200" cy="457200"/>
-          </a:xfrm>
-          <a:prstGeom prst="ellipse">
-            <a:avLst/>
-          </a:prstGeom>
-          <a:solidFill>
-            <a:srgbClr val="E0463A"/>
-          </a:solidFill>
-          <a:ln>
-            <a:noFill/>
-          </a:ln>
-          <a:effectLst/>
-        </p:spPr>
-        <p:style>
-          <a:lnRef idx="1">
-            <a:schemeClr val="accent1"/>
-          </a:lnRef>
-          <a:fillRef idx="3">
-            <a:schemeClr val="accent1"/>
-          </a:fillRef>
-          <a:effectRef idx="2">
-            <a:schemeClr val="accent1"/>
-          </a:effectRef>
-          <a:fontRef idx="minor">
-            <a:schemeClr val="lt1"/>
-          </a:fontRef>
-        </p:style>
-        <p:txBody>
-          <a:bodyPr rtlCol="0" anchor="ctr" lIns="0" rIns="0" tIns="0" bIns="0"/>
-          <a:lstStyle/>
-          <a:p>
-            <a:pPr algn="ctr"/>
-            <a:r>
-              <a:rPr sz="1500" b="1">
-                <a:solidFill>
-                  <a:srgbClr val="FFFFFF"/>
-                </a:solidFill>
-                <a:latin typeface="Calibri"/>
-              </a:rPr>
-              <a:t>4</a:t>
-            </a:r>
-          </a:p>
-        </p:txBody>
-      </p:sp>
-      <p:sp>
-        <p:nvSpPr>
-          <p:cNvPr id="20" name="TextBox 19"/>
-          <p:cNvSpPr txBox="1"/>
-          <p:nvPr/>
-        </p:nvSpPr>
-        <p:spPr>
-          <a:xfrm>
-            <a:off x="1371600" y="4224528"/>
-            <a:ext cx="2509418" cy="512064"/>
-          </a:xfrm>
-          <a:prstGeom prst="rect">
-            <a:avLst/>
-          </a:prstGeom>
-          <a:noFill/>
-        </p:spPr>
-        <p:txBody>
-          <a:bodyPr wrap="square" anchor="ctr" lIns="0" rIns="0" tIns="0" bIns="0"/>
-          <a:lstStyle/>
-          <a:p>
-            <a:pPr algn="l"/>
-            <a:r>
-              <a:rPr sz="1700" b="1" i="0">
-                <a:solidFill>
-                  <a:srgbClr val="03306E"/>
-                </a:solidFill>
-                <a:latin typeface="Calibri"/>
-              </a:rPr>
-              <a:t>Make detection easier</a:t>
-            </a:r>
-          </a:p>
-        </p:txBody>
-      </p:sp>
-      <p:sp>
-        <p:nvSpPr>
-          <p:cNvPr id="21" name="TextBox 20"/>
-          <p:cNvSpPr txBox="1"/>
-          <p:nvPr/>
-        </p:nvSpPr>
-        <p:spPr>
-          <a:xfrm>
-            <a:off x="777240" y="4892040"/>
-            <a:ext cx="3058058" cy="1143000"/>
-          </a:xfrm>
-          <a:prstGeom prst="rect">
-            <a:avLst/>
-          </a:prstGeom>
-          <a:noFill/>
-        </p:spPr>
-        <p:txBody>
-          <a:bodyPr wrap="square" anchor="t" lIns="0" rIns="0" tIns="0" bIns="0"/>
-          <a:lstStyle/>
-          <a:p>
-            <a:pPr algn="l"/>
-            <a:r>
-              <a:rPr sz="1800" b="0" i="0">
-                <a:solidFill>
-                  <a:srgbClr val="202122"/>
-                </a:solidFill>
-                <a:latin typeface="Calibri"/>
-              </a:rPr>
-              <a:t>Collect logs, keep monitoring separate from operations, learn what normal looks like.</a:t>
-            </a:r>
-          </a:p>
-        </p:txBody>
-      </p:sp>
-      <p:sp>
-        <p:nvSpPr>
-          <p:cNvPr id="22" name="Rounded Rectangle 21"/>
-          <p:cNvSpPr/>
-          <p:nvPr/>
-        </p:nvSpPr>
-        <p:spPr>
-          <a:xfrm>
-            <a:off x="4338218" y="4023360"/>
-            <a:ext cx="3515258" cy="2148840"/>
-          </a:xfrm>
-          <a:prstGeom prst="roundRect">
-            <a:avLst>
-              <a:gd name="adj" fmla="val 6000"/>
-            </a:avLst>
-          </a:prstGeom>
-          <a:solidFill>
-            <a:srgbClr val="EAF3FF"/>
-          </a:solidFill>
-          <a:ln>
-            <a:noFill/>
-          </a:ln>
-          <a:effectLst/>
-        </p:spPr>
-        <p:style>
-          <a:lnRef idx="1">
-            <a:schemeClr val="accent1"/>
-          </a:lnRef>
-          <a:fillRef idx="3">
-            <a:schemeClr val="accent1"/>
-          </a:fillRef>
-          <a:effectRef idx="2">
-            <a:schemeClr val="accent1"/>
-          </a:effectRef>
-          <a:fontRef idx="minor">
-            <a:schemeClr val="lt1"/>
-          </a:fontRef>
-        </p:style>
-        <p:txBody>
-          <a:bodyPr rtlCol="0" anchor="ctr"/>
-          <a:lstStyle/>
-          <a:p/>
-        </p:txBody>
-      </p:sp>
-      <p:sp>
-        <p:nvSpPr>
-          <p:cNvPr id="23" name="Oval 22"/>
-          <p:cNvSpPr/>
-          <p:nvPr/>
-        </p:nvSpPr>
-        <p:spPr>
-          <a:xfrm>
-            <a:off x="4566818" y="4251960"/>
-            <a:ext cx="457200" cy="457200"/>
-          </a:xfrm>
-          <a:prstGeom prst="ellipse">
-            <a:avLst/>
-          </a:prstGeom>
-          <a:solidFill>
-            <a:srgbClr val="E0463A"/>
-          </a:solidFill>
-          <a:ln>
-            <a:noFill/>
-          </a:ln>
-          <a:effectLst/>
-        </p:spPr>
-        <p:style>
-          <a:lnRef idx="1">
-            <a:schemeClr val="accent1"/>
-          </a:lnRef>
-          <a:fillRef idx="3">
-            <a:schemeClr val="accent1"/>
-          </a:fillRef>
-          <a:effectRef idx="2">
-            <a:schemeClr val="accent1"/>
-          </a:effectRef>
-          <a:fontRef idx="minor">
-            <a:schemeClr val="lt1"/>
-          </a:fontRef>
-        </p:style>
-        <p:txBody>
-          <a:bodyPr rtlCol="0" anchor="ctr" lIns="0" rIns="0" tIns="0" bIns="0"/>
-          <a:lstStyle/>
-          <a:p>
-            <a:pPr algn="ctr"/>
-            <a:r>
-              <a:rPr sz="1500" b="1">
-                <a:solidFill>
-                  <a:srgbClr val="FFFFFF"/>
-                </a:solidFill>
-                <a:latin typeface="Calibri"/>
-              </a:rPr>
-              <a:t>5</a:t>
-            </a:r>
-          </a:p>
-        </p:txBody>
-      </p:sp>
-      <p:sp>
-        <p:nvSpPr>
-          <p:cNvPr id="24" name="TextBox 23"/>
-          <p:cNvSpPr txBox="1"/>
-          <p:nvPr/>
-        </p:nvSpPr>
-        <p:spPr>
-          <a:xfrm>
-            <a:off x="5161178" y="4224528"/>
-            <a:ext cx="2509418" cy="512064"/>
-          </a:xfrm>
-          <a:prstGeom prst="rect">
-            <a:avLst/>
-          </a:prstGeom>
-          <a:noFill/>
-        </p:spPr>
-        <p:txBody>
-          <a:bodyPr wrap="square" anchor="ctr" lIns="0" rIns="0" tIns="0" bIns="0"/>
-          <a:lstStyle/>
-          <a:p>
-            <a:pPr algn="l"/>
-            <a:r>
-              <a:rPr sz="1900" b="1" i="0">
-                <a:solidFill>
-                  <a:srgbClr val="03306E"/>
-                </a:solidFill>
-                <a:latin typeface="Calibri"/>
-              </a:rPr>
-              <a:t>Reduce the impact</a:t>
-            </a:r>
-          </a:p>
-        </p:txBody>
-      </p:sp>
-      <p:sp>
-        <p:nvSpPr>
-          <p:cNvPr id="25" name="TextBox 24"/>
-          <p:cNvSpPr txBox="1"/>
-          <p:nvPr/>
-        </p:nvSpPr>
-        <p:spPr>
-          <a:xfrm>
-            <a:off x="4566818" y="4892040"/>
-            <a:ext cx="3058058" cy="1143000"/>
-          </a:xfrm>
-          <a:prstGeom prst="rect">
-            <a:avLst/>
-          </a:prstGeom>
-          <a:noFill/>
-        </p:spPr>
-        <p:txBody>
-          <a:bodyPr wrap="square" anchor="t" lIns="0" rIns="0" tIns="0" bIns="0"/>
-          <a:lstStyle/>
-          <a:p>
-            <a:pPr algn="l"/>
-            <a:r>
-              <a:rPr sz="2000" b="0" i="0">
-                <a:solidFill>
-                  <a:srgbClr val="202122"/>
-                </a:solidFill>
-                <a:latin typeface="Calibri"/>
-              </a:rPr>
-              <a:t>Segment networks, test recovery, separate duties, anonymise data.</a:t>
-            </a:r>
-          </a:p>
-        </p:txBody>
-      </p:sp>
-    </p:spTree>
-  </p:cSld>
-  <p:clrMapOvr>
-    <a:masterClrMapping/>
-  </p:clrMapOvr>
-</p:sld>
-</file>
-
 <file path=ppt/slides/slide5.xml><?xml version="1.0" encoding="utf-8"?>
 <p:sld xmlns:a="http://schemas.openxmlformats.org/drawingml/2006/main" xmlns:p="http://schemas.openxmlformats.org/presentationml/2006/main" xmlns:r="http://schemas.openxmlformats.org/officeDocument/2006/relationships">
   <p:cSld>
@@ -7505,7 +10902,7 @@
                 </a:solidFill>
                 <a:latin typeface="Cambria"/>
               </a:rPr>
-              <a:t>Operating systems and investigation</a:t>
+              <a:t>Quick check: Protection methods by layer</a:t>
             </a:r>
           </a:p>
         </p:txBody>
@@ -7578,22 +10975,20 @@
       </p:sp>
       <p:sp>
         <p:nvSpPr>
-          <p:cNvPr id="6" name="Rounded Rectangle 5"/>
+          <p:cNvPr id="6" name="Oval 5"/>
           <p:cNvSpPr/>
           <p:nvPr/>
         </p:nvSpPr>
         <p:spPr>
           <a:xfrm>
-            <a:off x="548640" y="1600200"/>
-            <a:ext cx="5364327" cy="640080"/>
-          </a:xfrm>
-          <a:prstGeom prst="roundRect">
-            <a:avLst>
-              <a:gd name="adj" fmla="val 15000"/>
-            </a:avLst>
+            <a:off x="548640" y="1691640"/>
+            <a:ext cx="502920" cy="502920"/>
+          </a:xfrm>
+          <a:prstGeom prst="ellipse">
+            <a:avLst/>
           </a:prstGeom>
           <a:solidFill>
-            <a:srgbClr val="03306E"/>
+            <a:srgbClr val="E0463A"/>
           </a:solidFill>
           <a:ln>
             <a:noFill/>
@@ -7615,9 +11010,20 @@
           </a:fontRef>
         </p:style>
         <p:txBody>
-          <a:bodyPr rtlCol="0" anchor="ctr"/>
-          <a:lstStyle/>
-          <a:p/>
+          <a:bodyPr rtlCol="0" anchor="ctr" lIns="0" rIns="0" tIns="0" bIns="0"/>
+          <a:lstStyle/>
+          <a:p>
+            <a:pPr algn="ctr"/>
+            <a:r>
+              <a:rPr sz="1600" b="1">
+                <a:solidFill>
+                  <a:srgbClr val="FFFFFF"/>
+                </a:solidFill>
+                <a:latin typeface="Calibri"/>
+              </a:rPr>
+              <a:t>1</a:t>
+            </a:r>
+          </a:p>
         </p:txBody>
       </p:sp>
       <p:sp>
@@ -7628,49 +11034,47 @@
         </p:nvSpPr>
         <p:spPr>
           <a:xfrm>
-            <a:off x="777240" y="1600200"/>
-            <a:ext cx="4907127" cy="640080"/>
-          </a:xfrm>
-          <a:prstGeom prst="rect">
-            <a:avLst/>
-          </a:prstGeom>
-          <a:noFill/>
-        </p:spPr>
-        <p:txBody>
-          <a:bodyPr wrap="square" anchor="ctr" lIns="0" rIns="0" tIns="0" bIns="0"/>
+            <a:off x="1371600" y="1645920"/>
+            <a:ext cx="10271455" cy="1188720"/>
+          </a:xfrm>
+          <a:prstGeom prst="rect">
+            <a:avLst/>
+          </a:prstGeom>
+          <a:noFill/>
+        </p:spPr>
+        <p:txBody>
+          <a:bodyPr wrap="square" anchor="t" lIns="0" rIns="0" tIns="0" bIns="0"/>
           <a:lstStyle/>
           <a:p>
             <a:pPr algn="l"/>
             <a:r>
-              <a:rPr sz="2000" b="1" i="0">
-                <a:solidFill>
-                  <a:srgbClr val="FFFFFF"/>
-                </a:solidFill>
-                <a:latin typeface="Calibri"/>
-              </a:rPr>
-              <a:t>OS types and functions</a:t>
-            </a:r>
-          </a:p>
-        </p:txBody>
-      </p:sp>
-      <p:sp>
-        <p:nvSpPr>
-          <p:cNvPr id="8" name="Rounded Rectangle 7"/>
+              <a:rPr sz="2400" b="0" i="0">
+                <a:solidFill>
+                  <a:srgbClr val="202122"/>
+                </a:solidFill>
+                <a:latin typeface="Calibri"/>
+              </a:rPr>
+              <a:t>What is defence in depth?</a:t>
+            </a:r>
+          </a:p>
+        </p:txBody>
+      </p:sp>
+      <p:sp>
+        <p:nvSpPr>
+          <p:cNvPr id="8" name="Oval 7"/>
           <p:cNvSpPr/>
           <p:nvPr/>
         </p:nvSpPr>
         <p:spPr>
           <a:xfrm>
-            <a:off x="548640" y="2377440"/>
-            <a:ext cx="5364327" cy="3794760"/>
-          </a:xfrm>
-          <a:prstGeom prst="roundRect">
-            <a:avLst>
-              <a:gd name="adj" fmla="val 4000"/>
-            </a:avLst>
+            <a:off x="548640" y="3108960"/>
+            <a:ext cx="502920" cy="502920"/>
+          </a:xfrm>
+          <a:prstGeom prst="ellipse">
+            <a:avLst/>
           </a:prstGeom>
           <a:solidFill>
-            <a:srgbClr val="EAF3FF"/>
+            <a:srgbClr val="E0463A"/>
           </a:solidFill>
           <a:ln>
             <a:noFill/>
@@ -7692,9 +11096,20 @@
           </a:fontRef>
         </p:style>
         <p:txBody>
-          <a:bodyPr rtlCol="0" anchor="ctr"/>
-          <a:lstStyle/>
-          <a:p/>
+          <a:bodyPr rtlCol="0" anchor="ctr" lIns="0" rIns="0" tIns="0" bIns="0"/>
+          <a:lstStyle/>
+          <a:p>
+            <a:pPr algn="ctr"/>
+            <a:r>
+              <a:rPr sz="1600" b="1">
+                <a:solidFill>
+                  <a:srgbClr val="FFFFFF"/>
+                </a:solidFill>
+                <a:latin typeface="Calibri"/>
+              </a:rPr>
+              <a:t>2</a:t>
+            </a:r>
+          </a:p>
         </p:txBody>
       </p:sp>
       <p:sp>
@@ -7705,159 +11120,47 @@
         </p:nvSpPr>
         <p:spPr>
           <a:xfrm>
-            <a:off x="822959" y="2606040"/>
-            <a:ext cx="4815687" cy="3337560"/>
-          </a:xfrm>
-          <a:prstGeom prst="rect">
-            <a:avLst/>
-          </a:prstGeom>
-          <a:noFill/>
-        </p:spPr>
-        <p:txBody>
-          <a:bodyPr wrap="square" lIns="0" rIns="0" tIns="0" bIns="0">
-            <a:spAutoFit/>
-          </a:bodyPr>
-          <a:lstStyle/>
-          <a:p>
-            <a:pPr marL="274320" indent="-274320">
-              <a:spcAft>
-                <a:spcPts val="990"/>
-              </a:spcAft>
-              <a:buClr>
-                <a:srgbClr val="0645AD"/>
-              </a:buClr>
-              <a:buFont typeface="Arial"/>
-              <a:buChar char="•"/>
-            </a:pPr>
-            <a:r>
-              <a:rPr sz="2200" b="1">
+            <a:off x="1371600" y="3063240"/>
+            <a:ext cx="10271455" cy="1188720"/>
+          </a:xfrm>
+          <a:prstGeom prst="rect">
+            <a:avLst/>
+          </a:prstGeom>
+          <a:noFill/>
+        </p:spPr>
+        <p:txBody>
+          <a:bodyPr wrap="square" anchor="t" lIns="0" rIns="0" tIns="0" bIns="0"/>
+          <a:lstStyle/>
+          <a:p>
+            <a:pPr algn="l"/>
+            <a:r>
+              <a:rPr sz="2400" b="0" i="0">
                 <a:solidFill>
                   <a:srgbClr val="202122"/>
                 </a:solidFill>
                 <a:latin typeface="Calibri"/>
               </a:rPr>
-              <a:t>Client:</a:t>
-            </a:r>
-            <a:r>
-              <a:rPr sz="2200" b="0">
-                <a:solidFill>
-                  <a:srgbClr val="202122"/>
-                </a:solidFill>
-                <a:latin typeface="Calibri"/>
-              </a:rPr>
-              <a:t> Windows, macOS, Linux</a:t>
-            </a:r>
-          </a:p>
-          <a:p>
-            <a:pPr marL="274320" indent="-274320">
-              <a:spcAft>
-                <a:spcPts val="990"/>
-              </a:spcAft>
-              <a:buClr>
-                <a:srgbClr val="0645AD"/>
-              </a:buClr>
-              <a:buFont typeface="Arial"/>
-              <a:buChar char="•"/>
-            </a:pPr>
-            <a:r>
-              <a:rPr sz="2200" b="1">
-                <a:solidFill>
-                  <a:srgbClr val="202122"/>
-                </a:solidFill>
-                <a:latin typeface="Calibri"/>
-              </a:rPr>
-              <a:t>Mobile:</a:t>
-            </a:r>
-            <a:r>
-              <a:rPr sz="2200" b="0">
-                <a:solidFill>
-                  <a:srgbClr val="202122"/>
-                </a:solidFill>
-                <a:latin typeface="Calibri"/>
-              </a:rPr>
-              <a:t> Android, iOS</a:t>
-            </a:r>
-          </a:p>
-          <a:p>
-            <a:pPr marL="274320" indent="-274320">
-              <a:spcAft>
-                <a:spcPts val="990"/>
-              </a:spcAft>
-              <a:buClr>
-                <a:srgbClr val="0645AD"/>
-              </a:buClr>
-              <a:buFont typeface="Arial"/>
-              <a:buChar char="•"/>
-            </a:pPr>
-            <a:r>
-              <a:rPr sz="2200" b="1">
-                <a:solidFill>
-                  <a:srgbClr val="202122"/>
-                </a:solidFill>
-                <a:latin typeface="Calibri"/>
-              </a:rPr>
-              <a:t>Server:</a:t>
-            </a:r>
-            <a:r>
-              <a:rPr sz="2200" b="0">
-                <a:solidFill>
-                  <a:srgbClr val="202122"/>
-                </a:solidFill>
-                <a:latin typeface="Calibri"/>
-              </a:rPr>
-              <a:t> Windows Server, Linux</a:t>
-            </a:r>
-          </a:p>
-          <a:p>
-            <a:pPr marL="274320" indent="-274320">
-              <a:spcAft>
-                <a:spcPts val="990"/>
-              </a:spcAft>
-              <a:buClr>
-                <a:srgbClr val="0645AD"/>
-              </a:buClr>
-              <a:buFont typeface="Arial"/>
-              <a:buChar char="•"/>
-            </a:pPr>
-            <a:r>
-              <a:rPr sz="2200" b="1">
-                <a:solidFill>
-                  <a:srgbClr val="202122"/>
-                </a:solidFill>
-                <a:latin typeface="Calibri"/>
-              </a:rPr>
-              <a:t>Functions:</a:t>
-            </a:r>
-            <a:r>
-              <a:rPr sz="2200" b="0">
-                <a:solidFill>
-                  <a:srgbClr val="202122"/>
-                </a:solidFill>
-                <a:latin typeface="Calibri"/>
-              </a:rPr>
-              <a:t> security, memory, processor, device and file management</a:t>
-            </a:r>
-          </a:p>
-        </p:txBody>
-      </p:sp>
-      <p:sp>
-        <p:nvSpPr>
-          <p:cNvPr id="10" name="Rounded Rectangle 9"/>
+              <a:t>Why take a snapshot before patching?</a:t>
+            </a:r>
+          </a:p>
+        </p:txBody>
+      </p:sp>
+      <p:sp>
+        <p:nvSpPr>
+          <p:cNvPr id="10" name="Oval 9"/>
           <p:cNvSpPr/>
           <p:nvPr/>
         </p:nvSpPr>
         <p:spPr>
           <a:xfrm>
-            <a:off x="6278727" y="1600200"/>
-            <a:ext cx="5364327" cy="640080"/>
-          </a:xfrm>
-          <a:prstGeom prst="roundRect">
-            <a:avLst>
-              <a:gd name="adj" fmla="val 15000"/>
-            </a:avLst>
+            <a:off x="548640" y="4526280"/>
+            <a:ext cx="502920" cy="502920"/>
+          </a:xfrm>
+          <a:prstGeom prst="ellipse">
+            <a:avLst/>
           </a:prstGeom>
           <a:solidFill>
-            <a:srgbClr val="0645AD"/>
+            <a:srgbClr val="E0463A"/>
           </a:solidFill>
           <a:ln>
             <a:noFill/>
@@ -7879,9 +11182,20 @@
           </a:fontRef>
         </p:style>
         <p:txBody>
-          <a:bodyPr rtlCol="0" anchor="ctr"/>
-          <a:lstStyle/>
-          <a:p/>
+          <a:bodyPr rtlCol="0" anchor="ctr" lIns="0" rIns="0" tIns="0" bIns="0"/>
+          <a:lstStyle/>
+          <a:p>
+            <a:pPr algn="ctr"/>
+            <a:r>
+              <a:rPr sz="1600" b="1">
+                <a:solidFill>
+                  <a:srgbClr val="FFFFFF"/>
+                </a:solidFill>
+                <a:latin typeface="Calibri"/>
+              </a:rPr>
+              <a:t>3</a:t>
+            </a:r>
+          </a:p>
         </p:txBody>
       </p:sp>
       <p:sp>
@@ -7892,229 +11206,60 @@
         </p:nvSpPr>
         <p:spPr>
           <a:xfrm>
-            <a:off x="6507327" y="1600200"/>
-            <a:ext cx="4907127" cy="640080"/>
-          </a:xfrm>
-          <a:prstGeom prst="rect">
-            <a:avLst/>
-          </a:prstGeom>
-          <a:noFill/>
-        </p:spPr>
-        <p:txBody>
-          <a:bodyPr wrap="square" anchor="ctr" lIns="0" rIns="0" tIns="0" bIns="0"/>
+            <a:off x="1371600" y="4480560"/>
+            <a:ext cx="10271455" cy="1188720"/>
+          </a:xfrm>
+          <a:prstGeom prst="rect">
+            <a:avLst/>
+          </a:prstGeom>
+          <a:noFill/>
+        </p:spPr>
+        <p:txBody>
+          <a:bodyPr wrap="square" anchor="t" lIns="0" rIns="0" tIns="0" bIns="0"/>
           <a:lstStyle/>
           <a:p>
             <a:pPr algn="l"/>
             <a:r>
-              <a:rPr sz="2000" b="1" i="0">
-                <a:solidFill>
-                  <a:srgbClr val="FFFFFF"/>
-                </a:solidFill>
-                <a:latin typeface="Calibri"/>
-              </a:rPr>
-              <a:t>Useful evidence sources</a:t>
-            </a:r>
-          </a:p>
-        </p:txBody>
-      </p:sp>
-      <p:sp>
-        <p:nvSpPr>
-          <p:cNvPr id="12" name="Rounded Rectangle 11"/>
-          <p:cNvSpPr/>
-          <p:nvPr/>
-        </p:nvSpPr>
-        <p:spPr>
-          <a:xfrm>
-            <a:off x="6278727" y="2377440"/>
-            <a:ext cx="5364327" cy="3794760"/>
-          </a:xfrm>
-          <a:prstGeom prst="roundRect">
-            <a:avLst>
-              <a:gd name="adj" fmla="val 4000"/>
-            </a:avLst>
-          </a:prstGeom>
-          <a:solidFill>
-            <a:srgbClr val="EAF3FF"/>
-          </a:solidFill>
-          <a:ln>
-            <a:noFill/>
-          </a:ln>
-          <a:effectLst/>
-        </p:spPr>
-        <p:style>
-          <a:lnRef idx="1">
-            <a:schemeClr val="accent1"/>
-          </a:lnRef>
-          <a:fillRef idx="3">
-            <a:schemeClr val="accent1"/>
-          </a:fillRef>
-          <a:effectRef idx="2">
-            <a:schemeClr val="accent1"/>
-          </a:effectRef>
-          <a:fontRef idx="minor">
-            <a:schemeClr val="lt1"/>
-          </a:fontRef>
-        </p:style>
-        <p:txBody>
-          <a:bodyPr rtlCol="0" anchor="ctr"/>
-          <a:lstStyle/>
-          <a:p/>
-        </p:txBody>
-      </p:sp>
-      <p:sp>
-        <p:nvSpPr>
-          <p:cNvPr id="13" name="TextBox 12"/>
-          <p:cNvSpPr txBox="1"/>
-          <p:nvPr/>
-        </p:nvSpPr>
-        <p:spPr>
-          <a:xfrm>
-            <a:off x="6553047" y="2606040"/>
-            <a:ext cx="4815687" cy="3337560"/>
-          </a:xfrm>
-          <a:prstGeom prst="rect">
-            <a:avLst/>
-          </a:prstGeom>
-          <a:noFill/>
-        </p:spPr>
-        <p:txBody>
-          <a:bodyPr wrap="square" lIns="0" rIns="0" tIns="0" bIns="0">
-            <a:spAutoFit/>
-          </a:bodyPr>
-          <a:lstStyle/>
-          <a:p>
-            <a:pPr marL="274320" indent="-274320">
-              <a:spcAft>
-                <a:spcPts val="900"/>
-              </a:spcAft>
-              <a:buClr>
-                <a:srgbClr val="0645AD"/>
-              </a:buClr>
-              <a:buFont typeface="Arial"/>
-              <a:buChar char="•"/>
-            </a:pPr>
-            <a:r>
-              <a:rPr sz="2000" b="0">
+              <a:rPr sz="2400" b="0" i="0">
                 <a:solidFill>
                   <a:srgbClr val="202122"/>
                 </a:solidFill>
                 <a:latin typeface="Calibri"/>
               </a:rPr>
-              <a:t>Windows registry</a:t>
-            </a:r>
-          </a:p>
-          <a:p>
-            <a:pPr marL="274320" indent="-274320">
-              <a:spcAft>
-                <a:spcPts val="900"/>
-              </a:spcAft>
-              <a:buClr>
-                <a:srgbClr val="0645AD"/>
-              </a:buClr>
-              <a:buFont typeface="Arial"/>
-              <a:buChar char="•"/>
-            </a:pPr>
-            <a:r>
-              <a:rPr sz="2000" b="0">
-                <a:solidFill>
-                  <a:srgbClr val="202122"/>
-                </a:solidFill>
-                <a:latin typeface="Calibri"/>
-              </a:rPr>
-              <a:t>Linux configuration files</a:t>
-            </a:r>
-          </a:p>
-          <a:p>
-            <a:pPr marL="274320" indent="-274320">
-              <a:spcAft>
-                <a:spcPts val="900"/>
-              </a:spcAft>
-              <a:buClr>
-                <a:srgbClr val="0645AD"/>
-              </a:buClr>
-              <a:buFont typeface="Arial"/>
-              <a:buChar char="•"/>
-            </a:pPr>
-            <a:r>
-              <a:rPr sz="2000" b="0">
-                <a:solidFill>
-                  <a:srgbClr val="202122"/>
-                </a:solidFill>
-                <a:latin typeface="Calibri"/>
-              </a:rPr>
-              <a:t>macOS library and preference files</a:t>
-            </a:r>
-          </a:p>
-          <a:p>
-            <a:pPr marL="274320" indent="-274320">
-              <a:spcAft>
-                <a:spcPts val="900"/>
-              </a:spcAft>
-              <a:buClr>
-                <a:srgbClr val="0645AD"/>
-              </a:buClr>
-              <a:buFont typeface="Arial"/>
-              <a:buChar char="•"/>
-            </a:pPr>
-            <a:r>
-              <a:rPr sz="2000" b="0">
-                <a:solidFill>
-                  <a:srgbClr val="202122"/>
-                </a:solidFill>
-                <a:latin typeface="Calibri"/>
-              </a:rPr>
-              <a:t>Network and traffic logs</a:t>
-            </a:r>
-          </a:p>
-          <a:p>
-            <a:pPr marL="274320" indent="-274320">
-              <a:spcAft>
-                <a:spcPts val="900"/>
-              </a:spcAft>
-              <a:buClr>
-                <a:srgbClr val="0645AD"/>
-              </a:buClr>
-              <a:buFont typeface="Arial"/>
-              <a:buChar char="•"/>
-            </a:pPr>
-            <a:r>
-              <a:rPr sz="2000" b="1">
-                <a:solidFill>
-                  <a:srgbClr val="202122"/>
-                </a:solidFill>
-                <a:latin typeface="Calibri"/>
-              </a:rPr>
-              <a:t>File system:</a:t>
-            </a:r>
-            <a:r>
-              <a:rPr sz="2000" b="0">
-                <a:solidFill>
-                  <a:srgbClr val="202122"/>
-                </a:solidFill>
-                <a:latin typeface="Calibri"/>
-              </a:rPr>
-              <a:t> NTFS, FAT32, exFAT, APFS, ext4</a:t>
-            </a:r>
-          </a:p>
-          <a:p>
-            <a:pPr marL="274320" indent="-274320">
-              <a:spcAft>
-                <a:spcPts val="900"/>
-              </a:spcAft>
-              <a:buClr>
-                <a:srgbClr val="0645AD"/>
-              </a:buClr>
-              <a:buFont typeface="Arial"/>
-              <a:buChar char="•"/>
-            </a:pPr>
-            <a:r>
-              <a:rPr sz="2000" b="0">
-                <a:solidFill>
-                  <a:srgbClr val="202122"/>
-                </a:solidFill>
-                <a:latin typeface="Calibri"/>
-              </a:rPr>
-              <a:t>Running processes</a:t>
+              <a:t>What does network segmentation limit?</a:t>
+            </a:r>
+          </a:p>
+        </p:txBody>
+      </p:sp>
+      <p:sp>
+        <p:nvSpPr>
+          <p:cNvPr id="12" name="TextBox 11"/>
+          <p:cNvSpPr txBox="1"/>
+          <p:nvPr/>
+        </p:nvSpPr>
+        <p:spPr>
+          <a:xfrm>
+            <a:off x="548640" y="5852160"/>
+            <a:ext cx="11094415" cy="365760"/>
+          </a:xfrm>
+          <a:prstGeom prst="rect">
+            <a:avLst/>
+          </a:prstGeom>
+          <a:noFill/>
+        </p:spPr>
+        <p:txBody>
+          <a:bodyPr wrap="square" anchor="t" lIns="0" rIns="0" tIns="0" bIns="0"/>
+          <a:lstStyle/>
+          <a:p>
+            <a:pPr algn="l"/>
+            <a:r>
+              <a:rPr sz="1300" b="0" i="1">
+                <a:solidFill>
+                  <a:srgbClr val="54595D"/>
+                </a:solidFill>
+                <a:latin typeface="Calibri"/>
+              </a:rPr>
+              <a:t>Answer on mini whiteboards or in your book. Answers are in the speaker notes.</a:t>
             </a:r>
           </a:p>
         </p:txBody>
@@ -8206,7 +11351,7 @@
                 </a:solidFill>
                 <a:latin typeface="Cambria"/>
               </a:rPr>
-              <a:t>Physical and virtual servers</a:t>
+              <a:t>Five secure design aims</a:t>
             </a:r>
           </a:p>
         </p:txBody>
@@ -8279,18 +11424,182 @@
       </p:sp>
       <p:sp>
         <p:nvSpPr>
-          <p:cNvPr id="6" name="Rounded Rectangle 5"/>
+          <p:cNvPr id="6" name="TextBox 5"/>
+          <p:cNvSpPr txBox="1"/>
+          <p:nvPr/>
+        </p:nvSpPr>
+        <p:spPr>
+          <a:xfrm>
+            <a:off x="548640" y="1554480"/>
+            <a:ext cx="6720840" cy="4617720"/>
+          </a:xfrm>
+          <a:prstGeom prst="rect">
+            <a:avLst/>
+          </a:prstGeom>
+          <a:noFill/>
+        </p:spPr>
+        <p:txBody>
+          <a:bodyPr wrap="square" lIns="0" rIns="0" tIns="0" bIns="0">
+            <a:spAutoFit/>
+          </a:bodyPr>
+          <a:lstStyle/>
+          <a:p>
+            <a:pPr>
+              <a:spcAft>
+                <a:spcPts val="1140"/>
+              </a:spcAft>
+            </a:pPr>
+            <a:r>
+              <a:rPr sz="1900" b="0">
+                <a:solidFill>
+                  <a:srgbClr val="202122"/>
+                </a:solidFill>
+                <a:latin typeface="Calibri"/>
+              </a:rPr>
+              <a:t>The NCSC's secure design principles have five aims.</a:t>
+            </a:r>
+          </a:p>
+          <a:p>
+            <a:pPr>
+              <a:spcAft>
+                <a:spcPts val="1140"/>
+              </a:spcAft>
+            </a:pPr>
+            <a:r>
+              <a:rPr sz="1900" b="1">
+                <a:solidFill>
+                  <a:srgbClr val="202122"/>
+                </a:solidFill>
+                <a:latin typeface="Calibri"/>
+              </a:rPr>
+              <a:t>Establish the context:</a:t>
+            </a:r>
+            <a:r>
+              <a:rPr sz="1900" b="0">
+                <a:solidFill>
+                  <a:srgbClr val="202122"/>
+                </a:solidFill>
+                <a:latin typeface="Calibri"/>
+              </a:rPr>
+              <a:t> adopt zero trust, understand the requirements, users, suppliers and where sensitive data lives.</a:t>
+            </a:r>
+          </a:p>
+          <a:p>
+            <a:pPr>
+              <a:spcAft>
+                <a:spcPts val="1140"/>
+              </a:spcAft>
+            </a:pPr>
+            <a:r>
+              <a:rPr sz="1900" b="1">
+                <a:solidFill>
+                  <a:srgbClr val="202122"/>
+                </a:solidFill>
+                <a:latin typeface="Calibri"/>
+              </a:rPr>
+              <a:t>Make compromise difficult:</a:t>
+            </a:r>
+            <a:r>
+              <a:rPr sz="1900" b="0">
+                <a:solidFill>
+                  <a:srgbClr val="202122"/>
+                </a:solidFill>
+                <a:latin typeface="Calibri"/>
+              </a:rPr>
+              <a:t> reduce the attack surface, use proven solutions and audit everything.</a:t>
+            </a:r>
+          </a:p>
+          <a:p>
+            <a:pPr>
+              <a:spcAft>
+                <a:spcPts val="1140"/>
+              </a:spcAft>
+            </a:pPr>
+            <a:r>
+              <a:rPr sz="1900" b="1">
+                <a:solidFill>
+                  <a:srgbClr val="202122"/>
+                </a:solidFill>
+                <a:latin typeface="Calibri"/>
+              </a:rPr>
+              <a:t>Make disruption difficult:</a:t>
+            </a:r>
+            <a:r>
+              <a:rPr sz="1900" b="0">
+                <a:solidFill>
+                  <a:srgbClr val="202122"/>
+                </a:solidFill>
+                <a:latin typeface="Calibri"/>
+              </a:rPr>
+              <a:t> build in resilience and scalability and plan for supplier failure.</a:t>
+            </a:r>
+          </a:p>
+          <a:p>
+            <a:pPr>
+              <a:spcAft>
+                <a:spcPts val="1140"/>
+              </a:spcAft>
+            </a:pPr>
+            <a:r>
+              <a:rPr sz="1900" b="1">
+                <a:solidFill>
+                  <a:srgbClr val="202122"/>
+                </a:solidFill>
+                <a:latin typeface="Calibri"/>
+              </a:rPr>
+              <a:t>Make compromise detection easier:</a:t>
+            </a:r>
+            <a:r>
+              <a:rPr sz="1900" b="0">
+                <a:solidFill>
+                  <a:srgbClr val="202122"/>
+                </a:solidFill>
+                <a:latin typeface="Calibri"/>
+              </a:rPr>
+              <a:t> collect logs, keep monitoring separate from operational systems, and learn what normal looks like.</a:t>
+            </a:r>
+          </a:p>
+          <a:p>
+            <a:pPr>
+              <a:spcAft>
+                <a:spcPts val="1140"/>
+              </a:spcAft>
+            </a:pPr>
+            <a:r>
+              <a:rPr sz="1900" b="1">
+                <a:solidFill>
+                  <a:srgbClr val="202122"/>
+                </a:solidFill>
+                <a:latin typeface="Calibri"/>
+              </a:rPr>
+              <a:t>Reduce the impact of compromise:</a:t>
+            </a:r>
+            <a:r>
+              <a:rPr sz="1900" b="0">
+                <a:solidFill>
+                  <a:srgbClr val="202122"/>
+                </a:solidFill>
+                <a:latin typeface="Calibri"/>
+              </a:rPr>
+              <a:t> segment networks, separate duties, anonymise data and make recovery simple.</a:t>
+            </a:r>
+          </a:p>
+        </p:txBody>
+      </p:sp>
+      <p:sp>
+        <p:nvSpPr>
+          <p:cNvPr id="7" name="Rounded Rectangle 6"/>
           <p:cNvSpPr/>
           <p:nvPr/>
         </p:nvSpPr>
         <p:spPr>
           <a:xfrm>
-            <a:off x="548640" y="1600200"/>
-            <a:ext cx="5364327" cy="640080"/>
+            <a:off x="7772400" y="1554480"/>
+            <a:ext cx="3867912" cy="4526280"/>
           </a:xfrm>
           <a:prstGeom prst="roundRect">
             <a:avLst>
-              <a:gd name="adj" fmla="val 15000"/>
+              <a:gd name="adj" fmla="val 8000"/>
             </a:avLst>
           </a:prstGeom>
           <a:solidFill>
@@ -8323,55 +11632,20 @@
       </p:sp>
       <p:sp>
         <p:nvSpPr>
-          <p:cNvPr id="7" name="TextBox 6"/>
-          <p:cNvSpPr txBox="1"/>
-          <p:nvPr/>
-        </p:nvSpPr>
-        <p:spPr>
-          <a:xfrm>
-            <a:off x="777240" y="1600200"/>
-            <a:ext cx="4907127" cy="640080"/>
-          </a:xfrm>
-          <a:prstGeom prst="rect">
-            <a:avLst/>
-          </a:prstGeom>
-          <a:noFill/>
-        </p:spPr>
-        <p:txBody>
-          <a:bodyPr wrap="square" anchor="ctr" lIns="0" rIns="0" tIns="0" bIns="0"/>
-          <a:lstStyle/>
-          <a:p>
-            <a:pPr algn="l"/>
-            <a:r>
-              <a:rPr sz="2000" b="1" i="0">
-                <a:solidFill>
-                  <a:srgbClr val="FFFFFF"/>
-                </a:solidFill>
-                <a:latin typeface="Calibri"/>
-              </a:rPr>
-              <a:t>Physical servers</a:t>
-            </a:r>
-          </a:p>
-        </p:txBody>
-      </p:sp>
-      <p:sp>
-        <p:nvSpPr>
-          <p:cNvPr id="8" name="Rounded Rectangle 7"/>
+          <p:cNvPr id="8" name="Oval 7"/>
           <p:cNvSpPr/>
           <p:nvPr/>
         </p:nvSpPr>
         <p:spPr>
           <a:xfrm>
-            <a:off x="548640" y="2377440"/>
-            <a:ext cx="5364327" cy="3794760"/>
-          </a:xfrm>
-          <a:prstGeom prst="roundRect">
-            <a:avLst>
-              <a:gd name="adj" fmla="val 4000"/>
-            </a:avLst>
+            <a:off x="8046720" y="1828800"/>
+            <a:ext cx="548640" cy="548640"/>
+          </a:xfrm>
+          <a:prstGeom prst="ellipse">
+            <a:avLst/>
           </a:prstGeom>
           <a:solidFill>
-            <a:srgbClr val="EAF3FF"/>
+            <a:srgbClr val="E0463A"/>
           </a:solidFill>
           <a:ln>
             <a:noFill/>
@@ -8393,9 +11667,20 @@
           </a:fontRef>
         </p:style>
         <p:txBody>
-          <a:bodyPr rtlCol="0" anchor="ctr"/>
-          <a:lstStyle/>
-          <a:p/>
+          <a:bodyPr rtlCol="0" anchor="ctr" lIns="0" rIns="0" tIns="0" bIns="0"/>
+          <a:lstStyle/>
+          <a:p>
+            <a:pPr algn="ctr"/>
+            <a:r>
+              <a:rPr sz="1300" b="1">
+                <a:solidFill>
+                  <a:srgbClr val="FFFFFF"/>
+                </a:solidFill>
+                <a:latin typeface="Calibri"/>
+              </a:rPr>
+              <a:t>e.g.</a:t>
+            </a:r>
+          </a:p>
         </p:txBody>
       </p:sp>
       <p:sp>
@@ -8406,284 +11691,60 @@
         </p:nvSpPr>
         <p:spPr>
           <a:xfrm>
-            <a:off x="822959" y="2606040"/>
-            <a:ext cx="4815687" cy="3337560"/>
-          </a:xfrm>
-          <a:prstGeom prst="rect">
-            <a:avLst/>
-          </a:prstGeom>
-          <a:noFill/>
-        </p:spPr>
-        <p:txBody>
-          <a:bodyPr wrap="square" lIns="0" rIns="0" tIns="0" bIns="0">
-            <a:spAutoFit/>
-          </a:bodyPr>
-          <a:lstStyle/>
-          <a:p>
-            <a:pPr marL="274320" indent="-274320">
-              <a:spcAft>
-                <a:spcPts val="990"/>
-              </a:spcAft>
-              <a:buClr>
-                <a:srgbClr val="0645AD"/>
-              </a:buClr>
-              <a:buFont typeface="Arial"/>
-              <a:buChar char="•"/>
-            </a:pPr>
-            <a:r>
-              <a:rPr sz="2200" b="0">
-                <a:solidFill>
-                  <a:srgbClr val="202122"/>
-                </a:solidFill>
-                <a:latin typeface="Calibri"/>
-              </a:rPr>
-              <a:t>Applications run directly on hardware</a:t>
-            </a:r>
-          </a:p>
-          <a:p>
-            <a:pPr marL="274320" indent="-274320">
-              <a:spcAft>
-                <a:spcPts val="990"/>
-              </a:spcAft>
-              <a:buClr>
-                <a:srgbClr val="0645AD"/>
-              </a:buClr>
-              <a:buFont typeface="Arial"/>
-              <a:buChar char="•"/>
-            </a:pPr>
-            <a:r>
-              <a:rPr sz="2200" b="0">
-                <a:solidFill>
-                  <a:srgbClr val="202122"/>
-                </a:solidFill>
-                <a:latin typeface="Calibri"/>
-              </a:rPr>
-              <a:t>Full access to hardware resources</a:t>
-            </a:r>
-          </a:p>
-        </p:txBody>
-      </p:sp>
-      <p:sp>
-        <p:nvSpPr>
-          <p:cNvPr id="10" name="Rounded Rectangle 9"/>
-          <p:cNvSpPr/>
-          <p:nvPr/>
-        </p:nvSpPr>
-        <p:spPr>
-          <a:xfrm>
-            <a:off x="6278727" y="1600200"/>
-            <a:ext cx="5364327" cy="640080"/>
-          </a:xfrm>
-          <a:prstGeom prst="roundRect">
-            <a:avLst>
-              <a:gd name="adj" fmla="val 15000"/>
-            </a:avLst>
-          </a:prstGeom>
-          <a:solidFill>
-            <a:srgbClr val="0645AD"/>
-          </a:solidFill>
-          <a:ln>
-            <a:noFill/>
-          </a:ln>
-          <a:effectLst/>
-        </p:spPr>
-        <p:style>
-          <a:lnRef idx="1">
-            <a:schemeClr val="accent1"/>
-          </a:lnRef>
-          <a:fillRef idx="3">
-            <a:schemeClr val="accent1"/>
-          </a:fillRef>
-          <a:effectRef idx="2">
-            <a:schemeClr val="accent1"/>
-          </a:effectRef>
-          <a:fontRef idx="minor">
-            <a:schemeClr val="lt1"/>
-          </a:fontRef>
-        </p:style>
-        <p:txBody>
-          <a:bodyPr rtlCol="0" anchor="ctr"/>
-          <a:lstStyle/>
-          <a:p/>
-        </p:txBody>
-      </p:sp>
-      <p:sp>
-        <p:nvSpPr>
-          <p:cNvPr id="11" name="TextBox 10"/>
-          <p:cNvSpPr txBox="1"/>
-          <p:nvPr/>
-        </p:nvSpPr>
-        <p:spPr>
-          <a:xfrm>
-            <a:off x="6507327" y="1600200"/>
-            <a:ext cx="4907127" cy="640080"/>
-          </a:xfrm>
-          <a:prstGeom prst="rect">
-            <a:avLst/>
-          </a:prstGeom>
-          <a:noFill/>
-        </p:spPr>
-        <p:txBody>
-          <a:bodyPr wrap="square" anchor="ctr" lIns="0" rIns="0" tIns="0" bIns="0"/>
+            <a:off x="8046720" y="2560320"/>
+            <a:ext cx="3291840" cy="365760"/>
+          </a:xfrm>
+          <a:prstGeom prst="rect">
+            <a:avLst/>
+          </a:prstGeom>
+          <a:noFill/>
+        </p:spPr>
+        <p:txBody>
+          <a:bodyPr wrap="square" anchor="t" lIns="0" rIns="0" tIns="0" bIns="0"/>
           <a:lstStyle/>
           <a:p>
             <a:pPr algn="l"/>
             <a:r>
-              <a:rPr sz="2000" b="1" i="0">
+              <a:rPr sz="1300" b="1" i="0">
+                <a:solidFill>
+                  <a:srgbClr val="A9C8F0"/>
+                </a:solidFill>
+                <a:latin typeface="Calibri"/>
+              </a:rPr>
+              <a:t>EXAMPLE</a:t>
+            </a:r>
+          </a:p>
+        </p:txBody>
+      </p:sp>
+      <p:sp>
+        <p:nvSpPr>
+          <p:cNvPr id="10" name="TextBox 9"/>
+          <p:cNvSpPr txBox="1"/>
+          <p:nvPr/>
+        </p:nvSpPr>
+        <p:spPr>
+          <a:xfrm>
+            <a:off x="8046720" y="2971800"/>
+            <a:ext cx="3291840" cy="2971800"/>
+          </a:xfrm>
+          <a:prstGeom prst="rect">
+            <a:avLst/>
+          </a:prstGeom>
+          <a:noFill/>
+        </p:spPr>
+        <p:txBody>
+          <a:bodyPr wrap="square" anchor="t" lIns="0" rIns="0" tIns="0" bIns="0"/>
+          <a:lstStyle/>
+          <a:p>
+            <a:pPr algn="l"/>
+            <a:r>
+              <a:rPr sz="1900" b="0" i="0">
                 <a:solidFill>
                   <a:srgbClr val="FFFFFF"/>
                 </a:solidFill>
-                <a:latin typeface="Calibri"/>
-              </a:rPr>
-              <a:t>Virtualisation</a:t>
-            </a:r>
-          </a:p>
-        </p:txBody>
-      </p:sp>
-      <p:sp>
-        <p:nvSpPr>
-          <p:cNvPr id="12" name="Rounded Rectangle 11"/>
-          <p:cNvSpPr/>
-          <p:nvPr/>
-        </p:nvSpPr>
-        <p:spPr>
-          <a:xfrm>
-            <a:off x="6278727" y="2377440"/>
-            <a:ext cx="5364327" cy="3794760"/>
-          </a:xfrm>
-          <a:prstGeom prst="roundRect">
-            <a:avLst>
-              <a:gd name="adj" fmla="val 4000"/>
-            </a:avLst>
-          </a:prstGeom>
-          <a:solidFill>
-            <a:srgbClr val="EAF3FF"/>
-          </a:solidFill>
-          <a:ln>
-            <a:noFill/>
-          </a:ln>
-          <a:effectLst/>
-        </p:spPr>
-        <p:style>
-          <a:lnRef idx="1">
-            <a:schemeClr val="accent1"/>
-          </a:lnRef>
-          <a:fillRef idx="3">
-            <a:schemeClr val="accent1"/>
-          </a:fillRef>
-          <a:effectRef idx="2">
-            <a:schemeClr val="accent1"/>
-          </a:effectRef>
-          <a:fontRef idx="minor">
-            <a:schemeClr val="lt1"/>
-          </a:fontRef>
-        </p:style>
-        <p:txBody>
-          <a:bodyPr rtlCol="0" anchor="ctr"/>
-          <a:lstStyle/>
-          <a:p/>
-        </p:txBody>
-      </p:sp>
-      <p:sp>
-        <p:nvSpPr>
-          <p:cNvPr id="13" name="TextBox 12"/>
-          <p:cNvSpPr txBox="1"/>
-          <p:nvPr/>
-        </p:nvSpPr>
-        <p:spPr>
-          <a:xfrm>
-            <a:off x="6553047" y="2606040"/>
-            <a:ext cx="4815687" cy="3337560"/>
-          </a:xfrm>
-          <a:prstGeom prst="rect">
-            <a:avLst/>
-          </a:prstGeom>
-          <a:noFill/>
-        </p:spPr>
-        <p:txBody>
-          <a:bodyPr wrap="square" lIns="0" rIns="0" tIns="0" bIns="0">
-            <a:spAutoFit/>
-          </a:bodyPr>
-          <a:lstStyle/>
-          <a:p>
-            <a:pPr marL="274320" indent="-274320">
-              <a:spcAft>
-                <a:spcPts val="990"/>
-              </a:spcAft>
-              <a:buClr>
-                <a:srgbClr val="0645AD"/>
-              </a:buClr>
-              <a:buFont typeface="Arial"/>
-              <a:buChar char="•"/>
-            </a:pPr>
-            <a:r>
-              <a:rPr sz="2200" b="1">
-                <a:solidFill>
-                  <a:srgbClr val="202122"/>
-                </a:solidFill>
-                <a:latin typeface="Calibri"/>
-              </a:rPr>
-              <a:t>Virtual servers:</a:t>
-            </a:r>
-            <a:r>
-              <a:rPr sz="2200" b="0">
-                <a:solidFill>
-                  <a:srgbClr val="202122"/>
-                </a:solidFill>
-                <a:latin typeface="Calibri"/>
-              </a:rPr>
-              <a:t> many isolated OS instances on one machine</a:t>
-            </a:r>
-          </a:p>
-          <a:p>
-            <a:pPr marL="274320" indent="-274320">
-              <a:spcAft>
-                <a:spcPts val="990"/>
-              </a:spcAft>
-              <a:buClr>
-                <a:srgbClr val="0645AD"/>
-              </a:buClr>
-              <a:buFont typeface="Arial"/>
-              <a:buChar char="•"/>
-            </a:pPr>
-            <a:r>
-              <a:rPr sz="2200" b="1">
-                <a:solidFill>
-                  <a:srgbClr val="202122"/>
-                </a:solidFill>
-                <a:latin typeface="Calibri"/>
-              </a:rPr>
-              <a:t>Containers:</a:t>
-            </a:r>
-            <a:r>
-              <a:rPr sz="2200" b="0">
-                <a:solidFill>
-                  <a:srgbClr val="202122"/>
-                </a:solidFill>
-                <a:latin typeface="Calibri"/>
-              </a:rPr>
-              <a:t> portable packages holding only what an app needs</a:t>
-            </a:r>
-          </a:p>
-          <a:p>
-            <a:pPr marL="274320" indent="-274320">
-              <a:spcAft>
-                <a:spcPts val="990"/>
-              </a:spcAft>
-              <a:buClr>
-                <a:srgbClr val="0645AD"/>
-              </a:buClr>
-              <a:buFont typeface="Arial"/>
-              <a:buChar char="•"/>
-            </a:pPr>
-            <a:r>
-              <a:rPr sz="2200" b="0">
-                <a:solidFill>
-                  <a:srgbClr val="202122"/>
-                </a:solidFill>
-                <a:latin typeface="Calibri"/>
-              </a:rPr>
-              <a:t>Isolation adds security and portability</a:t>
+                <a:latin typeface="Cambria"/>
+              </a:rPr>
+              <a:t>Keeping logs on a separate server means an attacker who wipes the web server can't also wipe the evidence.</a:t>
             </a:r>
           </a:p>
         </p:txBody>
@@ -8775,7 +11836,7 @@
                 </a:solidFill>
                 <a:latin typeface="Cambria"/>
               </a:rPr>
-              <a:t>Key terms</a:t>
+              <a:t>Five secure design aims</a:t>
             </a:r>
           </a:p>
         </p:txBody>
@@ -8855,11 +11916,11 @@
         <p:spPr>
           <a:xfrm>
             <a:off x="548640" y="1600200"/>
-            <a:ext cx="5432907" cy="1371600"/>
+            <a:ext cx="3515258" cy="2148840"/>
           </a:xfrm>
           <a:prstGeom prst="roundRect">
             <a:avLst>
-              <a:gd name="adj" fmla="val 8000"/>
+              <a:gd name="adj" fmla="val 6000"/>
             </a:avLst>
           </a:prstGeom>
           <a:solidFill>
@@ -8892,14 +11953,67 @@
       </p:sp>
       <p:sp>
         <p:nvSpPr>
-          <p:cNvPr id="7" name="TextBox 6"/>
-          <p:cNvSpPr txBox="1"/>
-          <p:nvPr/>
-        </p:nvSpPr>
-        <p:spPr>
-          <a:xfrm>
-            <a:off x="777240" y="1691640"/>
-            <a:ext cx="4975707" cy="1188720"/>
+          <p:cNvPr id="7" name="Oval 6"/>
+          <p:cNvSpPr/>
+          <p:nvPr/>
+        </p:nvSpPr>
+        <p:spPr>
+          <a:xfrm>
+            <a:off x="777240" y="1828800"/>
+            <a:ext cx="457200" cy="457200"/>
+          </a:xfrm>
+          <a:prstGeom prst="ellipse">
+            <a:avLst/>
+          </a:prstGeom>
+          <a:solidFill>
+            <a:srgbClr val="E0463A"/>
+          </a:solidFill>
+          <a:ln>
+            <a:noFill/>
+          </a:ln>
+          <a:effectLst/>
+        </p:spPr>
+        <p:style>
+          <a:lnRef idx="1">
+            <a:schemeClr val="accent1"/>
+          </a:lnRef>
+          <a:fillRef idx="3">
+            <a:schemeClr val="accent1"/>
+          </a:fillRef>
+          <a:effectRef idx="2">
+            <a:schemeClr val="accent1"/>
+          </a:effectRef>
+          <a:fontRef idx="minor">
+            <a:schemeClr val="lt1"/>
+          </a:fontRef>
+        </p:style>
+        <p:txBody>
+          <a:bodyPr rtlCol="0" anchor="ctr" lIns="0" rIns="0" tIns="0" bIns="0"/>
+          <a:lstStyle/>
+          <a:p>
+            <a:pPr algn="ctr"/>
+            <a:r>
+              <a:rPr sz="1500" b="1">
+                <a:solidFill>
+                  <a:srgbClr val="FFFFFF"/>
+                </a:solidFill>
+                <a:latin typeface="Calibri"/>
+              </a:rPr>
+              <a:t>1</a:t>
+            </a:r>
+          </a:p>
+        </p:txBody>
+      </p:sp>
+      <p:sp>
+        <p:nvSpPr>
+          <p:cNvPr id="8" name="TextBox 7"/>
+          <p:cNvSpPr txBox="1"/>
+          <p:nvPr/>
+        </p:nvSpPr>
+        <p:spPr>
+          <a:xfrm>
+            <a:off x="1371600" y="1801368"/>
+            <a:ext cx="2509418" cy="512064"/>
           </a:xfrm>
           <a:prstGeom prst="rect">
             <a:avLst/>
@@ -8912,40 +12026,64 @@
           <a:p>
             <a:pPr algn="l"/>
             <a:r>
-              <a:rPr sz="1900" b="1" i="0">
+              <a:rPr sz="1700" b="1" i="0">
                 <a:solidFill>
                   <a:srgbClr val="03306E"/>
                 </a:solidFill>
                 <a:latin typeface="Calibri"/>
               </a:rPr>
-              <a:t>Confidentiality</a:t>
-            </a:r>
-            <a:r>
-              <a:rPr sz="1900">
+              <a:t>Establish the context</a:t>
+            </a:r>
+          </a:p>
+        </p:txBody>
+      </p:sp>
+      <p:sp>
+        <p:nvSpPr>
+          <p:cNvPr id="9" name="TextBox 8"/>
+          <p:cNvSpPr txBox="1"/>
+          <p:nvPr/>
+        </p:nvSpPr>
+        <p:spPr>
+          <a:xfrm>
+            <a:off x="777240" y="2468880"/>
+            <a:ext cx="3058058" cy="1143000"/>
+          </a:xfrm>
+          <a:prstGeom prst="rect">
+            <a:avLst/>
+          </a:prstGeom>
+          <a:noFill/>
+        </p:spPr>
+        <p:txBody>
+          <a:bodyPr wrap="square" anchor="t" lIns="0" rIns="0" tIns="0" bIns="0"/>
+          <a:lstStyle/>
+          <a:p>
+            <a:pPr algn="l"/>
+            <a:r>
+              <a:rPr sz="1900" b="0" i="0">
                 <a:solidFill>
                   <a:srgbClr val="202122"/>
                 </a:solidFill>
                 <a:latin typeface="Calibri"/>
               </a:rPr>
-              <a:t>  access restricted to authorised users.</a:t>
-            </a:r>
-          </a:p>
-        </p:txBody>
-      </p:sp>
-      <p:sp>
-        <p:nvSpPr>
-          <p:cNvPr id="8" name="Rounded Rectangle 7"/>
+              <a:t>Adopt zero trust, define acceptable risk, map where sensitive data lives.</a:t>
+            </a:r>
+          </a:p>
+        </p:txBody>
+      </p:sp>
+      <p:sp>
+        <p:nvSpPr>
+          <p:cNvPr id="10" name="Rounded Rectangle 9"/>
           <p:cNvSpPr/>
           <p:nvPr/>
         </p:nvSpPr>
         <p:spPr>
           <a:xfrm>
-            <a:off x="6210147" y="1600200"/>
-            <a:ext cx="5432907" cy="1371600"/>
+            <a:off x="4338218" y="1600200"/>
+            <a:ext cx="3515258" cy="2148840"/>
           </a:xfrm>
           <a:prstGeom prst="roundRect">
             <a:avLst>
-              <a:gd name="adj" fmla="val 8000"/>
+              <a:gd name="adj" fmla="val 6000"/>
             </a:avLst>
           </a:prstGeom>
           <a:solidFill>
@@ -8978,14 +12116,67 @@
       </p:sp>
       <p:sp>
         <p:nvSpPr>
-          <p:cNvPr id="9" name="TextBox 8"/>
-          <p:cNvSpPr txBox="1"/>
-          <p:nvPr/>
-        </p:nvSpPr>
-        <p:spPr>
-          <a:xfrm>
-            <a:off x="6438747" y="1691640"/>
-            <a:ext cx="4975707" cy="1188720"/>
+          <p:cNvPr id="11" name="Oval 10"/>
+          <p:cNvSpPr/>
+          <p:nvPr/>
+        </p:nvSpPr>
+        <p:spPr>
+          <a:xfrm>
+            <a:off x="4566818" y="1828800"/>
+            <a:ext cx="457200" cy="457200"/>
+          </a:xfrm>
+          <a:prstGeom prst="ellipse">
+            <a:avLst/>
+          </a:prstGeom>
+          <a:solidFill>
+            <a:srgbClr val="E0463A"/>
+          </a:solidFill>
+          <a:ln>
+            <a:noFill/>
+          </a:ln>
+          <a:effectLst/>
+        </p:spPr>
+        <p:style>
+          <a:lnRef idx="1">
+            <a:schemeClr val="accent1"/>
+          </a:lnRef>
+          <a:fillRef idx="3">
+            <a:schemeClr val="accent1"/>
+          </a:fillRef>
+          <a:effectRef idx="2">
+            <a:schemeClr val="accent1"/>
+          </a:effectRef>
+          <a:fontRef idx="minor">
+            <a:schemeClr val="lt1"/>
+          </a:fontRef>
+        </p:style>
+        <p:txBody>
+          <a:bodyPr rtlCol="0" anchor="ctr" lIns="0" rIns="0" tIns="0" bIns="0"/>
+          <a:lstStyle/>
+          <a:p>
+            <a:pPr algn="ctr"/>
+            <a:r>
+              <a:rPr sz="1500" b="1">
+                <a:solidFill>
+                  <a:srgbClr val="FFFFFF"/>
+                </a:solidFill>
+                <a:latin typeface="Calibri"/>
+              </a:rPr>
+              <a:t>2</a:t>
+            </a:r>
+          </a:p>
+        </p:txBody>
+      </p:sp>
+      <p:sp>
+        <p:nvSpPr>
+          <p:cNvPr id="12" name="TextBox 11"/>
+          <p:cNvSpPr txBox="1"/>
+          <p:nvPr/>
+        </p:nvSpPr>
+        <p:spPr>
+          <a:xfrm>
+            <a:off x="5161178" y="1801368"/>
+            <a:ext cx="2509418" cy="512064"/>
           </a:xfrm>
           <a:prstGeom prst="rect">
             <a:avLst/>
@@ -8998,40 +12189,64 @@
           <a:p>
             <a:pPr algn="l"/>
             <a:r>
-              <a:rPr sz="1900" b="1" i="0">
+              <a:rPr sz="1600" b="1" i="0">
                 <a:solidFill>
                   <a:srgbClr val="03306E"/>
                 </a:solidFill>
                 <a:latin typeface="Calibri"/>
               </a:rPr>
-              <a:t>Integrity</a:t>
-            </a:r>
-            <a:r>
-              <a:rPr sz="1900">
+              <a:t>Make compromise difficult</a:t>
+            </a:r>
+          </a:p>
+        </p:txBody>
+      </p:sp>
+      <p:sp>
+        <p:nvSpPr>
+          <p:cNvPr id="13" name="TextBox 12"/>
+          <p:cNvSpPr txBox="1"/>
+          <p:nvPr/>
+        </p:nvSpPr>
+        <p:spPr>
+          <a:xfrm>
+            <a:off x="4566818" y="2468880"/>
+            <a:ext cx="3058058" cy="1143000"/>
+          </a:xfrm>
+          <a:prstGeom prst="rect">
+            <a:avLst/>
+          </a:prstGeom>
+          <a:noFill/>
+        </p:spPr>
+        <p:txBody>
+          <a:bodyPr wrap="square" anchor="t" lIns="0" rIns="0" tIns="0" bIns="0"/>
+          <a:lstStyle/>
+          <a:p>
+            <a:pPr algn="l"/>
+            <a:r>
+              <a:rPr sz="2000" b="0" i="0">
                 <a:solidFill>
                   <a:srgbClr val="202122"/>
                 </a:solidFill>
                 <a:latin typeface="Calibri"/>
               </a:rPr>
-              <a:t>  data cannot be changed without authorisation.</a:t>
-            </a:r>
-          </a:p>
-        </p:txBody>
-      </p:sp>
-      <p:sp>
-        <p:nvSpPr>
-          <p:cNvPr id="10" name="Rounded Rectangle 9"/>
+              <a:t>Reduce the attack surface, use proven solutions, audit operations.</a:t>
+            </a:r>
+          </a:p>
+        </p:txBody>
+      </p:sp>
+      <p:sp>
+        <p:nvSpPr>
+          <p:cNvPr id="14" name="Rounded Rectangle 13"/>
           <p:cNvSpPr/>
           <p:nvPr/>
         </p:nvSpPr>
         <p:spPr>
           <a:xfrm>
-            <a:off x="548640" y="3200400"/>
-            <a:ext cx="5432907" cy="1371600"/>
+            <a:off x="8127796" y="1600200"/>
+            <a:ext cx="3515258" cy="2148840"/>
           </a:xfrm>
           <a:prstGeom prst="roundRect">
             <a:avLst>
-              <a:gd name="adj" fmla="val 8000"/>
+              <a:gd name="adj" fmla="val 6000"/>
             </a:avLst>
           </a:prstGeom>
           <a:solidFill>
@@ -9064,14 +12279,67 @@
       </p:sp>
       <p:sp>
         <p:nvSpPr>
-          <p:cNvPr id="11" name="TextBox 10"/>
-          <p:cNvSpPr txBox="1"/>
-          <p:nvPr/>
-        </p:nvSpPr>
-        <p:spPr>
-          <a:xfrm>
-            <a:off x="777240" y="3291840"/>
-            <a:ext cx="4975707" cy="1188720"/>
+          <p:cNvPr id="15" name="Oval 14"/>
+          <p:cNvSpPr/>
+          <p:nvPr/>
+        </p:nvSpPr>
+        <p:spPr>
+          <a:xfrm>
+            <a:off x="8356396" y="1828800"/>
+            <a:ext cx="457200" cy="457200"/>
+          </a:xfrm>
+          <a:prstGeom prst="ellipse">
+            <a:avLst/>
+          </a:prstGeom>
+          <a:solidFill>
+            <a:srgbClr val="E0463A"/>
+          </a:solidFill>
+          <a:ln>
+            <a:noFill/>
+          </a:ln>
+          <a:effectLst/>
+        </p:spPr>
+        <p:style>
+          <a:lnRef idx="1">
+            <a:schemeClr val="accent1"/>
+          </a:lnRef>
+          <a:fillRef idx="3">
+            <a:schemeClr val="accent1"/>
+          </a:fillRef>
+          <a:effectRef idx="2">
+            <a:schemeClr val="accent1"/>
+          </a:effectRef>
+          <a:fontRef idx="minor">
+            <a:schemeClr val="lt1"/>
+          </a:fontRef>
+        </p:style>
+        <p:txBody>
+          <a:bodyPr rtlCol="0" anchor="ctr" lIns="0" rIns="0" tIns="0" bIns="0"/>
+          <a:lstStyle/>
+          <a:p>
+            <a:pPr algn="ctr"/>
+            <a:r>
+              <a:rPr sz="1500" b="1">
+                <a:solidFill>
+                  <a:srgbClr val="FFFFFF"/>
+                </a:solidFill>
+                <a:latin typeface="Calibri"/>
+              </a:rPr>
+              <a:t>3</a:t>
+            </a:r>
+          </a:p>
+        </p:txBody>
+      </p:sp>
+      <p:sp>
+        <p:nvSpPr>
+          <p:cNvPr id="16" name="TextBox 15"/>
+          <p:cNvSpPr txBox="1"/>
+          <p:nvPr/>
+        </p:nvSpPr>
+        <p:spPr>
+          <a:xfrm>
+            <a:off x="8950756" y="1801368"/>
+            <a:ext cx="2509418" cy="512064"/>
           </a:xfrm>
           <a:prstGeom prst="rect">
             <a:avLst/>
@@ -9084,40 +12352,64 @@
           <a:p>
             <a:pPr algn="l"/>
             <a:r>
-              <a:rPr sz="1900" b="1" i="0">
+              <a:rPr sz="1600" b="1" i="0">
                 <a:solidFill>
                   <a:srgbClr val="03306E"/>
                 </a:solidFill>
                 <a:latin typeface="Calibri"/>
               </a:rPr>
-              <a:t>Availability</a:t>
-            </a:r>
-            <a:r>
-              <a:rPr sz="1900">
+              <a:t>Make disruption difficult</a:t>
+            </a:r>
+          </a:p>
+        </p:txBody>
+      </p:sp>
+      <p:sp>
+        <p:nvSpPr>
+          <p:cNvPr id="17" name="TextBox 16"/>
+          <p:cNvSpPr txBox="1"/>
+          <p:nvPr/>
+        </p:nvSpPr>
+        <p:spPr>
+          <a:xfrm>
+            <a:off x="8356396" y="2468880"/>
+            <a:ext cx="3058058" cy="1143000"/>
+          </a:xfrm>
+          <a:prstGeom prst="rect">
+            <a:avLst/>
+          </a:prstGeom>
+          <a:noFill/>
+        </p:spPr>
+        <p:txBody>
+          <a:bodyPr wrap="square" anchor="t" lIns="0" rIns="0" tIns="0" bIns="0"/>
+          <a:lstStyle/>
+          <a:p>
+            <a:pPr algn="l"/>
+            <a:r>
+              <a:rPr sz="2000" b="0" i="0">
                 <a:solidFill>
                   <a:srgbClr val="202122"/>
                 </a:solidFill>
                 <a:latin typeface="Calibri"/>
               </a:rPr>
-              <a:t>  authorised users can access data when needed.</a:t>
-            </a:r>
-          </a:p>
-        </p:txBody>
-      </p:sp>
-      <p:sp>
-        <p:nvSpPr>
-          <p:cNvPr id="12" name="Rounded Rectangle 11"/>
+              <a:t>Build resilience and scalability, plan for third-party failure.</a:t>
+            </a:r>
+          </a:p>
+        </p:txBody>
+      </p:sp>
+      <p:sp>
+        <p:nvSpPr>
+          <p:cNvPr id="18" name="Rounded Rectangle 17"/>
           <p:cNvSpPr/>
           <p:nvPr/>
         </p:nvSpPr>
         <p:spPr>
           <a:xfrm>
-            <a:off x="6210147" y="3200400"/>
-            <a:ext cx="5432907" cy="1371600"/>
+            <a:off x="548640" y="4023360"/>
+            <a:ext cx="3515258" cy="2148840"/>
           </a:xfrm>
           <a:prstGeom prst="roundRect">
             <a:avLst>
-              <a:gd name="adj" fmla="val 8000"/>
+              <a:gd name="adj" fmla="val 6000"/>
             </a:avLst>
           </a:prstGeom>
           <a:solidFill>
@@ -9150,14 +12442,67 @@
       </p:sp>
       <p:sp>
         <p:nvSpPr>
-          <p:cNvPr id="13" name="TextBox 12"/>
-          <p:cNvSpPr txBox="1"/>
-          <p:nvPr/>
-        </p:nvSpPr>
-        <p:spPr>
-          <a:xfrm>
-            <a:off x="6438747" y="3291840"/>
-            <a:ext cx="4975707" cy="1188720"/>
+          <p:cNvPr id="19" name="Oval 18"/>
+          <p:cNvSpPr/>
+          <p:nvPr/>
+        </p:nvSpPr>
+        <p:spPr>
+          <a:xfrm>
+            <a:off x="777240" y="4251960"/>
+            <a:ext cx="457200" cy="457200"/>
+          </a:xfrm>
+          <a:prstGeom prst="ellipse">
+            <a:avLst/>
+          </a:prstGeom>
+          <a:solidFill>
+            <a:srgbClr val="E0463A"/>
+          </a:solidFill>
+          <a:ln>
+            <a:noFill/>
+          </a:ln>
+          <a:effectLst/>
+        </p:spPr>
+        <p:style>
+          <a:lnRef idx="1">
+            <a:schemeClr val="accent1"/>
+          </a:lnRef>
+          <a:fillRef idx="3">
+            <a:schemeClr val="accent1"/>
+          </a:fillRef>
+          <a:effectRef idx="2">
+            <a:schemeClr val="accent1"/>
+          </a:effectRef>
+          <a:fontRef idx="minor">
+            <a:schemeClr val="lt1"/>
+          </a:fontRef>
+        </p:style>
+        <p:txBody>
+          <a:bodyPr rtlCol="0" anchor="ctr" lIns="0" rIns="0" tIns="0" bIns="0"/>
+          <a:lstStyle/>
+          <a:p>
+            <a:pPr algn="ctr"/>
+            <a:r>
+              <a:rPr sz="1500" b="1">
+                <a:solidFill>
+                  <a:srgbClr val="FFFFFF"/>
+                </a:solidFill>
+                <a:latin typeface="Calibri"/>
+              </a:rPr>
+              <a:t>4</a:t>
+            </a:r>
+          </a:p>
+        </p:txBody>
+      </p:sp>
+      <p:sp>
+        <p:nvSpPr>
+          <p:cNvPr id="20" name="TextBox 19"/>
+          <p:cNvSpPr txBox="1"/>
+          <p:nvPr/>
+        </p:nvSpPr>
+        <p:spPr>
+          <a:xfrm>
+            <a:off x="1371600" y="4224528"/>
+            <a:ext cx="2509418" cy="512064"/>
           </a:xfrm>
           <a:prstGeom prst="rect">
             <a:avLst/>
@@ -9170,40 +12515,64 @@
           <a:p>
             <a:pPr algn="l"/>
             <a:r>
-              <a:rPr sz="1900" b="1" i="0">
+              <a:rPr sz="1700" b="1" i="0">
                 <a:solidFill>
                   <a:srgbClr val="03306E"/>
                 </a:solidFill>
                 <a:latin typeface="Calibri"/>
               </a:rPr>
-              <a:t>IAAA</a:t>
-            </a:r>
-            <a:r>
-              <a:rPr sz="1900">
+              <a:t>Make detection easier</a:t>
+            </a:r>
+          </a:p>
+        </p:txBody>
+      </p:sp>
+      <p:sp>
+        <p:nvSpPr>
+          <p:cNvPr id="21" name="TextBox 20"/>
+          <p:cNvSpPr txBox="1"/>
+          <p:nvPr/>
+        </p:nvSpPr>
+        <p:spPr>
+          <a:xfrm>
+            <a:off x="777240" y="4892040"/>
+            <a:ext cx="3058058" cy="1143000"/>
+          </a:xfrm>
+          <a:prstGeom prst="rect">
+            <a:avLst/>
+          </a:prstGeom>
+          <a:noFill/>
+        </p:spPr>
+        <p:txBody>
+          <a:bodyPr wrap="square" anchor="t" lIns="0" rIns="0" tIns="0" bIns="0"/>
+          <a:lstStyle/>
+          <a:p>
+            <a:pPr algn="l"/>
+            <a:r>
+              <a:rPr sz="1800" b="0" i="0">
                 <a:solidFill>
                   <a:srgbClr val="202122"/>
                 </a:solidFill>
                 <a:latin typeface="Calibri"/>
               </a:rPr>
-              <a:t>  identification, authentication, authorisation, accountability.</a:t>
-            </a:r>
-          </a:p>
-        </p:txBody>
-      </p:sp>
-      <p:sp>
-        <p:nvSpPr>
-          <p:cNvPr id="14" name="Rounded Rectangle 13"/>
+              <a:t>Collect logs, keep monitoring separate from operations, learn what normal looks like.</a:t>
+            </a:r>
+          </a:p>
+        </p:txBody>
+      </p:sp>
+      <p:sp>
+        <p:nvSpPr>
+          <p:cNvPr id="22" name="Rounded Rectangle 21"/>
           <p:cNvSpPr/>
           <p:nvPr/>
         </p:nvSpPr>
         <p:spPr>
           <a:xfrm>
-            <a:off x="548640" y="4800600"/>
-            <a:ext cx="5432907" cy="1371600"/>
+            <a:off x="4338218" y="4023360"/>
+            <a:ext cx="3515258" cy="2148840"/>
           </a:xfrm>
           <a:prstGeom prst="roundRect">
             <a:avLst>
-              <a:gd name="adj" fmla="val 8000"/>
+              <a:gd name="adj" fmla="val 6000"/>
             </a:avLst>
           </a:prstGeom>
           <a:solidFill>
@@ -9236,64 +12605,20 @@
       </p:sp>
       <p:sp>
         <p:nvSpPr>
-          <p:cNvPr id="15" name="TextBox 14"/>
-          <p:cNvSpPr txBox="1"/>
-          <p:nvPr/>
-        </p:nvSpPr>
-        <p:spPr>
-          <a:xfrm>
-            <a:off x="777240" y="4892040"/>
-            <a:ext cx="4975707" cy="1188720"/>
-          </a:xfrm>
-          <a:prstGeom prst="rect">
-            <a:avLst/>
-          </a:prstGeom>
-          <a:noFill/>
-        </p:spPr>
-        <p:txBody>
-          <a:bodyPr wrap="square" anchor="ctr" lIns="0" rIns="0" tIns="0" bIns="0"/>
-          <a:lstStyle/>
-          <a:p>
-            <a:pPr algn="l"/>
-            <a:r>
-              <a:rPr sz="1900" b="1" i="0">
-                <a:solidFill>
-                  <a:srgbClr val="03306E"/>
-                </a:solidFill>
-                <a:latin typeface="Calibri"/>
-              </a:rPr>
-              <a:t>Defence in depth</a:t>
-            </a:r>
-            <a:r>
-              <a:rPr sz="1900">
-                <a:solidFill>
-                  <a:srgbClr val="202122"/>
-                </a:solidFill>
-                <a:latin typeface="Calibri"/>
-              </a:rPr>
-              <a:t>  layered security so one failure does not compromise everything.</a:t>
-            </a:r>
-          </a:p>
-        </p:txBody>
-      </p:sp>
-      <p:sp>
-        <p:nvSpPr>
-          <p:cNvPr id="16" name="Rounded Rectangle 15"/>
+          <p:cNvPr id="23" name="Oval 22"/>
           <p:cNvSpPr/>
           <p:nvPr/>
         </p:nvSpPr>
         <p:spPr>
           <a:xfrm>
-            <a:off x="6210147" y="4800600"/>
-            <a:ext cx="5432907" cy="1371600"/>
-          </a:xfrm>
-          <a:prstGeom prst="roundRect">
-            <a:avLst>
-              <a:gd name="adj" fmla="val 8000"/>
-            </a:avLst>
+            <a:off x="4566818" y="4251960"/>
+            <a:ext cx="457200" cy="457200"/>
+          </a:xfrm>
+          <a:prstGeom prst="ellipse">
+            <a:avLst/>
           </a:prstGeom>
           <a:solidFill>
-            <a:srgbClr val="EAF3FF"/>
+            <a:srgbClr val="E0463A"/>
           </a:solidFill>
           <a:ln>
             <a:noFill/>
@@ -9315,21 +12640,32 @@
           </a:fontRef>
         </p:style>
         <p:txBody>
-          <a:bodyPr rtlCol="0" anchor="ctr"/>
-          <a:lstStyle/>
-          <a:p/>
-        </p:txBody>
-      </p:sp>
-      <p:sp>
-        <p:nvSpPr>
-          <p:cNvPr id="17" name="TextBox 16"/>
-          <p:cNvSpPr txBox="1"/>
-          <p:nvPr/>
-        </p:nvSpPr>
-        <p:spPr>
-          <a:xfrm>
-            <a:off x="6438747" y="4892040"/>
-            <a:ext cx="4975707" cy="1188720"/>
+          <a:bodyPr rtlCol="0" anchor="ctr" lIns="0" rIns="0" tIns="0" bIns="0"/>
+          <a:lstStyle/>
+          <a:p>
+            <a:pPr algn="ctr"/>
+            <a:r>
+              <a:rPr sz="1500" b="1">
+                <a:solidFill>
+                  <a:srgbClr val="FFFFFF"/>
+                </a:solidFill>
+                <a:latin typeface="Calibri"/>
+              </a:rPr>
+              <a:t>5</a:t>
+            </a:r>
+          </a:p>
+        </p:txBody>
+      </p:sp>
+      <p:sp>
+        <p:nvSpPr>
+          <p:cNvPr id="24" name="TextBox 23"/>
+          <p:cNvSpPr txBox="1"/>
+          <p:nvPr/>
+        </p:nvSpPr>
+        <p:spPr>
+          <a:xfrm>
+            <a:off x="5161178" y="4224528"/>
+            <a:ext cx="2509418" cy="512064"/>
           </a:xfrm>
           <a:prstGeom prst="rect">
             <a:avLst/>
@@ -9348,16 +12684,40 @@
                 </a:solidFill>
                 <a:latin typeface="Calibri"/>
               </a:rPr>
-              <a:t>Assurance</a:t>
-            </a:r>
-            <a:r>
-              <a:rPr sz="1900">
+              <a:t>Reduce the impact</a:t>
+            </a:r>
+          </a:p>
+        </p:txBody>
+      </p:sp>
+      <p:sp>
+        <p:nvSpPr>
+          <p:cNvPr id="25" name="TextBox 24"/>
+          <p:cNvSpPr txBox="1"/>
+          <p:nvPr/>
+        </p:nvSpPr>
+        <p:spPr>
+          <a:xfrm>
+            <a:off x="4566818" y="4892040"/>
+            <a:ext cx="3058058" cy="1143000"/>
+          </a:xfrm>
+          <a:prstGeom prst="rect">
+            <a:avLst/>
+          </a:prstGeom>
+          <a:noFill/>
+        </p:spPr>
+        <p:txBody>
+          <a:bodyPr wrap="square" anchor="t" lIns="0" rIns="0" tIns="0" bIns="0"/>
+          <a:lstStyle/>
+          <a:p>
+            <a:pPr algn="l"/>
+            <a:r>
+              <a:rPr sz="2000" b="0" i="0">
                 <a:solidFill>
                   <a:srgbClr val="202122"/>
                 </a:solidFill>
                 <a:latin typeface="Calibri"/>
               </a:rPr>
-              <a:t>  confirming that security requirements have actually been met.</a:t>
+              <a:t>Segment networks, test recovery, separate duties, anonymise data.</a:t>
             </a:r>
           </a:p>
         </p:txBody>
@@ -9449,7 +12809,7 @@
                 </a:solidFill>
                 <a:latin typeface="Cambria"/>
               </a:rPr>
-              <a:t>Check your understanding</a:t>
+              <a:t>Quick check: Five secure design aims</a:t>
             </a:r>
           </a:p>
         </p:txBody>
@@ -9528,8 +12888,8 @@
         </p:nvSpPr>
         <p:spPr>
           <a:xfrm>
-            <a:off x="548640" y="1618488"/>
-            <a:ext cx="411480" cy="411480"/>
+            <a:off x="548640" y="1691640"/>
+            <a:ext cx="502920" cy="502920"/>
           </a:xfrm>
           <a:prstGeom prst="ellipse">
             <a:avLst/>
@@ -9562,7 +12922,7 @@
           <a:p>
             <a:pPr algn="ctr"/>
             <a:r>
-              <a:rPr sz="1400" b="1">
+              <a:rPr sz="1600" b="1">
                 <a:solidFill>
                   <a:srgbClr val="FFFFFF"/>
                 </a:solidFill>
@@ -9581,8 +12941,8 @@
         </p:nvSpPr>
         <p:spPr>
           <a:xfrm>
-            <a:off x="1234440" y="1600200"/>
-            <a:ext cx="10408615" cy="791870"/>
+            <a:off x="1371600" y="1645920"/>
+            <a:ext cx="10271455" cy="1188720"/>
           </a:xfrm>
           <a:prstGeom prst="rect">
             <a:avLst/>
@@ -9595,13 +12955,13 @@
           <a:p>
             <a:pPr algn="l"/>
             <a:r>
-              <a:rPr sz="2200" b="0" i="0">
+              <a:rPr sz="2400" b="0" i="0">
                 <a:solidFill>
                   <a:srgbClr val="202122"/>
                 </a:solidFill>
                 <a:latin typeface="Calibri"/>
               </a:rPr>
-              <a:t>What does segmentation limit?</a:t>
+              <a:t>What is zero trust?</a:t>
             </a:r>
           </a:p>
         </p:txBody>
@@ -9614,8 +12974,8 @@
         </p:nvSpPr>
         <p:spPr>
           <a:xfrm>
-            <a:off x="548640" y="2574950"/>
-            <a:ext cx="411480" cy="411480"/>
+            <a:off x="548640" y="3108960"/>
+            <a:ext cx="502920" cy="502920"/>
           </a:xfrm>
           <a:prstGeom prst="ellipse">
             <a:avLst/>
@@ -9648,7 +13008,7 @@
           <a:p>
             <a:pPr algn="ctr"/>
             <a:r>
-              <a:rPr sz="1400" b="1">
+              <a:rPr sz="1600" b="1">
                 <a:solidFill>
                   <a:srgbClr val="FFFFFF"/>
                 </a:solidFill>
@@ -9667,8 +13027,8 @@
         </p:nvSpPr>
         <p:spPr>
           <a:xfrm>
-            <a:off x="1234440" y="2556662"/>
-            <a:ext cx="10408615" cy="791870"/>
+            <a:off x="1371600" y="3063240"/>
+            <a:ext cx="10271455" cy="1188720"/>
           </a:xfrm>
           <a:prstGeom prst="rect">
             <a:avLst/>
@@ -9681,13 +13041,13 @@
           <a:p>
             <a:pPr algn="l"/>
             <a:r>
-              <a:rPr sz="2200" b="0" i="0">
+              <a:rPr sz="2400" b="0" i="0">
                 <a:solidFill>
                   <a:srgbClr val="202122"/>
                 </a:solidFill>
                 <a:latin typeface="Calibri"/>
               </a:rPr>
-              <a:t>What is zero trust?</a:t>
+              <a:t>Why keep monitoring separate from operational systems?</a:t>
             </a:r>
           </a:p>
         </p:txBody>
@@ -9700,8 +13060,8 @@
         </p:nvSpPr>
         <p:spPr>
           <a:xfrm>
-            <a:off x="548640" y="3531412"/>
-            <a:ext cx="411480" cy="411480"/>
+            <a:off x="548640" y="4526280"/>
+            <a:ext cx="502920" cy="502920"/>
           </a:xfrm>
           <a:prstGeom prst="ellipse">
             <a:avLst/>
@@ -9734,7 +13094,7 @@
           <a:p>
             <a:pPr algn="ctr"/>
             <a:r>
-              <a:rPr sz="1400" b="1">
+              <a:rPr sz="1600" b="1">
                 <a:solidFill>
                   <a:srgbClr val="FFFFFF"/>
                 </a:solidFill>
@@ -9753,8 +13113,8 @@
         </p:nvSpPr>
         <p:spPr>
           <a:xfrm>
-            <a:off x="1234440" y="3513124"/>
-            <a:ext cx="10408615" cy="791870"/>
+            <a:off x="1371600" y="4480560"/>
+            <a:ext cx="10271455" cy="1188720"/>
           </a:xfrm>
           <a:prstGeom prst="rect">
             <a:avLst/>
@@ -9767,80 +13127,27 @@
           <a:p>
             <a:pPr algn="l"/>
             <a:r>
-              <a:rPr sz="2200" b="0" i="0">
+              <a:rPr sz="2400" b="0" i="0">
                 <a:solidFill>
                   <a:srgbClr val="202122"/>
                 </a:solidFill>
                 <a:latin typeface="Calibri"/>
               </a:rPr>
-              <a:t>Where would you look for configuration evidence on a Windows PC?</a:t>
-            </a:r>
-          </a:p>
-        </p:txBody>
-      </p:sp>
-      <p:sp>
-        <p:nvSpPr>
-          <p:cNvPr id="12" name="Oval 11"/>
-          <p:cNvSpPr/>
-          <p:nvPr/>
-        </p:nvSpPr>
-        <p:spPr>
-          <a:xfrm>
-            <a:off x="548640" y="4487875"/>
-            <a:ext cx="411480" cy="411480"/>
-          </a:xfrm>
-          <a:prstGeom prst="ellipse">
-            <a:avLst/>
-          </a:prstGeom>
-          <a:solidFill>
-            <a:srgbClr val="E0463A"/>
-          </a:solidFill>
-          <a:ln>
-            <a:noFill/>
-          </a:ln>
-          <a:effectLst/>
-        </p:spPr>
-        <p:style>
-          <a:lnRef idx="1">
-            <a:schemeClr val="accent1"/>
-          </a:lnRef>
-          <a:fillRef idx="3">
-            <a:schemeClr val="accent1"/>
-          </a:fillRef>
-          <a:effectRef idx="2">
-            <a:schemeClr val="accent1"/>
-          </a:effectRef>
-          <a:fontRef idx="minor">
-            <a:schemeClr val="lt1"/>
-          </a:fontRef>
-        </p:style>
-        <p:txBody>
-          <a:bodyPr rtlCol="0" anchor="ctr" lIns="0" rIns="0" tIns="0" bIns="0"/>
-          <a:lstStyle/>
-          <a:p>
-            <a:pPr algn="ctr"/>
-            <a:r>
-              <a:rPr sz="1400" b="1">
-                <a:solidFill>
-                  <a:srgbClr val="FFFFFF"/>
-                </a:solidFill>
-                <a:latin typeface="Calibri"/>
-              </a:rPr>
-              <a:t>4</a:t>
-            </a:r>
-          </a:p>
-        </p:txBody>
-      </p:sp>
-      <p:sp>
-        <p:nvSpPr>
-          <p:cNvPr id="13" name="TextBox 12"/>
-          <p:cNvSpPr txBox="1"/>
-          <p:nvPr/>
-        </p:nvSpPr>
-        <p:spPr>
-          <a:xfrm>
-            <a:off x="1234440" y="4469587"/>
-            <a:ext cx="10408615" cy="791870"/>
+              <a:t>How does anonymising data reduce impact?</a:t>
+            </a:r>
+          </a:p>
+        </p:txBody>
+      </p:sp>
+      <p:sp>
+        <p:nvSpPr>
+          <p:cNvPr id="12" name="TextBox 11"/>
+          <p:cNvSpPr txBox="1"/>
+          <p:nvPr/>
+        </p:nvSpPr>
+        <p:spPr>
+          <a:xfrm>
+            <a:off x="548640" y="5852160"/>
+            <a:ext cx="11094415" cy="365760"/>
           </a:xfrm>
           <a:prstGeom prst="rect">
             <a:avLst/>
@@ -9853,99 +13160,13 @@
           <a:p>
             <a:pPr algn="l"/>
             <a:r>
-              <a:rPr sz="2200" b="0" i="0">
-                <a:solidFill>
-                  <a:srgbClr val="202122"/>
-                </a:solidFill>
-                <a:latin typeface="Calibri"/>
-              </a:rPr>
-              <a:t>What is a container?</a:t>
-            </a:r>
-          </a:p>
-        </p:txBody>
-      </p:sp>
-      <p:sp>
-        <p:nvSpPr>
-          <p:cNvPr id="14" name="Oval 13"/>
-          <p:cNvSpPr/>
-          <p:nvPr/>
-        </p:nvSpPr>
-        <p:spPr>
-          <a:xfrm>
-            <a:off x="548640" y="5444337"/>
-            <a:ext cx="411480" cy="411480"/>
-          </a:xfrm>
-          <a:prstGeom prst="ellipse">
-            <a:avLst/>
-          </a:prstGeom>
-          <a:solidFill>
-            <a:srgbClr val="E0463A"/>
-          </a:solidFill>
-          <a:ln>
-            <a:noFill/>
-          </a:ln>
-          <a:effectLst/>
-        </p:spPr>
-        <p:style>
-          <a:lnRef idx="1">
-            <a:schemeClr val="accent1"/>
-          </a:lnRef>
-          <a:fillRef idx="3">
-            <a:schemeClr val="accent1"/>
-          </a:fillRef>
-          <a:effectRef idx="2">
-            <a:schemeClr val="accent1"/>
-          </a:effectRef>
-          <a:fontRef idx="minor">
-            <a:schemeClr val="lt1"/>
-          </a:fontRef>
-        </p:style>
-        <p:txBody>
-          <a:bodyPr rtlCol="0" anchor="ctr" lIns="0" rIns="0" tIns="0" bIns="0"/>
-          <a:lstStyle/>
-          <a:p>
-            <a:pPr algn="ctr"/>
-            <a:r>
-              <a:rPr sz="1400" b="1">
-                <a:solidFill>
-                  <a:srgbClr val="FFFFFF"/>
-                </a:solidFill>
-                <a:latin typeface="Calibri"/>
-              </a:rPr>
-              <a:t>5</a:t>
-            </a:r>
-          </a:p>
-        </p:txBody>
-      </p:sp>
-      <p:sp>
-        <p:nvSpPr>
-          <p:cNvPr id="15" name="TextBox 14"/>
-          <p:cNvSpPr txBox="1"/>
-          <p:nvPr/>
-        </p:nvSpPr>
-        <p:spPr>
-          <a:xfrm>
-            <a:off x="1234440" y="5426049"/>
-            <a:ext cx="10408615" cy="791870"/>
-          </a:xfrm>
-          <a:prstGeom prst="rect">
-            <a:avLst/>
-          </a:prstGeom>
-          <a:noFill/>
-        </p:spPr>
-        <p:txBody>
-          <a:bodyPr wrap="square" anchor="t" lIns="0" rIns="0" tIns="0" bIns="0"/>
-          <a:lstStyle/>
-          <a:p>
-            <a:pPr algn="l"/>
-            <a:r>
-              <a:rPr sz="2200" b="0" i="0">
-                <a:solidFill>
-                  <a:srgbClr val="202122"/>
-                </a:solidFill>
-                <a:latin typeface="Calibri"/>
-              </a:rPr>
-              <a:t>Define defence in depth.</a:t>
+              <a:rPr sz="1300" b="0" i="1">
+                <a:solidFill>
+                  <a:srgbClr val="54595D"/>
+                </a:solidFill>
+                <a:latin typeface="Calibri"/>
+              </a:rPr>
+              <a:t>Answer on mini whiteboards or in your book. Answers are in the speaker notes.</a:t>
             </a:r>
           </a:p>
         </p:txBody>
@@ -10037,7 +13258,7 @@
                 </a:solidFill>
                 <a:latin typeface="Cambria"/>
               </a:rPr>
-              <a:t>Answers</a:t>
+              <a:t>Operating systems and investigation</a:t>
             </a:r>
           </a:p>
         </p:txBody>
@@ -10110,14 +13331,138 @@
       </p:sp>
       <p:sp>
         <p:nvSpPr>
-          <p:cNvPr id="6" name="Oval 5"/>
+          <p:cNvPr id="6" name="TextBox 5"/>
+          <p:cNvSpPr txBox="1"/>
+          <p:nvPr/>
+        </p:nvSpPr>
+        <p:spPr>
+          <a:xfrm>
+            <a:off x="548640" y="1554480"/>
+            <a:ext cx="6720840" cy="4617720"/>
+          </a:xfrm>
+          <a:prstGeom prst="rect">
+            <a:avLst/>
+          </a:prstGeom>
+          <a:noFill/>
+        </p:spPr>
+        <p:txBody>
+          <a:bodyPr wrap="square" lIns="0" rIns="0" tIns="0" bIns="0">
+            <a:spAutoFit/>
+          </a:bodyPr>
+          <a:lstStyle/>
+          <a:p>
+            <a:pPr>
+              <a:spcAft>
+                <a:spcPts val="1260"/>
+              </a:spcAft>
+            </a:pPr>
+            <a:r>
+              <a:rPr sz="2100" b="0">
+                <a:solidFill>
+                  <a:srgbClr val="202122"/>
+                </a:solidFill>
+                <a:latin typeface="Calibri"/>
+              </a:rPr>
+              <a:t>Investigators need to know where operating systems store evidence.</a:t>
+            </a:r>
+          </a:p>
+          <a:p>
+            <a:pPr>
+              <a:spcAft>
+                <a:spcPts val="1260"/>
+              </a:spcAft>
+            </a:pPr>
+            <a:r>
+              <a:rPr sz="2100" b="0">
+                <a:solidFill>
+                  <a:srgbClr val="202122"/>
+                </a:solidFill>
+                <a:latin typeface="Calibri"/>
+              </a:rPr>
+              <a:t>Windows keeps configuration in the registry; Linux in configuration files; macOS in library and preference files. Logs record network traffic, logins and system events. The file system (NTFS, FAT32, exFAT, APFS or ext4, depending on the OS) records files and their timestamps. Running processes show what's happening right now, including any malware.</a:t>
+            </a:r>
+          </a:p>
+          <a:p>
+            <a:pPr>
+              <a:spcAft>
+                <a:spcPts val="1260"/>
+              </a:spcAft>
+            </a:pPr>
+            <a:r>
+              <a:rPr sz="2100" b="1">
+                <a:solidFill>
+                  <a:srgbClr val="202122"/>
+                </a:solidFill>
+                <a:latin typeface="Calibri"/>
+              </a:rPr>
+              <a:t>OS functions also help security:</a:t>
+            </a:r>
+            <a:r>
+              <a:rPr sz="2100" b="0">
+                <a:solidFill>
+                  <a:srgbClr val="202122"/>
+                </a:solidFill>
+                <a:latin typeface="Calibri"/>
+              </a:rPr>
+              <a:t> zero trust, device management that requires signed drivers, and processor management that protects against side-channel attacks.</a:t>
+            </a:r>
+          </a:p>
+        </p:txBody>
+      </p:sp>
+      <p:sp>
+        <p:nvSpPr>
+          <p:cNvPr id="7" name="Rounded Rectangle 6"/>
           <p:cNvSpPr/>
           <p:nvPr/>
         </p:nvSpPr>
         <p:spPr>
           <a:xfrm>
-            <a:off x="548640" y="1618488"/>
-            <a:ext cx="411480" cy="411480"/>
+            <a:off x="7772400" y="1554480"/>
+            <a:ext cx="3867912" cy="4526280"/>
+          </a:xfrm>
+          <a:prstGeom prst="roundRect">
+            <a:avLst>
+              <a:gd name="adj" fmla="val 8000"/>
+            </a:avLst>
+          </a:prstGeom>
+          <a:solidFill>
+            <a:srgbClr val="03306E"/>
+          </a:solidFill>
+          <a:ln>
+            <a:noFill/>
+          </a:ln>
+          <a:effectLst/>
+        </p:spPr>
+        <p:style>
+          <a:lnRef idx="1">
+            <a:schemeClr val="accent1"/>
+          </a:lnRef>
+          <a:fillRef idx="3">
+            <a:schemeClr val="accent1"/>
+          </a:fillRef>
+          <a:effectRef idx="2">
+            <a:schemeClr val="accent1"/>
+          </a:effectRef>
+          <a:fontRef idx="minor">
+            <a:schemeClr val="lt1"/>
+          </a:fontRef>
+        </p:style>
+        <p:txBody>
+          <a:bodyPr rtlCol="0" anchor="ctr"/>
+          <a:lstStyle/>
+          <a:p/>
+        </p:txBody>
+      </p:sp>
+      <p:sp>
+        <p:nvSpPr>
+          <p:cNvPr id="8" name="Oval 7"/>
+          <p:cNvSpPr/>
+          <p:nvPr/>
+        </p:nvSpPr>
+        <p:spPr>
+          <a:xfrm>
+            <a:off x="8046720" y="1828800"/>
+            <a:ext cx="548640" cy="548640"/>
           </a:xfrm>
           <a:prstGeom prst="ellipse">
             <a:avLst/>
@@ -10150,27 +13495,27 @@
           <a:p>
             <a:pPr algn="ctr"/>
             <a:r>
-              <a:rPr sz="1400" b="1">
+              <a:rPr sz="1300" b="1">
                 <a:solidFill>
                   <a:srgbClr val="FFFFFF"/>
                 </a:solidFill>
                 <a:latin typeface="Calibri"/>
               </a:rPr>
-              <a:t>1</a:t>
-            </a:r>
-          </a:p>
-        </p:txBody>
-      </p:sp>
-      <p:sp>
-        <p:nvSpPr>
-          <p:cNvPr id="7" name="TextBox 6"/>
-          <p:cNvSpPr txBox="1"/>
-          <p:nvPr/>
-        </p:nvSpPr>
-        <p:spPr>
-          <a:xfrm>
-            <a:off x="1234440" y="1600200"/>
-            <a:ext cx="10408615" cy="791870"/>
+              <a:t>e.g.</a:t>
+            </a:r>
+          </a:p>
+        </p:txBody>
+      </p:sp>
+      <p:sp>
+        <p:nvSpPr>
+          <p:cNvPr id="9" name="TextBox 8"/>
+          <p:cNvSpPr txBox="1"/>
+          <p:nvPr/>
+        </p:nvSpPr>
+        <p:spPr>
+          <a:xfrm>
+            <a:off x="8046720" y="2560320"/>
+            <a:ext cx="3291840" cy="365760"/>
           </a:xfrm>
           <a:prstGeom prst="rect">
             <a:avLst/>
@@ -10183,412 +13528,46 @@
           <a:p>
             <a:pPr algn="l"/>
             <a:r>
-              <a:rPr sz="1800" b="0" i="0">
-                <a:solidFill>
-                  <a:srgbClr val="54595D"/>
-                </a:solidFill>
-                <a:latin typeface="Calibri"/>
-              </a:rPr>
-              <a:t>What does segmentation limit?</a:t>
-            </a:r>
-          </a:p>
-          <a:p>
-            <a:r>
-              <a:rPr sz="1800" b="1">
-                <a:solidFill>
-                  <a:srgbClr val="03306E"/>
-                </a:solidFill>
-                <a:latin typeface="Calibri"/>
-              </a:rPr>
-              <a:t>Lateral movement of attackers or malware.</a:t>
-            </a:r>
-          </a:p>
-        </p:txBody>
-      </p:sp>
-      <p:sp>
-        <p:nvSpPr>
-          <p:cNvPr id="8" name="Oval 7"/>
-          <p:cNvSpPr/>
-          <p:nvPr/>
-        </p:nvSpPr>
-        <p:spPr>
-          <a:xfrm>
-            <a:off x="548640" y="2574950"/>
-            <a:ext cx="411480" cy="411480"/>
-          </a:xfrm>
-          <a:prstGeom prst="ellipse">
-            <a:avLst/>
-          </a:prstGeom>
-          <a:solidFill>
-            <a:srgbClr val="E0463A"/>
-          </a:solidFill>
-          <a:ln>
-            <a:noFill/>
-          </a:ln>
-          <a:effectLst/>
-        </p:spPr>
-        <p:style>
-          <a:lnRef idx="1">
-            <a:schemeClr val="accent1"/>
-          </a:lnRef>
-          <a:fillRef idx="3">
-            <a:schemeClr val="accent1"/>
-          </a:fillRef>
-          <a:effectRef idx="2">
-            <a:schemeClr val="accent1"/>
-          </a:effectRef>
-          <a:fontRef idx="minor">
-            <a:schemeClr val="lt1"/>
-          </a:fontRef>
-        </p:style>
-        <p:txBody>
-          <a:bodyPr rtlCol="0" anchor="ctr" lIns="0" rIns="0" tIns="0" bIns="0"/>
-          <a:lstStyle/>
-          <a:p>
-            <a:pPr algn="ctr"/>
-            <a:r>
-              <a:rPr sz="1400" b="1">
+              <a:rPr sz="1300" b="1" i="0">
+                <a:solidFill>
+                  <a:srgbClr val="A9C8F0"/>
+                </a:solidFill>
+                <a:latin typeface="Calibri"/>
+              </a:rPr>
+              <a:t>EXAMPLE</a:t>
+            </a:r>
+          </a:p>
+        </p:txBody>
+      </p:sp>
+      <p:sp>
+        <p:nvSpPr>
+          <p:cNvPr id="10" name="TextBox 9"/>
+          <p:cNvSpPr txBox="1"/>
+          <p:nvPr/>
+        </p:nvSpPr>
+        <p:spPr>
+          <a:xfrm>
+            <a:off x="8046720" y="2971800"/>
+            <a:ext cx="3291840" cy="2971800"/>
+          </a:xfrm>
+          <a:prstGeom prst="rect">
+            <a:avLst/>
+          </a:prstGeom>
+          <a:noFill/>
+        </p:spPr>
+        <p:txBody>
+          <a:bodyPr wrap="square" anchor="t" lIns="0" rIns="0" tIns="0" bIns="0"/>
+          <a:lstStyle/>
+          <a:p>
+            <a:pPr algn="l"/>
+            <a:r>
+              <a:rPr sz="1900" b="0" i="0">
                 <a:solidFill>
                   <a:srgbClr val="FFFFFF"/>
                 </a:solidFill>
-                <a:latin typeface="Calibri"/>
-              </a:rPr>
-              <a:t>2</a:t>
-            </a:r>
-          </a:p>
-        </p:txBody>
-      </p:sp>
-      <p:sp>
-        <p:nvSpPr>
-          <p:cNvPr id="9" name="TextBox 8"/>
-          <p:cNvSpPr txBox="1"/>
-          <p:nvPr/>
-        </p:nvSpPr>
-        <p:spPr>
-          <a:xfrm>
-            <a:off x="1234440" y="2556662"/>
-            <a:ext cx="10408615" cy="791870"/>
-          </a:xfrm>
-          <a:prstGeom prst="rect">
-            <a:avLst/>
-          </a:prstGeom>
-          <a:noFill/>
-        </p:spPr>
-        <p:txBody>
-          <a:bodyPr wrap="square" anchor="t" lIns="0" rIns="0" tIns="0" bIns="0"/>
-          <a:lstStyle/>
-          <a:p>
-            <a:pPr algn="l"/>
-            <a:r>
-              <a:rPr sz="1800" b="0" i="0">
-                <a:solidFill>
-                  <a:srgbClr val="54595D"/>
-                </a:solidFill>
-                <a:latin typeface="Calibri"/>
-              </a:rPr>
-              <a:t>What is zero trust?</a:t>
-            </a:r>
-          </a:p>
-          <a:p>
-            <a:r>
-              <a:rPr sz="1800" b="1">
-                <a:solidFill>
-                  <a:srgbClr val="03306E"/>
-                </a:solidFill>
-                <a:latin typeface="Calibri"/>
-              </a:rPr>
-              <a:t>Never trusting any user or device by default, even inside the network.</a:t>
-            </a:r>
-          </a:p>
-        </p:txBody>
-      </p:sp>
-      <p:sp>
-        <p:nvSpPr>
-          <p:cNvPr id="10" name="Oval 9"/>
-          <p:cNvSpPr/>
-          <p:nvPr/>
-        </p:nvSpPr>
-        <p:spPr>
-          <a:xfrm>
-            <a:off x="548640" y="3531412"/>
-            <a:ext cx="411480" cy="411480"/>
-          </a:xfrm>
-          <a:prstGeom prst="ellipse">
-            <a:avLst/>
-          </a:prstGeom>
-          <a:solidFill>
-            <a:srgbClr val="E0463A"/>
-          </a:solidFill>
-          <a:ln>
-            <a:noFill/>
-          </a:ln>
-          <a:effectLst/>
-        </p:spPr>
-        <p:style>
-          <a:lnRef idx="1">
-            <a:schemeClr val="accent1"/>
-          </a:lnRef>
-          <a:fillRef idx="3">
-            <a:schemeClr val="accent1"/>
-          </a:fillRef>
-          <a:effectRef idx="2">
-            <a:schemeClr val="accent1"/>
-          </a:effectRef>
-          <a:fontRef idx="minor">
-            <a:schemeClr val="lt1"/>
-          </a:fontRef>
-        </p:style>
-        <p:txBody>
-          <a:bodyPr rtlCol="0" anchor="ctr" lIns="0" rIns="0" tIns="0" bIns="0"/>
-          <a:lstStyle/>
-          <a:p>
-            <a:pPr algn="ctr"/>
-            <a:r>
-              <a:rPr sz="1400" b="1">
-                <a:solidFill>
-                  <a:srgbClr val="FFFFFF"/>
-                </a:solidFill>
-                <a:latin typeface="Calibri"/>
-              </a:rPr>
-              <a:t>3</a:t>
-            </a:r>
-          </a:p>
-        </p:txBody>
-      </p:sp>
-      <p:sp>
-        <p:nvSpPr>
-          <p:cNvPr id="11" name="TextBox 10"/>
-          <p:cNvSpPr txBox="1"/>
-          <p:nvPr/>
-        </p:nvSpPr>
-        <p:spPr>
-          <a:xfrm>
-            <a:off x="1234440" y="3513124"/>
-            <a:ext cx="10408615" cy="791870"/>
-          </a:xfrm>
-          <a:prstGeom prst="rect">
-            <a:avLst/>
-          </a:prstGeom>
-          <a:noFill/>
-        </p:spPr>
-        <p:txBody>
-          <a:bodyPr wrap="square" anchor="t" lIns="0" rIns="0" tIns="0" bIns="0"/>
-          <a:lstStyle/>
-          <a:p>
-            <a:pPr algn="l"/>
-            <a:r>
-              <a:rPr sz="1800" b="0" i="0">
-                <a:solidFill>
-                  <a:srgbClr val="54595D"/>
-                </a:solidFill>
-                <a:latin typeface="Calibri"/>
-              </a:rPr>
-              <a:t>Where would you look for configuration evidence on a Windows PC?</a:t>
-            </a:r>
-          </a:p>
-          <a:p>
-            <a:r>
-              <a:rPr sz="1800" b="1">
-                <a:solidFill>
-                  <a:srgbClr val="03306E"/>
-                </a:solidFill>
-                <a:latin typeface="Calibri"/>
-              </a:rPr>
-              <a:t>The registry.</a:t>
-            </a:r>
-          </a:p>
-        </p:txBody>
-      </p:sp>
-      <p:sp>
-        <p:nvSpPr>
-          <p:cNvPr id="12" name="Oval 11"/>
-          <p:cNvSpPr/>
-          <p:nvPr/>
-        </p:nvSpPr>
-        <p:spPr>
-          <a:xfrm>
-            <a:off x="548640" y="4487875"/>
-            <a:ext cx="411480" cy="411480"/>
-          </a:xfrm>
-          <a:prstGeom prst="ellipse">
-            <a:avLst/>
-          </a:prstGeom>
-          <a:solidFill>
-            <a:srgbClr val="E0463A"/>
-          </a:solidFill>
-          <a:ln>
-            <a:noFill/>
-          </a:ln>
-          <a:effectLst/>
-        </p:spPr>
-        <p:style>
-          <a:lnRef idx="1">
-            <a:schemeClr val="accent1"/>
-          </a:lnRef>
-          <a:fillRef idx="3">
-            <a:schemeClr val="accent1"/>
-          </a:fillRef>
-          <a:effectRef idx="2">
-            <a:schemeClr val="accent1"/>
-          </a:effectRef>
-          <a:fontRef idx="minor">
-            <a:schemeClr val="lt1"/>
-          </a:fontRef>
-        </p:style>
-        <p:txBody>
-          <a:bodyPr rtlCol="0" anchor="ctr" lIns="0" rIns="0" tIns="0" bIns="0"/>
-          <a:lstStyle/>
-          <a:p>
-            <a:pPr algn="ctr"/>
-            <a:r>
-              <a:rPr sz="1400" b="1">
-                <a:solidFill>
-                  <a:srgbClr val="FFFFFF"/>
-                </a:solidFill>
-                <a:latin typeface="Calibri"/>
-              </a:rPr>
-              <a:t>4</a:t>
-            </a:r>
-          </a:p>
-        </p:txBody>
-      </p:sp>
-      <p:sp>
-        <p:nvSpPr>
-          <p:cNvPr id="13" name="TextBox 12"/>
-          <p:cNvSpPr txBox="1"/>
-          <p:nvPr/>
-        </p:nvSpPr>
-        <p:spPr>
-          <a:xfrm>
-            <a:off x="1234440" y="4469587"/>
-            <a:ext cx="10408615" cy="791870"/>
-          </a:xfrm>
-          <a:prstGeom prst="rect">
-            <a:avLst/>
-          </a:prstGeom>
-          <a:noFill/>
-        </p:spPr>
-        <p:txBody>
-          <a:bodyPr wrap="square" anchor="t" lIns="0" rIns="0" tIns="0" bIns="0"/>
-          <a:lstStyle/>
-          <a:p>
-            <a:pPr algn="l"/>
-            <a:r>
-              <a:rPr sz="1800" b="0" i="0">
-                <a:solidFill>
-                  <a:srgbClr val="54595D"/>
-                </a:solidFill>
-                <a:latin typeface="Calibri"/>
-              </a:rPr>
-              <a:t>What is a container?</a:t>
-            </a:r>
-          </a:p>
-          <a:p>
-            <a:r>
-              <a:rPr sz="1800" b="1">
-                <a:solidFill>
-                  <a:srgbClr val="03306E"/>
-                </a:solidFill>
-                <a:latin typeface="Calibri"/>
-              </a:rPr>
-              <a:t>An isolated, portable package holding only what an application needs to run.</a:t>
-            </a:r>
-          </a:p>
-        </p:txBody>
-      </p:sp>
-      <p:sp>
-        <p:nvSpPr>
-          <p:cNvPr id="14" name="Oval 13"/>
-          <p:cNvSpPr/>
-          <p:nvPr/>
-        </p:nvSpPr>
-        <p:spPr>
-          <a:xfrm>
-            <a:off x="548640" y="5444337"/>
-            <a:ext cx="411480" cy="411480"/>
-          </a:xfrm>
-          <a:prstGeom prst="ellipse">
-            <a:avLst/>
-          </a:prstGeom>
-          <a:solidFill>
-            <a:srgbClr val="E0463A"/>
-          </a:solidFill>
-          <a:ln>
-            <a:noFill/>
-          </a:ln>
-          <a:effectLst/>
-        </p:spPr>
-        <p:style>
-          <a:lnRef idx="1">
-            <a:schemeClr val="accent1"/>
-          </a:lnRef>
-          <a:fillRef idx="3">
-            <a:schemeClr val="accent1"/>
-          </a:fillRef>
-          <a:effectRef idx="2">
-            <a:schemeClr val="accent1"/>
-          </a:effectRef>
-          <a:fontRef idx="minor">
-            <a:schemeClr val="lt1"/>
-          </a:fontRef>
-        </p:style>
-        <p:txBody>
-          <a:bodyPr rtlCol="0" anchor="ctr" lIns="0" rIns="0" tIns="0" bIns="0"/>
-          <a:lstStyle/>
-          <a:p>
-            <a:pPr algn="ctr"/>
-            <a:r>
-              <a:rPr sz="1400" b="1">
-                <a:solidFill>
-                  <a:srgbClr val="FFFFFF"/>
-                </a:solidFill>
-                <a:latin typeface="Calibri"/>
-              </a:rPr>
-              <a:t>5</a:t>
-            </a:r>
-          </a:p>
-        </p:txBody>
-      </p:sp>
-      <p:sp>
-        <p:nvSpPr>
-          <p:cNvPr id="15" name="TextBox 14"/>
-          <p:cNvSpPr txBox="1"/>
-          <p:nvPr/>
-        </p:nvSpPr>
-        <p:spPr>
-          <a:xfrm>
-            <a:off x="1234440" y="5426049"/>
-            <a:ext cx="10408615" cy="791870"/>
-          </a:xfrm>
-          <a:prstGeom prst="rect">
-            <a:avLst/>
-          </a:prstGeom>
-          <a:noFill/>
-        </p:spPr>
-        <p:txBody>
-          <a:bodyPr wrap="square" anchor="t" lIns="0" rIns="0" tIns="0" bIns="0"/>
-          <a:lstStyle/>
-          <a:p>
-            <a:pPr algn="l"/>
-            <a:r>
-              <a:rPr sz="1800" b="0" i="0">
-                <a:solidFill>
-                  <a:srgbClr val="54595D"/>
-                </a:solidFill>
-                <a:latin typeface="Calibri"/>
-              </a:rPr>
-              <a:t>Define defence in depth.</a:t>
-            </a:r>
-          </a:p>
-          <a:p>
-            <a:r>
-              <a:rPr sz="1800" b="1">
-                <a:solidFill>
-                  <a:srgbClr val="03306E"/>
-                </a:solidFill>
-                <a:latin typeface="Calibri"/>
-              </a:rPr>
-              <a:t>Layered security so a single failure does not compromise the whole system.</a:t>
+                <a:latin typeface="Cambria"/>
+              </a:rPr>
+              <a:t>An investigator checks the Windows registry's Run keys and finds an unknown program set to start at every login: likely malware persistence.</a:t>
             </a:r>
           </a:p>
         </p:txBody>
